--- a/Slides/2025-2026/Slides/Statistiek 2024-2025 -- college 6a -- Poissonverdeling.pptx
+++ b/Slides/2025-2026/Slides/Statistiek 2024-2025 -- college 6a -- Poissonverdeling.pptx
@@ -4,40 +4,42 @@
   <p:sldMasterIdLst>
     <p:sldMasterId id="2147483648" r:id="rId1"/>
     <p:sldMasterId id="2147483686" r:id="rId2"/>
+    <p:sldMasterId id="2147483698" r:id="rId3"/>
   </p:sldMasterIdLst>
   <p:notesMasterIdLst>
-    <p:notesMasterId r:id="rId29"/>
+    <p:notesMasterId r:id="rId31"/>
   </p:notesMasterIdLst>
   <p:handoutMasterIdLst>
-    <p:handoutMasterId r:id="rId30"/>
+    <p:handoutMasterId r:id="rId32"/>
   </p:handoutMasterIdLst>
   <p:sldIdLst>
-    <p:sldId id="256" r:id="rId3"/>
-    <p:sldId id="257" r:id="rId4"/>
-    <p:sldId id="287" r:id="rId5"/>
-    <p:sldId id="288" r:id="rId6"/>
-    <p:sldId id="286" r:id="rId7"/>
-    <p:sldId id="309" r:id="rId8"/>
-    <p:sldId id="310" r:id="rId9"/>
-    <p:sldId id="311" r:id="rId10"/>
-    <p:sldId id="312" r:id="rId11"/>
-    <p:sldId id="289" r:id="rId12"/>
-    <p:sldId id="290" r:id="rId13"/>
-    <p:sldId id="291" r:id="rId14"/>
-    <p:sldId id="292" r:id="rId15"/>
-    <p:sldId id="293" r:id="rId16"/>
-    <p:sldId id="294" r:id="rId17"/>
-    <p:sldId id="295" r:id="rId18"/>
-    <p:sldId id="296" r:id="rId19"/>
-    <p:sldId id="298" r:id="rId20"/>
-    <p:sldId id="301" r:id="rId21"/>
-    <p:sldId id="305" r:id="rId22"/>
-    <p:sldId id="307" r:id="rId23"/>
-    <p:sldId id="308" r:id="rId24"/>
-    <p:sldId id="304" r:id="rId25"/>
-    <p:sldId id="315" r:id="rId26"/>
-    <p:sldId id="314" r:id="rId27"/>
-    <p:sldId id="316" r:id="rId28"/>
+    <p:sldId id="317" r:id="rId4"/>
+    <p:sldId id="318" r:id="rId5"/>
+    <p:sldId id="257" r:id="rId6"/>
+    <p:sldId id="287" r:id="rId7"/>
+    <p:sldId id="288" r:id="rId8"/>
+    <p:sldId id="286" r:id="rId9"/>
+    <p:sldId id="309" r:id="rId10"/>
+    <p:sldId id="310" r:id="rId11"/>
+    <p:sldId id="311" r:id="rId12"/>
+    <p:sldId id="312" r:id="rId13"/>
+    <p:sldId id="289" r:id="rId14"/>
+    <p:sldId id="290" r:id="rId15"/>
+    <p:sldId id="291" r:id="rId16"/>
+    <p:sldId id="292" r:id="rId17"/>
+    <p:sldId id="293" r:id="rId18"/>
+    <p:sldId id="294" r:id="rId19"/>
+    <p:sldId id="295" r:id="rId20"/>
+    <p:sldId id="296" r:id="rId21"/>
+    <p:sldId id="298" r:id="rId22"/>
+    <p:sldId id="301" r:id="rId23"/>
+    <p:sldId id="305" r:id="rId24"/>
+    <p:sldId id="307" r:id="rId25"/>
+    <p:sldId id="308" r:id="rId26"/>
+    <p:sldId id="304" r:id="rId27"/>
+    <p:sldId id="315" r:id="rId28"/>
+    <p:sldId id="314" r:id="rId29"/>
+    <p:sldId id="316" r:id="rId30"/>
   </p:sldIdLst>
   <p:sldSz cx="12192000" cy="6858000"/>
   <p:notesSz cx="6921500" cy="9423400"/>
@@ -424,7 +426,7 @@
               <a:pPr>
                 <a:defRPr/>
               </a:pPr>
-              <a:t>‹#›</a:t>
+              <a:t>‹nr.›</a:t>
             </a:fld>
             <a:endParaRPr lang="nl-NL"/>
           </a:p>
@@ -840,7 +842,7 @@
               <a:pPr>
                 <a:defRPr/>
               </a:pPr>
-              <a:t>‹#›</a:t>
+              <a:t>‹nr.›</a:t>
             </a:fld>
             <a:endParaRPr lang="en-US"/>
           </a:p>
@@ -2291,7 +2293,7 @@
               <a:pPr>
                 <a:defRPr/>
               </a:pPr>
-              <a:t>18 april 2025</a:t>
+              <a:t>9 april 2026</a:t>
             </a:fld>
             <a:endParaRPr lang="nl-NL" dirty="0"/>
           </a:p>
@@ -2426,7 +2428,7 @@
             </a:pPr>
             <a:fld id="{B65BA442-CF7C-446F-A5C6-9C80A1EA92B1}" type="datetime4">
               <a:rPr lang="nl-NL" smtClean="0"/>
-              <a:t>18 april 2025</a:t>
+              <a:t>9 april 2026</a:t>
             </a:fld>
             <a:endParaRPr lang="nl-NL" dirty="0"/>
           </a:p>
@@ -2583,7 +2585,7 @@
             </a:pPr>
             <a:fld id="{6ADACE4E-5F74-4A37-951C-E2AD8C0ABF31}" type="datetime4">
               <a:rPr lang="nl-NL" smtClean="0"/>
-              <a:t>18 april 2025</a:t>
+              <a:t>9 april 2026</a:t>
             </a:fld>
             <a:endParaRPr lang="nl-NL" dirty="0"/>
           </a:p>
@@ -2836,7 +2838,7 @@
             </a:pPr>
             <a:fld id="{8C104096-2ED3-453C-8E78-E00AE5454056}" type="datetime4">
               <a:rPr lang="nl-NL" smtClean="0"/>
-              <a:t>18 april 2025</a:t>
+              <a:t>9 april 2026</a:t>
             </a:fld>
             <a:endParaRPr lang="nl-NL" dirty="0"/>
           </a:p>
@@ -3233,7 +3235,7 @@
             </a:pPr>
             <a:fld id="{57509A98-FEF1-486E-836B-0182E6ED18CF}" type="datetime4">
               <a:rPr lang="nl-NL" smtClean="0"/>
-              <a:t>18 april 2025</a:t>
+              <a:t>9 april 2026</a:t>
             </a:fld>
             <a:endParaRPr lang="nl-NL" dirty="0"/>
           </a:p>
@@ -3316,7 +3318,7 @@
             </a:pPr>
             <a:fld id="{A45E3D14-5EDE-4B69-BCF9-7871170F920B}" type="datetime4">
               <a:rPr lang="nl-NL" smtClean="0"/>
-              <a:t>18 april 2025</a:t>
+              <a:t>9 april 2026</a:t>
             </a:fld>
             <a:endParaRPr lang="nl-NL" dirty="0"/>
           </a:p>
@@ -3376,7 +3378,7 @@
             </a:pPr>
             <a:fld id="{403C7BC3-7CD1-41E9-B4B5-084A2D120935}" type="datetime4">
               <a:rPr lang="nl-NL" smtClean="0"/>
-              <a:t>18 april 2025</a:t>
+              <a:t>9 april 2026</a:t>
             </a:fld>
             <a:endParaRPr lang="nl-NL" dirty="0"/>
           </a:p>
@@ -3618,7 +3620,7 @@
             </a:pPr>
             <a:fld id="{B9AD4273-E583-4234-8A15-01E636C03DBC}" type="datetime4">
               <a:rPr lang="nl-NL" smtClean="0"/>
-              <a:t>18 april 2025</a:t>
+              <a:t>9 april 2026</a:t>
             </a:fld>
             <a:endParaRPr lang="nl-NL" dirty="0"/>
           </a:p>
@@ -4011,7 +4013,7 @@
             </a:pPr>
             <a:fld id="{6DF2C121-03D7-4443-9B4B-D1ED7325FD6F}" type="datetime4">
               <a:rPr lang="nl-NL" smtClean="0"/>
-              <a:t>18 april 2025</a:t>
+              <a:t>9 april 2026</a:t>
             </a:fld>
             <a:endParaRPr lang="nl-NL" dirty="0"/>
           </a:p>
@@ -4146,7 +4148,7 @@
             </a:pPr>
             <a:fld id="{83790545-2047-4712-ADC2-09AB81876442}" type="datetime4">
               <a:rPr lang="nl-NL" smtClean="0"/>
-              <a:t>18 april 2025</a:t>
+              <a:t>9 april 2026</a:t>
             </a:fld>
             <a:endParaRPr lang="nl-NL" dirty="0"/>
           </a:p>
@@ -4271,6 +4273,1658 @@
     <p:extLst>
       <p:ext uri="{BB962C8B-B14F-4D97-AF65-F5344CB8AC3E}">
         <p14:creationId xmlns:p14="http://schemas.microsoft.com/office/powerpoint/2010/main" val="2533543797"/>
+      </p:ext>
+    </p:extLst>
+  </p:cSld>
+  <p:clrMapOvr>
+    <a:masterClrMapping/>
+  </p:clrMapOvr>
+</p:sldLayout>
+</file>
+
+<file path=ppt/slideLayouts/slideLayout23.xml><?xml version="1.0" encoding="utf-8"?>
+<p:sldLayout xmlns:a="http://schemas.openxmlformats.org/drawingml/2006/main" xmlns:r="http://schemas.openxmlformats.org/officeDocument/2006/relationships" xmlns:p="http://schemas.openxmlformats.org/presentationml/2006/main" showMasterSp="0" preserve="1" userDrawn="1">
+  <p:cSld name="Titeldia">
+    <p:spTree>
+      <p:nvGrpSpPr>
+        <p:cNvPr id="1" name=""/>
+        <p:cNvGrpSpPr/>
+        <p:nvPr/>
+      </p:nvGrpSpPr>
+      <p:grpSpPr>
+        <a:xfrm>
+          <a:off x="0" y="0"/>
+          <a:ext cx="0" cy="0"/>
+          <a:chOff x="0" y="0"/>
+          <a:chExt cx="0" cy="0"/>
+        </a:xfrm>
+      </p:grpSpPr>
+      <p:sp>
+        <p:nvSpPr>
+          <p:cNvPr id="4" name="Rectangle 189" descr="Bar_Right"/>
+          <p:cNvSpPr>
+            <a:spLocks noChangeArrowheads="1"/>
+          </p:cNvSpPr>
+          <p:nvPr/>
+        </p:nvSpPr>
+        <p:spPr bwMode="auto">
+          <a:xfrm>
+            <a:off x="6096000" y="0"/>
+            <a:ext cx="6096000" cy="6858000"/>
+          </a:xfrm>
+          <a:prstGeom prst="rect">
+            <a:avLst/>
+          </a:prstGeom>
+          <a:solidFill>
+            <a:srgbClr val="E17000"/>
+          </a:solidFill>
+          <a:ln>
+            <a:noFill/>
+          </a:ln>
+          <a:effectLst/>
+          <a:extLst/>
+        </p:spPr>
+        <p:txBody>
+          <a:bodyPr wrap="none" lIns="0" tIns="0" rIns="0" bIns="0" anchor="ctr"/>
+          <a:lstStyle/>
+          <a:p>
+            <a:pPr algn="ctr" eaLnBrk="0" hangingPunct="0">
+              <a:spcBef>
+                <a:spcPct val="50000"/>
+              </a:spcBef>
+              <a:defRPr/>
+            </a:pPr>
+            <a:endParaRPr lang="nl-NL" sz="2600">
+              <a:solidFill>
+                <a:schemeClr val="bg1"/>
+              </a:solidFill>
+            </a:endParaRPr>
+          </a:p>
+        </p:txBody>
+      </p:sp>
+      <p:sp>
+        <p:nvSpPr>
+          <p:cNvPr id="5" name="Rectangle 157"/>
+          <p:cNvSpPr>
+            <a:spLocks noChangeArrowheads="1"/>
+          </p:cNvSpPr>
+          <p:nvPr/>
+        </p:nvSpPr>
+        <p:spPr bwMode="auto">
+          <a:xfrm>
+            <a:off x="6578601" y="2474914"/>
+            <a:ext cx="4798484" cy="942975"/>
+          </a:xfrm>
+          <a:prstGeom prst="rect">
+            <a:avLst/>
+          </a:prstGeom>
+          <a:noFill/>
+          <a:ln>
+            <a:noFill/>
+          </a:ln>
+          <a:effectLst/>
+          <a:extLst/>
+        </p:spPr>
+        <p:txBody>
+          <a:bodyPr anchor="ctr"/>
+          <a:lstStyle/>
+          <a:p>
+            <a:pPr eaLnBrk="0" hangingPunct="0">
+              <a:defRPr/>
+            </a:pPr>
+            <a:endParaRPr lang="nl-NL" sz="2600">
+              <a:solidFill>
+                <a:schemeClr val="bg1"/>
+              </a:solidFill>
+            </a:endParaRPr>
+          </a:p>
+        </p:txBody>
+      </p:sp>
+      <p:pic>
+        <p:nvPicPr>
+          <p:cNvPr id="9" name="LogoLandmacht" descr="Placeholder_Department"/>
+          <p:cNvPicPr>
+            <a:picLocks noChangeAspect="1" noChangeArrowheads="1"/>
+          </p:cNvPicPr>
+          <p:nvPr/>
+        </p:nvPicPr>
+        <p:blipFill>
+          <a:blip r:embed="rId2" cstate="print"/>
+          <a:srcRect/>
+          <a:stretch>
+            <a:fillRect/>
+          </a:stretch>
+        </p:blipFill>
+        <p:spPr bwMode="auto">
+          <a:xfrm>
+            <a:off x="1523991" y="0"/>
+            <a:ext cx="9144019" cy="2002540"/>
+          </a:xfrm>
+          <a:prstGeom prst="rect">
+            <a:avLst/>
+          </a:prstGeom>
+          <a:noFill/>
+          <a:ln w="9525">
+            <a:noFill/>
+            <a:miter lim="800000"/>
+            <a:headEnd/>
+            <a:tailEnd/>
+          </a:ln>
+        </p:spPr>
+      </p:pic>
+      <p:sp>
+        <p:nvSpPr>
+          <p:cNvPr id="10" name="RveBenaming"/>
+          <p:cNvSpPr txBox="1">
+            <a:spLocks noChangeArrowheads="1"/>
+          </p:cNvSpPr>
+          <p:nvPr userDrawn="1"/>
+        </p:nvSpPr>
+        <p:spPr bwMode="auto">
+          <a:xfrm>
+            <a:off x="6576485" y="5386389"/>
+            <a:ext cx="5183716" cy="287337"/>
+          </a:xfrm>
+          <a:prstGeom prst="rect">
+            <a:avLst/>
+          </a:prstGeom>
+          <a:noFill/>
+          <a:ln>
+            <a:noFill/>
+          </a:ln>
+          <a:effectLst/>
+          <a:extLst/>
+        </p:spPr>
+        <p:txBody>
+          <a:bodyPr lIns="90000" tIns="0" rIns="0" bIns="0" anchor="b"/>
+          <a:lstStyle/>
+          <a:p>
+            <a:pPr eaLnBrk="0" hangingPunct="0">
+              <a:spcBef>
+                <a:spcPct val="50000"/>
+              </a:spcBef>
+              <a:defRPr/>
+            </a:pPr>
+            <a:r>
+              <a:rPr lang="nl-NL" sz="1100" dirty="0">
+                <a:solidFill>
+                  <a:schemeClr val="bg1"/>
+                </a:solidFill>
+              </a:rPr>
+              <a:t>DOSCO</a:t>
+            </a:r>
+          </a:p>
+        </p:txBody>
+      </p:sp>
+      <p:sp>
+        <p:nvSpPr>
+          <p:cNvPr id="11" name="Afdeling"/>
+          <p:cNvSpPr txBox="1">
+            <a:spLocks noChangeArrowheads="1"/>
+          </p:cNvSpPr>
+          <p:nvPr userDrawn="1"/>
+        </p:nvSpPr>
+        <p:spPr bwMode="auto">
+          <a:xfrm>
+            <a:off x="6576484" y="5746751"/>
+            <a:ext cx="5181600" cy="201613"/>
+          </a:xfrm>
+          <a:prstGeom prst="rect">
+            <a:avLst/>
+          </a:prstGeom>
+          <a:noFill/>
+          <a:ln>
+            <a:noFill/>
+          </a:ln>
+          <a:effectLst/>
+          <a:extLst/>
+        </p:spPr>
+        <p:txBody>
+          <a:bodyPr lIns="90000" tIns="0" rIns="0" bIns="0"/>
+          <a:lstStyle/>
+          <a:p>
+            <a:pPr eaLnBrk="0" hangingPunct="0">
+              <a:spcBef>
+                <a:spcPct val="50000"/>
+              </a:spcBef>
+              <a:defRPr/>
+            </a:pPr>
+            <a:r>
+              <a:rPr lang="nl-NL" sz="1100" dirty="0">
+                <a:solidFill>
+                  <a:schemeClr val="bg1"/>
+                </a:solidFill>
+              </a:rPr>
+              <a:t>Nederlandse Defensie Academie</a:t>
+            </a:r>
+          </a:p>
+        </p:txBody>
+      </p:sp>
+      <p:sp>
+        <p:nvSpPr>
+          <p:cNvPr id="12" name="Auteur"/>
+          <p:cNvSpPr txBox="1">
+            <a:spLocks noChangeArrowheads="1"/>
+          </p:cNvSpPr>
+          <p:nvPr userDrawn="1"/>
+        </p:nvSpPr>
+        <p:spPr bwMode="auto">
+          <a:xfrm>
+            <a:off x="6576484" y="5949951"/>
+            <a:ext cx="5181600" cy="201613"/>
+          </a:xfrm>
+          <a:prstGeom prst="rect">
+            <a:avLst/>
+          </a:prstGeom>
+          <a:noFill/>
+          <a:ln>
+            <a:noFill/>
+          </a:ln>
+          <a:effectLst/>
+          <a:extLst/>
+        </p:spPr>
+        <p:txBody>
+          <a:bodyPr lIns="90000" tIns="0" rIns="0" bIns="0"/>
+          <a:lstStyle/>
+          <a:p>
+            <a:pPr eaLnBrk="0" hangingPunct="0">
+              <a:spcBef>
+                <a:spcPct val="50000"/>
+              </a:spcBef>
+              <a:defRPr/>
+            </a:pPr>
+            <a:r>
+              <a:rPr lang="nl-NL" sz="1100" dirty="0">
+                <a:solidFill>
+                  <a:schemeClr val="bg1"/>
+                </a:solidFill>
+              </a:rPr>
+              <a:t>Dr. ir. D. Blom / Dr. M. van Ee</a:t>
+            </a:r>
+          </a:p>
+        </p:txBody>
+      </p:sp>
+      <p:sp>
+        <p:nvSpPr>
+          <p:cNvPr id="13" name="Functie"/>
+          <p:cNvSpPr txBox="1">
+            <a:spLocks noChangeArrowheads="1"/>
+          </p:cNvSpPr>
+          <p:nvPr userDrawn="1"/>
+        </p:nvSpPr>
+        <p:spPr bwMode="auto">
+          <a:xfrm>
+            <a:off x="6576484" y="6164264"/>
+            <a:ext cx="5181600" cy="142875"/>
+          </a:xfrm>
+          <a:prstGeom prst="rect">
+            <a:avLst/>
+          </a:prstGeom>
+          <a:noFill/>
+          <a:ln>
+            <a:noFill/>
+          </a:ln>
+          <a:effectLst/>
+          <a:extLst/>
+        </p:spPr>
+        <p:txBody>
+          <a:bodyPr lIns="90000" tIns="0" rIns="0" bIns="0"/>
+          <a:lstStyle/>
+          <a:p>
+            <a:pPr eaLnBrk="0" hangingPunct="0">
+              <a:spcBef>
+                <a:spcPct val="50000"/>
+              </a:spcBef>
+              <a:defRPr/>
+            </a:pPr>
+            <a:r>
+              <a:rPr lang="nl-NL" sz="1100" dirty="0">
+                <a:solidFill>
+                  <a:schemeClr val="bg1"/>
+                </a:solidFill>
+              </a:rPr>
+              <a:t>Faculteit Militaire Wetenschappen</a:t>
+            </a:r>
+          </a:p>
+        </p:txBody>
+      </p:sp>
+      <p:sp>
+        <p:nvSpPr>
+          <p:cNvPr id="7364" name="Rectangle 196"/>
+          <p:cNvSpPr>
+            <a:spLocks noGrp="1" noChangeArrowheads="1"/>
+          </p:cNvSpPr>
+          <p:nvPr>
+            <p:ph type="ctrTitle"/>
+          </p:nvPr>
+        </p:nvSpPr>
+        <p:spPr>
+          <a:xfrm>
+            <a:off x="6578601" y="1700213"/>
+            <a:ext cx="4798484" cy="889000"/>
+          </a:xfrm>
+        </p:spPr>
+        <p:txBody>
+          <a:bodyPr lIns="90000" tIns="45720" rIns="90000" bIns="45720" anchor="b"/>
+          <a:lstStyle>
+            <a:lvl1pPr>
+              <a:defRPr>
+                <a:solidFill>
+                  <a:schemeClr val="bg1"/>
+                </a:solidFill>
+              </a:defRPr>
+            </a:lvl1pPr>
+          </a:lstStyle>
+          <a:p>
+            <a:pPr lvl="0"/>
+            <a:r>
+              <a:rPr lang="nl-NL" noProof="0" dirty="0" smtClean="0"/>
+              <a:t>Klik om de stijl te bewerken</a:t>
+            </a:r>
+          </a:p>
+        </p:txBody>
+      </p:sp>
+      <p:sp>
+        <p:nvSpPr>
+          <p:cNvPr id="7374" name="Rectangle 206"/>
+          <p:cNvSpPr>
+            <a:spLocks noGrp="1" noChangeArrowheads="1"/>
+          </p:cNvSpPr>
+          <p:nvPr>
+            <p:ph type="subTitle" idx="1"/>
+          </p:nvPr>
+        </p:nvSpPr>
+        <p:spPr>
+          <a:xfrm>
+            <a:off x="6578601" y="2781301"/>
+            <a:ext cx="4798484" cy="2447925"/>
+          </a:xfrm>
+        </p:spPr>
+        <p:txBody>
+          <a:bodyPr lIns="91440" tIns="45720" rIns="91440" bIns="45720"/>
+          <a:lstStyle>
+            <a:lvl1pPr>
+              <a:defRPr sz="2400">
+                <a:solidFill>
+                  <a:schemeClr val="bg1"/>
+                </a:solidFill>
+              </a:defRPr>
+            </a:lvl1pPr>
+          </a:lstStyle>
+          <a:p>
+            <a:pPr lvl="0"/>
+            <a:r>
+              <a:rPr lang="nl-NL" noProof="0" smtClean="0"/>
+              <a:t>Klik om de ondertitelstijl van het model te bewerken</a:t>
+            </a:r>
+          </a:p>
+        </p:txBody>
+      </p:sp>
+      <p:sp>
+        <p:nvSpPr>
+          <p:cNvPr id="14" name="Date Placeholder 1" descr="Date"/>
+          <p:cNvSpPr>
+            <a:spLocks noGrp="1"/>
+          </p:cNvSpPr>
+          <p:nvPr>
+            <p:ph type="dt" sz="half" idx="10"/>
+          </p:nvPr>
+        </p:nvSpPr>
+        <p:spPr>
+          <a:xfrm>
+            <a:off x="6580717" y="6469064"/>
+            <a:ext cx="2218267" cy="365125"/>
+          </a:xfrm>
+        </p:spPr>
+        <p:txBody>
+          <a:bodyPr/>
+          <a:lstStyle>
+            <a:lvl1pPr algn="l">
+              <a:defRPr sz="1100">
+                <a:solidFill>
+                  <a:schemeClr val="bg1"/>
+                </a:solidFill>
+              </a:defRPr>
+            </a:lvl1pPr>
+          </a:lstStyle>
+          <a:p>
+            <a:pPr>
+              <a:defRPr/>
+            </a:pPr>
+            <a:r>
+              <a:rPr lang="nl-NL" smtClean="0"/>
+              <a:t>College 5b: de centrale limietstelling</a:t>
+            </a:r>
+            <a:endParaRPr lang="nl-NL" dirty="0"/>
+          </a:p>
+        </p:txBody>
+      </p:sp>
+    </p:spTree>
+    <p:extLst>
+      <p:ext uri="{BB962C8B-B14F-4D97-AF65-F5344CB8AC3E}">
+        <p14:creationId xmlns:p14="http://schemas.microsoft.com/office/powerpoint/2010/main" val="1865115997"/>
+      </p:ext>
+    </p:extLst>
+  </p:cSld>
+  <p:clrMapOvr>
+    <a:masterClrMapping/>
+  </p:clrMapOvr>
+  <p:timing>
+    <p:tnLst>
+      <p:par>
+        <p:cTn id="1" dur="indefinite" restart="never" nodeType="tmRoot"/>
+      </p:par>
+    </p:tnLst>
+  </p:timing>
+</p:sldLayout>
+</file>
+
+<file path=ppt/slideLayouts/slideLayout24.xml><?xml version="1.0" encoding="utf-8"?>
+<p:sldLayout xmlns:a="http://schemas.openxmlformats.org/drawingml/2006/main" xmlns:r="http://schemas.openxmlformats.org/officeDocument/2006/relationships" xmlns:p="http://schemas.openxmlformats.org/presentationml/2006/main" type="obj" preserve="1">
+  <p:cSld name="Titel en object">
+    <p:spTree>
+      <p:nvGrpSpPr>
+        <p:cNvPr id="1" name=""/>
+        <p:cNvGrpSpPr/>
+        <p:nvPr/>
+      </p:nvGrpSpPr>
+      <p:grpSpPr>
+        <a:xfrm>
+          <a:off x="0" y="0"/>
+          <a:ext cx="0" cy="0"/>
+          <a:chOff x="0" y="0"/>
+          <a:chExt cx="0" cy="0"/>
+        </a:xfrm>
+      </p:grpSpPr>
+      <p:sp>
+        <p:nvSpPr>
+          <p:cNvPr id="2" name="Title 1"/>
+          <p:cNvSpPr>
+            <a:spLocks noGrp="1"/>
+          </p:cNvSpPr>
+          <p:nvPr>
+            <p:ph type="title"/>
+          </p:nvPr>
+        </p:nvSpPr>
+        <p:spPr/>
+        <p:txBody>
+          <a:bodyPr/>
+          <a:lstStyle>
+            <a:lvl1pPr>
+              <a:defRPr>
+                <a:latin typeface="RijksoverheidSansWebText Bold" panose="020B0803040202060203" pitchFamily="34" charset="0"/>
+                <a:ea typeface="RijksoverheidSansWebText Bold" panose="020B0803040202060203" pitchFamily="34" charset="0"/>
+              </a:defRPr>
+            </a:lvl1pPr>
+          </a:lstStyle>
+          <a:p>
+            <a:r>
+              <a:rPr lang="nl-NL" dirty="0" smtClean="0"/>
+              <a:t>Klik om de stijl te bewerken</a:t>
+            </a:r>
+            <a:endParaRPr lang="nl-NL" dirty="0"/>
+          </a:p>
+        </p:txBody>
+      </p:sp>
+      <p:sp>
+        <p:nvSpPr>
+          <p:cNvPr id="3" name="Content Placeholder 2"/>
+          <p:cNvSpPr>
+            <a:spLocks noGrp="1"/>
+          </p:cNvSpPr>
+          <p:nvPr>
+            <p:ph idx="1"/>
+          </p:nvPr>
+        </p:nvSpPr>
+        <p:spPr/>
+        <p:txBody>
+          <a:bodyPr/>
+          <a:lstStyle>
+            <a:lvl1pPr>
+              <a:defRPr sz="2400">
+                <a:latin typeface="RijksoverheidSansText" panose="020B0503040202060203" pitchFamily="34" charset="0"/>
+              </a:defRPr>
+            </a:lvl1pPr>
+            <a:lvl2pPr>
+              <a:defRPr>
+                <a:latin typeface="RijksoverheidSansText" panose="020B0503040202060203" pitchFamily="34" charset="0"/>
+              </a:defRPr>
+            </a:lvl2pPr>
+            <a:lvl3pPr>
+              <a:defRPr>
+                <a:latin typeface="RijksoverheidSansText" panose="020B0503040202060203" pitchFamily="34" charset="0"/>
+              </a:defRPr>
+            </a:lvl3pPr>
+            <a:lvl4pPr>
+              <a:defRPr>
+                <a:latin typeface="RijksoverheidSansText" panose="020B0503040202060203" pitchFamily="34" charset="0"/>
+              </a:defRPr>
+            </a:lvl4pPr>
+            <a:lvl5pPr>
+              <a:defRPr>
+                <a:latin typeface="RijksoverheidSansText" panose="020B0503040202060203" pitchFamily="34" charset="0"/>
+              </a:defRPr>
+            </a:lvl5pPr>
+          </a:lstStyle>
+          <a:p>
+            <a:pPr lvl="0"/>
+            <a:r>
+              <a:rPr lang="nl-NL" dirty="0" smtClean="0"/>
+              <a:t>Tekststijl van het model bewerken</a:t>
+            </a:r>
+          </a:p>
+          <a:p>
+            <a:pPr lvl="1"/>
+            <a:r>
+              <a:rPr lang="nl-NL" dirty="0" smtClean="0"/>
+              <a:t>Tweede niveau</a:t>
+            </a:r>
+          </a:p>
+          <a:p>
+            <a:pPr lvl="2"/>
+            <a:r>
+              <a:rPr lang="nl-NL" dirty="0" smtClean="0"/>
+              <a:t>Derde niveau</a:t>
+            </a:r>
+          </a:p>
+          <a:p>
+            <a:pPr lvl="3"/>
+            <a:r>
+              <a:rPr lang="nl-NL" dirty="0" smtClean="0"/>
+              <a:t>Vierde niveau</a:t>
+            </a:r>
+          </a:p>
+          <a:p>
+            <a:pPr lvl="4"/>
+            <a:r>
+              <a:rPr lang="nl-NL" dirty="0" smtClean="0"/>
+              <a:t>Vijfde niveau</a:t>
+            </a:r>
+            <a:endParaRPr lang="nl-NL" dirty="0"/>
+          </a:p>
+        </p:txBody>
+      </p:sp>
+      <p:sp>
+        <p:nvSpPr>
+          <p:cNvPr id="4" name="Date Placeholder 1" descr="Date"/>
+          <p:cNvSpPr>
+            <a:spLocks noGrp="1"/>
+          </p:cNvSpPr>
+          <p:nvPr>
+            <p:ph type="dt" sz="half" idx="10"/>
+          </p:nvPr>
+        </p:nvSpPr>
+        <p:spPr/>
+        <p:txBody>
+          <a:bodyPr/>
+          <a:lstStyle>
+            <a:lvl1pPr>
+              <a:defRPr/>
+            </a:lvl1pPr>
+          </a:lstStyle>
+          <a:p>
+            <a:pPr>
+              <a:defRPr/>
+            </a:pPr>
+            <a:r>
+              <a:rPr lang="nl-NL" smtClean="0"/>
+              <a:t>College 5b: de centrale limietstelling</a:t>
+            </a:r>
+            <a:endParaRPr lang="nl-NL" dirty="0"/>
+          </a:p>
+        </p:txBody>
+      </p:sp>
+    </p:spTree>
+    <p:extLst>
+      <p:ext uri="{BB962C8B-B14F-4D97-AF65-F5344CB8AC3E}">
+        <p14:creationId xmlns:p14="http://schemas.microsoft.com/office/powerpoint/2010/main" val="2440054080"/>
+      </p:ext>
+    </p:extLst>
+  </p:cSld>
+  <p:clrMapOvr>
+    <a:masterClrMapping/>
+  </p:clrMapOvr>
+  <p:timing>
+    <p:tnLst>
+      <p:par>
+        <p:cTn id="1" dur="indefinite" restart="never" nodeType="tmRoot"/>
+      </p:par>
+    </p:tnLst>
+  </p:timing>
+</p:sldLayout>
+</file>
+
+<file path=ppt/slideLayouts/slideLayout25.xml><?xml version="1.0" encoding="utf-8"?>
+<p:sldLayout xmlns:a="http://schemas.openxmlformats.org/drawingml/2006/main" xmlns:r="http://schemas.openxmlformats.org/officeDocument/2006/relationships" xmlns:p="http://schemas.openxmlformats.org/presentationml/2006/main" type="secHead" preserve="1">
+  <p:cSld name="Sectiekop">
+    <p:spTree>
+      <p:nvGrpSpPr>
+        <p:cNvPr id="1" name=""/>
+        <p:cNvGrpSpPr/>
+        <p:nvPr/>
+      </p:nvGrpSpPr>
+      <p:grpSpPr>
+        <a:xfrm>
+          <a:off x="0" y="0"/>
+          <a:ext cx="0" cy="0"/>
+          <a:chOff x="0" y="0"/>
+          <a:chExt cx="0" cy="0"/>
+        </a:xfrm>
+      </p:grpSpPr>
+      <p:sp>
+        <p:nvSpPr>
+          <p:cNvPr id="2" name="Title 1"/>
+          <p:cNvSpPr>
+            <a:spLocks noGrp="1"/>
+          </p:cNvSpPr>
+          <p:nvPr>
+            <p:ph type="title"/>
+          </p:nvPr>
+        </p:nvSpPr>
+        <p:spPr>
+          <a:xfrm>
+            <a:off x="963084" y="4406901"/>
+            <a:ext cx="10363200" cy="615553"/>
+          </a:xfrm>
+        </p:spPr>
+        <p:txBody>
+          <a:bodyPr/>
+          <a:lstStyle>
+            <a:lvl1pPr algn="l">
+              <a:defRPr sz="4000" b="1" cap="all">
+                <a:latin typeface="RijksoverheidSansWebText Bold" panose="020B0803040202060203" pitchFamily="34" charset="0"/>
+                <a:ea typeface="RijksoverheidSansWebText Bold" panose="020B0803040202060203" pitchFamily="34" charset="0"/>
+              </a:defRPr>
+            </a:lvl1pPr>
+          </a:lstStyle>
+          <a:p>
+            <a:r>
+              <a:rPr lang="nl-NL" dirty="0" smtClean="0"/>
+              <a:t>Klik om de stijl te bewerken</a:t>
+            </a:r>
+            <a:endParaRPr lang="nl-NL" dirty="0"/>
+          </a:p>
+        </p:txBody>
+      </p:sp>
+      <p:sp>
+        <p:nvSpPr>
+          <p:cNvPr id="3" name="Text Placeholder 2"/>
+          <p:cNvSpPr>
+            <a:spLocks noGrp="1"/>
+          </p:cNvSpPr>
+          <p:nvPr>
+            <p:ph type="body" idx="1"/>
+          </p:nvPr>
+        </p:nvSpPr>
+        <p:spPr>
+          <a:xfrm>
+            <a:off x="963084" y="2906713"/>
+            <a:ext cx="10363200" cy="1500187"/>
+          </a:xfrm>
+        </p:spPr>
+        <p:txBody>
+          <a:bodyPr anchor="b"/>
+          <a:lstStyle>
+            <a:lvl1pPr marL="0" indent="0">
+              <a:buNone/>
+              <a:defRPr sz="2000">
+                <a:latin typeface="RijksoverheidSansText" panose="020B0503040202060203" pitchFamily="34" charset="0"/>
+              </a:defRPr>
+            </a:lvl1pPr>
+            <a:lvl2pPr marL="457200" indent="0">
+              <a:buNone/>
+              <a:defRPr sz="1800"/>
+            </a:lvl2pPr>
+            <a:lvl3pPr marL="914400" indent="0">
+              <a:buNone/>
+              <a:defRPr sz="1600"/>
+            </a:lvl3pPr>
+            <a:lvl4pPr marL="1371600" indent="0">
+              <a:buNone/>
+              <a:defRPr sz="1400"/>
+            </a:lvl4pPr>
+            <a:lvl5pPr marL="1828800" indent="0">
+              <a:buNone/>
+              <a:defRPr sz="1400"/>
+            </a:lvl5pPr>
+            <a:lvl6pPr marL="2286000" indent="0">
+              <a:buNone/>
+              <a:defRPr sz="1400"/>
+            </a:lvl6pPr>
+            <a:lvl7pPr marL="2743200" indent="0">
+              <a:buNone/>
+              <a:defRPr sz="1400"/>
+            </a:lvl7pPr>
+            <a:lvl8pPr marL="3200400" indent="0">
+              <a:buNone/>
+              <a:defRPr sz="1400"/>
+            </a:lvl8pPr>
+            <a:lvl9pPr marL="3657600" indent="0">
+              <a:buNone/>
+              <a:defRPr sz="1400"/>
+            </a:lvl9pPr>
+          </a:lstStyle>
+          <a:p>
+            <a:pPr lvl="0"/>
+            <a:r>
+              <a:rPr lang="nl-NL" dirty="0" smtClean="0"/>
+              <a:t>Tekststijl van het model bewerken</a:t>
+            </a:r>
+          </a:p>
+        </p:txBody>
+      </p:sp>
+      <p:sp>
+        <p:nvSpPr>
+          <p:cNvPr id="4" name="Date Placeholder 1" descr="Date"/>
+          <p:cNvSpPr>
+            <a:spLocks noGrp="1"/>
+          </p:cNvSpPr>
+          <p:nvPr>
+            <p:ph type="dt" sz="half" idx="10"/>
+          </p:nvPr>
+        </p:nvSpPr>
+        <p:spPr/>
+        <p:txBody>
+          <a:bodyPr/>
+          <a:lstStyle>
+            <a:lvl1pPr>
+              <a:defRPr/>
+            </a:lvl1pPr>
+          </a:lstStyle>
+          <a:p>
+            <a:pPr>
+              <a:defRPr/>
+            </a:pPr>
+            <a:r>
+              <a:rPr lang="nl-NL" smtClean="0"/>
+              <a:t>College 5b: de centrale limietstelling</a:t>
+            </a:r>
+            <a:endParaRPr lang="nl-NL" dirty="0"/>
+          </a:p>
+        </p:txBody>
+      </p:sp>
+    </p:spTree>
+    <p:extLst>
+      <p:ext uri="{BB962C8B-B14F-4D97-AF65-F5344CB8AC3E}">
+        <p14:creationId xmlns:p14="http://schemas.microsoft.com/office/powerpoint/2010/main" val="1344427186"/>
+      </p:ext>
+    </p:extLst>
+  </p:cSld>
+  <p:clrMapOvr>
+    <a:masterClrMapping/>
+  </p:clrMapOvr>
+  <p:timing>
+    <p:tnLst>
+      <p:par>
+        <p:cTn id="1" dur="indefinite" restart="never" nodeType="tmRoot"/>
+      </p:par>
+    </p:tnLst>
+  </p:timing>
+</p:sldLayout>
+</file>
+
+<file path=ppt/slideLayouts/slideLayout26.xml><?xml version="1.0" encoding="utf-8"?>
+<p:sldLayout xmlns:a="http://schemas.openxmlformats.org/drawingml/2006/main" xmlns:r="http://schemas.openxmlformats.org/officeDocument/2006/relationships" xmlns:p="http://schemas.openxmlformats.org/presentationml/2006/main" type="twoObj" preserve="1">
+  <p:cSld name="Inhoud van twee">
+    <p:spTree>
+      <p:nvGrpSpPr>
+        <p:cNvPr id="1" name=""/>
+        <p:cNvGrpSpPr/>
+        <p:nvPr/>
+      </p:nvGrpSpPr>
+      <p:grpSpPr>
+        <a:xfrm>
+          <a:off x="0" y="0"/>
+          <a:ext cx="0" cy="0"/>
+          <a:chOff x="0" y="0"/>
+          <a:chExt cx="0" cy="0"/>
+        </a:xfrm>
+      </p:grpSpPr>
+      <p:sp>
+        <p:nvSpPr>
+          <p:cNvPr id="2" name="Title 1"/>
+          <p:cNvSpPr>
+            <a:spLocks noGrp="1"/>
+          </p:cNvSpPr>
+          <p:nvPr>
+            <p:ph type="title"/>
+          </p:nvPr>
+        </p:nvSpPr>
+        <p:spPr/>
+        <p:txBody>
+          <a:bodyPr/>
+          <a:lstStyle>
+            <a:lvl1pPr>
+              <a:defRPr>
+                <a:latin typeface="RijksoverheidSansWebText Bold" panose="020B0803040202060203" pitchFamily="34" charset="0"/>
+                <a:ea typeface="RijksoverheidSansWebText Bold" panose="020B0803040202060203" pitchFamily="34" charset="0"/>
+              </a:defRPr>
+            </a:lvl1pPr>
+          </a:lstStyle>
+          <a:p>
+            <a:r>
+              <a:rPr lang="nl-NL" dirty="0" smtClean="0"/>
+              <a:t>Klik om de stijl te bewerken</a:t>
+            </a:r>
+            <a:endParaRPr lang="nl-NL" dirty="0"/>
+          </a:p>
+        </p:txBody>
+      </p:sp>
+      <p:sp>
+        <p:nvSpPr>
+          <p:cNvPr id="3" name="Content Placeholder 2"/>
+          <p:cNvSpPr>
+            <a:spLocks noGrp="1"/>
+          </p:cNvSpPr>
+          <p:nvPr>
+            <p:ph sz="half" idx="1"/>
+          </p:nvPr>
+        </p:nvSpPr>
+        <p:spPr>
+          <a:xfrm>
+            <a:off x="812800" y="1773238"/>
+            <a:ext cx="5080000" cy="4246562"/>
+          </a:xfrm>
+        </p:spPr>
+        <p:txBody>
+          <a:bodyPr/>
+          <a:lstStyle>
+            <a:lvl1pPr>
+              <a:defRPr sz="2800">
+                <a:latin typeface="RijksoverheidSansText" panose="020B0503040202060203" pitchFamily="34" charset="0"/>
+              </a:defRPr>
+            </a:lvl1pPr>
+            <a:lvl2pPr>
+              <a:defRPr sz="2400">
+                <a:latin typeface="RijksoverheidSansText" panose="020B0503040202060203" pitchFamily="34" charset="0"/>
+              </a:defRPr>
+            </a:lvl2pPr>
+            <a:lvl3pPr>
+              <a:defRPr sz="2000">
+                <a:latin typeface="RijksoverheidSansText" panose="020B0503040202060203" pitchFamily="34" charset="0"/>
+              </a:defRPr>
+            </a:lvl3pPr>
+            <a:lvl4pPr>
+              <a:defRPr sz="1800">
+                <a:latin typeface="RijksoverheidSansText" panose="020B0503040202060203" pitchFamily="34" charset="0"/>
+              </a:defRPr>
+            </a:lvl4pPr>
+            <a:lvl5pPr>
+              <a:defRPr sz="1800">
+                <a:latin typeface="RijksoverheidSansText" panose="020B0503040202060203" pitchFamily="34" charset="0"/>
+              </a:defRPr>
+            </a:lvl5pPr>
+            <a:lvl6pPr>
+              <a:defRPr sz="1800"/>
+            </a:lvl6pPr>
+            <a:lvl7pPr>
+              <a:defRPr sz="1800"/>
+            </a:lvl7pPr>
+            <a:lvl8pPr>
+              <a:defRPr sz="1800"/>
+            </a:lvl8pPr>
+            <a:lvl9pPr>
+              <a:defRPr sz="1800"/>
+            </a:lvl9pPr>
+          </a:lstStyle>
+          <a:p>
+            <a:pPr lvl="0"/>
+            <a:r>
+              <a:rPr lang="nl-NL" dirty="0" smtClean="0"/>
+              <a:t>Tekststijl van het model bewerken</a:t>
+            </a:r>
+          </a:p>
+          <a:p>
+            <a:pPr lvl="1"/>
+            <a:r>
+              <a:rPr lang="nl-NL" dirty="0" smtClean="0"/>
+              <a:t>Tweede niveau</a:t>
+            </a:r>
+          </a:p>
+          <a:p>
+            <a:pPr lvl="2"/>
+            <a:r>
+              <a:rPr lang="nl-NL" dirty="0" smtClean="0"/>
+              <a:t>Derde niveau</a:t>
+            </a:r>
+          </a:p>
+          <a:p>
+            <a:pPr lvl="3"/>
+            <a:r>
+              <a:rPr lang="nl-NL" dirty="0" smtClean="0"/>
+              <a:t>Vierde niveau</a:t>
+            </a:r>
+          </a:p>
+          <a:p>
+            <a:pPr lvl="4"/>
+            <a:r>
+              <a:rPr lang="nl-NL" dirty="0" smtClean="0"/>
+              <a:t>Vijfde niveau</a:t>
+            </a:r>
+            <a:endParaRPr lang="nl-NL" dirty="0"/>
+          </a:p>
+        </p:txBody>
+      </p:sp>
+      <p:sp>
+        <p:nvSpPr>
+          <p:cNvPr id="4" name="Content Placeholder 3"/>
+          <p:cNvSpPr>
+            <a:spLocks noGrp="1"/>
+          </p:cNvSpPr>
+          <p:nvPr>
+            <p:ph sz="half" idx="2"/>
+          </p:nvPr>
+        </p:nvSpPr>
+        <p:spPr>
+          <a:xfrm>
+            <a:off x="6096000" y="1773238"/>
+            <a:ext cx="5080000" cy="4246562"/>
+          </a:xfrm>
+        </p:spPr>
+        <p:txBody>
+          <a:bodyPr/>
+          <a:lstStyle>
+            <a:lvl1pPr>
+              <a:defRPr sz="2800">
+                <a:latin typeface="RijksoverheidSansText" panose="020B0503040202060203" pitchFamily="34" charset="0"/>
+              </a:defRPr>
+            </a:lvl1pPr>
+            <a:lvl2pPr>
+              <a:defRPr sz="2400">
+                <a:latin typeface="RijksoverheidSansText" panose="020B0503040202060203" pitchFamily="34" charset="0"/>
+              </a:defRPr>
+            </a:lvl2pPr>
+            <a:lvl3pPr>
+              <a:defRPr sz="2000">
+                <a:latin typeface="RijksoverheidSansText" panose="020B0503040202060203" pitchFamily="34" charset="0"/>
+              </a:defRPr>
+            </a:lvl3pPr>
+            <a:lvl4pPr>
+              <a:defRPr sz="1800">
+                <a:latin typeface="RijksoverheidSansText" panose="020B0503040202060203" pitchFamily="34" charset="0"/>
+              </a:defRPr>
+            </a:lvl4pPr>
+            <a:lvl5pPr>
+              <a:defRPr sz="1800">
+                <a:latin typeface="RijksoverheidSansText" panose="020B0503040202060203" pitchFamily="34" charset="0"/>
+              </a:defRPr>
+            </a:lvl5pPr>
+            <a:lvl6pPr>
+              <a:defRPr sz="1800"/>
+            </a:lvl6pPr>
+            <a:lvl7pPr>
+              <a:defRPr sz="1800"/>
+            </a:lvl7pPr>
+            <a:lvl8pPr>
+              <a:defRPr sz="1800"/>
+            </a:lvl8pPr>
+            <a:lvl9pPr>
+              <a:defRPr sz="1800"/>
+            </a:lvl9pPr>
+          </a:lstStyle>
+          <a:p>
+            <a:pPr lvl="0"/>
+            <a:r>
+              <a:rPr lang="nl-NL" dirty="0" smtClean="0"/>
+              <a:t>Tekststijl van het model bewerken</a:t>
+            </a:r>
+          </a:p>
+          <a:p>
+            <a:pPr lvl="1"/>
+            <a:r>
+              <a:rPr lang="nl-NL" dirty="0" smtClean="0"/>
+              <a:t>Tweede niveau</a:t>
+            </a:r>
+          </a:p>
+          <a:p>
+            <a:pPr lvl="2"/>
+            <a:r>
+              <a:rPr lang="nl-NL" dirty="0" smtClean="0"/>
+              <a:t>Derde niveau</a:t>
+            </a:r>
+          </a:p>
+          <a:p>
+            <a:pPr lvl="3"/>
+            <a:r>
+              <a:rPr lang="nl-NL" dirty="0" smtClean="0"/>
+              <a:t>Vierde niveau</a:t>
+            </a:r>
+          </a:p>
+          <a:p>
+            <a:pPr lvl="4"/>
+            <a:r>
+              <a:rPr lang="nl-NL" dirty="0" smtClean="0"/>
+              <a:t>Vijfde niveau</a:t>
+            </a:r>
+            <a:endParaRPr lang="nl-NL" dirty="0"/>
+          </a:p>
+        </p:txBody>
+      </p:sp>
+      <p:sp>
+        <p:nvSpPr>
+          <p:cNvPr id="5" name="Date Placeholder 1" descr="Date"/>
+          <p:cNvSpPr>
+            <a:spLocks noGrp="1"/>
+          </p:cNvSpPr>
+          <p:nvPr>
+            <p:ph type="dt" sz="half" idx="10"/>
+          </p:nvPr>
+        </p:nvSpPr>
+        <p:spPr/>
+        <p:txBody>
+          <a:bodyPr/>
+          <a:lstStyle>
+            <a:lvl1pPr>
+              <a:defRPr/>
+            </a:lvl1pPr>
+          </a:lstStyle>
+          <a:p>
+            <a:pPr>
+              <a:defRPr/>
+            </a:pPr>
+            <a:r>
+              <a:rPr lang="nl-NL" smtClean="0"/>
+              <a:t>College 5b: de centrale limietstelling</a:t>
+            </a:r>
+            <a:endParaRPr lang="nl-NL" dirty="0"/>
+          </a:p>
+        </p:txBody>
+      </p:sp>
+    </p:spTree>
+    <p:extLst>
+      <p:ext uri="{BB962C8B-B14F-4D97-AF65-F5344CB8AC3E}">
+        <p14:creationId xmlns:p14="http://schemas.microsoft.com/office/powerpoint/2010/main" val="3744502845"/>
+      </p:ext>
+    </p:extLst>
+  </p:cSld>
+  <p:clrMapOvr>
+    <a:masterClrMapping/>
+  </p:clrMapOvr>
+  <p:timing>
+    <p:tnLst>
+      <p:par>
+        <p:cTn id="1" dur="indefinite" restart="never" nodeType="tmRoot"/>
+      </p:par>
+    </p:tnLst>
+  </p:timing>
+</p:sldLayout>
+</file>
+
+<file path=ppt/slideLayouts/slideLayout27.xml><?xml version="1.0" encoding="utf-8"?>
+<p:sldLayout xmlns:a="http://schemas.openxmlformats.org/drawingml/2006/main" xmlns:r="http://schemas.openxmlformats.org/officeDocument/2006/relationships" xmlns:p="http://schemas.openxmlformats.org/presentationml/2006/main" type="twoTxTwoObj" preserve="1">
+  <p:cSld name="Vergelijking">
+    <p:spTree>
+      <p:nvGrpSpPr>
+        <p:cNvPr id="1" name=""/>
+        <p:cNvGrpSpPr/>
+        <p:nvPr/>
+      </p:nvGrpSpPr>
+      <p:grpSpPr>
+        <a:xfrm>
+          <a:off x="0" y="0"/>
+          <a:ext cx="0" cy="0"/>
+          <a:chOff x="0" y="0"/>
+          <a:chExt cx="0" cy="0"/>
+        </a:xfrm>
+      </p:grpSpPr>
+      <p:sp>
+        <p:nvSpPr>
+          <p:cNvPr id="2" name="Title 1"/>
+          <p:cNvSpPr>
+            <a:spLocks noGrp="1"/>
+          </p:cNvSpPr>
+          <p:nvPr>
+            <p:ph type="title"/>
+          </p:nvPr>
+        </p:nvSpPr>
+        <p:spPr>
+          <a:xfrm>
+            <a:off x="609600" y="1124744"/>
+            <a:ext cx="10972800" cy="400110"/>
+          </a:xfrm>
+        </p:spPr>
+        <p:txBody>
+          <a:bodyPr/>
+          <a:lstStyle>
+            <a:lvl1pPr>
+              <a:defRPr>
+                <a:latin typeface="RijksoverheidSansWebText Bold" panose="020B0803040202060203" pitchFamily="34" charset="0"/>
+                <a:ea typeface="RijksoverheidSansWebText Bold" panose="020B0803040202060203" pitchFamily="34" charset="0"/>
+              </a:defRPr>
+            </a:lvl1pPr>
+          </a:lstStyle>
+          <a:p>
+            <a:r>
+              <a:rPr lang="nl-NL" dirty="0" smtClean="0"/>
+              <a:t>Klik om de stijl te bewerken</a:t>
+            </a:r>
+            <a:endParaRPr lang="nl-NL" dirty="0"/>
+          </a:p>
+        </p:txBody>
+      </p:sp>
+      <p:sp>
+        <p:nvSpPr>
+          <p:cNvPr id="3" name="Text Placeholder 2"/>
+          <p:cNvSpPr>
+            <a:spLocks noGrp="1"/>
+          </p:cNvSpPr>
+          <p:nvPr>
+            <p:ph type="body" idx="1"/>
+          </p:nvPr>
+        </p:nvSpPr>
+        <p:spPr>
+          <a:xfrm>
+            <a:off x="609600" y="1535113"/>
+            <a:ext cx="5386917" cy="639762"/>
+          </a:xfrm>
+        </p:spPr>
+        <p:txBody>
+          <a:bodyPr anchor="b"/>
+          <a:lstStyle>
+            <a:lvl1pPr marL="0" indent="0">
+              <a:buNone/>
+              <a:defRPr sz="2400" b="1">
+                <a:latin typeface="RijksoverheidSansText" panose="020B0503040202060203" pitchFamily="34" charset="0"/>
+              </a:defRPr>
+            </a:lvl1pPr>
+            <a:lvl2pPr marL="457200" indent="0">
+              <a:buNone/>
+              <a:defRPr sz="2000" b="1"/>
+            </a:lvl2pPr>
+            <a:lvl3pPr marL="914400" indent="0">
+              <a:buNone/>
+              <a:defRPr sz="1800" b="1"/>
+            </a:lvl3pPr>
+            <a:lvl4pPr marL="1371600" indent="0">
+              <a:buNone/>
+              <a:defRPr sz="1600" b="1"/>
+            </a:lvl4pPr>
+            <a:lvl5pPr marL="1828800" indent="0">
+              <a:buNone/>
+              <a:defRPr sz="1600" b="1"/>
+            </a:lvl5pPr>
+            <a:lvl6pPr marL="2286000" indent="0">
+              <a:buNone/>
+              <a:defRPr sz="1600" b="1"/>
+            </a:lvl6pPr>
+            <a:lvl7pPr marL="2743200" indent="0">
+              <a:buNone/>
+              <a:defRPr sz="1600" b="1"/>
+            </a:lvl7pPr>
+            <a:lvl8pPr marL="3200400" indent="0">
+              <a:buNone/>
+              <a:defRPr sz="1600" b="1"/>
+            </a:lvl8pPr>
+            <a:lvl9pPr marL="3657600" indent="0">
+              <a:buNone/>
+              <a:defRPr sz="1600" b="1"/>
+            </a:lvl9pPr>
+          </a:lstStyle>
+          <a:p>
+            <a:pPr lvl="0"/>
+            <a:r>
+              <a:rPr lang="nl-NL" dirty="0" smtClean="0"/>
+              <a:t>Tekststijl van het model bewerken</a:t>
+            </a:r>
+          </a:p>
+        </p:txBody>
+      </p:sp>
+      <p:sp>
+        <p:nvSpPr>
+          <p:cNvPr id="4" name="Content Placeholder 3"/>
+          <p:cNvSpPr>
+            <a:spLocks noGrp="1"/>
+          </p:cNvSpPr>
+          <p:nvPr>
+            <p:ph sz="half" idx="2"/>
+          </p:nvPr>
+        </p:nvSpPr>
+        <p:spPr>
+          <a:xfrm>
+            <a:off x="609600" y="2174875"/>
+            <a:ext cx="5386917" cy="3951288"/>
+          </a:xfrm>
+        </p:spPr>
+        <p:txBody>
+          <a:bodyPr/>
+          <a:lstStyle>
+            <a:lvl1pPr>
+              <a:defRPr sz="2400">
+                <a:latin typeface="RijksoverheidSansText" panose="020B0503040202060203" pitchFamily="34" charset="0"/>
+              </a:defRPr>
+            </a:lvl1pPr>
+            <a:lvl2pPr>
+              <a:defRPr sz="2000">
+                <a:latin typeface="RijksoverheidSansText" panose="020B0503040202060203" pitchFamily="34" charset="0"/>
+              </a:defRPr>
+            </a:lvl2pPr>
+            <a:lvl3pPr>
+              <a:defRPr sz="1800">
+                <a:latin typeface="RijksoverheidSansText" panose="020B0503040202060203" pitchFamily="34" charset="0"/>
+              </a:defRPr>
+            </a:lvl3pPr>
+            <a:lvl4pPr>
+              <a:defRPr sz="1600">
+                <a:latin typeface="RijksoverheidSansText" panose="020B0503040202060203" pitchFamily="34" charset="0"/>
+              </a:defRPr>
+            </a:lvl4pPr>
+            <a:lvl5pPr>
+              <a:defRPr sz="1600">
+                <a:latin typeface="RijksoverheidSansText" panose="020B0503040202060203" pitchFamily="34" charset="0"/>
+              </a:defRPr>
+            </a:lvl5pPr>
+            <a:lvl6pPr>
+              <a:defRPr sz="1600"/>
+            </a:lvl6pPr>
+            <a:lvl7pPr>
+              <a:defRPr sz="1600"/>
+            </a:lvl7pPr>
+            <a:lvl8pPr>
+              <a:defRPr sz="1600"/>
+            </a:lvl8pPr>
+            <a:lvl9pPr>
+              <a:defRPr sz="1600"/>
+            </a:lvl9pPr>
+          </a:lstStyle>
+          <a:p>
+            <a:pPr lvl="0"/>
+            <a:r>
+              <a:rPr lang="nl-NL" dirty="0" smtClean="0"/>
+              <a:t>Tekststijl van het model bewerken</a:t>
+            </a:r>
+          </a:p>
+          <a:p>
+            <a:pPr lvl="1"/>
+            <a:r>
+              <a:rPr lang="nl-NL" dirty="0" smtClean="0"/>
+              <a:t>Tweede niveau</a:t>
+            </a:r>
+          </a:p>
+          <a:p>
+            <a:pPr lvl="2"/>
+            <a:r>
+              <a:rPr lang="nl-NL" dirty="0" smtClean="0"/>
+              <a:t>Derde niveau</a:t>
+            </a:r>
+          </a:p>
+          <a:p>
+            <a:pPr lvl="3"/>
+            <a:r>
+              <a:rPr lang="nl-NL" dirty="0" smtClean="0"/>
+              <a:t>Vierde niveau</a:t>
+            </a:r>
+          </a:p>
+          <a:p>
+            <a:pPr lvl="4"/>
+            <a:r>
+              <a:rPr lang="nl-NL" dirty="0" smtClean="0"/>
+              <a:t>Vijfde niveau</a:t>
+            </a:r>
+            <a:endParaRPr lang="nl-NL" dirty="0"/>
+          </a:p>
+        </p:txBody>
+      </p:sp>
+      <p:sp>
+        <p:nvSpPr>
+          <p:cNvPr id="5" name="Text Placeholder 4"/>
+          <p:cNvSpPr>
+            <a:spLocks noGrp="1"/>
+          </p:cNvSpPr>
+          <p:nvPr>
+            <p:ph type="body" sz="quarter" idx="3"/>
+          </p:nvPr>
+        </p:nvSpPr>
+        <p:spPr>
+          <a:xfrm>
+            <a:off x="6193368" y="1535113"/>
+            <a:ext cx="5389033" cy="639762"/>
+          </a:xfrm>
+        </p:spPr>
+        <p:txBody>
+          <a:bodyPr anchor="b"/>
+          <a:lstStyle>
+            <a:lvl1pPr marL="0" indent="0">
+              <a:buNone/>
+              <a:defRPr sz="2400" b="1">
+                <a:latin typeface="RijksoverheidSansWebText Bold" panose="020B0803040202060203" pitchFamily="34" charset="0"/>
+                <a:ea typeface="RijksoverheidSansWebText Bold" panose="020B0803040202060203" pitchFamily="34" charset="0"/>
+              </a:defRPr>
+            </a:lvl1pPr>
+            <a:lvl2pPr marL="457200" indent="0">
+              <a:buNone/>
+              <a:defRPr sz="2000" b="1"/>
+            </a:lvl2pPr>
+            <a:lvl3pPr marL="914400" indent="0">
+              <a:buNone/>
+              <a:defRPr sz="1800" b="1"/>
+            </a:lvl3pPr>
+            <a:lvl4pPr marL="1371600" indent="0">
+              <a:buNone/>
+              <a:defRPr sz="1600" b="1"/>
+            </a:lvl4pPr>
+            <a:lvl5pPr marL="1828800" indent="0">
+              <a:buNone/>
+              <a:defRPr sz="1600" b="1"/>
+            </a:lvl5pPr>
+            <a:lvl6pPr marL="2286000" indent="0">
+              <a:buNone/>
+              <a:defRPr sz="1600" b="1"/>
+            </a:lvl6pPr>
+            <a:lvl7pPr marL="2743200" indent="0">
+              <a:buNone/>
+              <a:defRPr sz="1600" b="1"/>
+            </a:lvl7pPr>
+            <a:lvl8pPr marL="3200400" indent="0">
+              <a:buNone/>
+              <a:defRPr sz="1600" b="1"/>
+            </a:lvl8pPr>
+            <a:lvl9pPr marL="3657600" indent="0">
+              <a:buNone/>
+              <a:defRPr sz="1600" b="1"/>
+            </a:lvl9pPr>
+          </a:lstStyle>
+          <a:p>
+            <a:pPr lvl="0"/>
+            <a:r>
+              <a:rPr lang="nl-NL" dirty="0" smtClean="0"/>
+              <a:t>Tekststijl van het model bewerken</a:t>
+            </a:r>
+          </a:p>
+        </p:txBody>
+      </p:sp>
+      <p:sp>
+        <p:nvSpPr>
+          <p:cNvPr id="6" name="Content Placeholder 5"/>
+          <p:cNvSpPr>
+            <a:spLocks noGrp="1"/>
+          </p:cNvSpPr>
+          <p:nvPr>
+            <p:ph sz="quarter" idx="4"/>
+          </p:nvPr>
+        </p:nvSpPr>
+        <p:spPr>
+          <a:xfrm>
+            <a:off x="6193368" y="2174875"/>
+            <a:ext cx="5389033" cy="3951288"/>
+          </a:xfrm>
+        </p:spPr>
+        <p:txBody>
+          <a:bodyPr/>
+          <a:lstStyle>
+            <a:lvl1pPr>
+              <a:defRPr sz="2400">
+                <a:latin typeface="RijksoverheidSansText" panose="020B0503040202060203" pitchFamily="34" charset="0"/>
+              </a:defRPr>
+            </a:lvl1pPr>
+            <a:lvl2pPr>
+              <a:defRPr sz="2000">
+                <a:latin typeface="RijksoverheidSansText" panose="020B0503040202060203" pitchFamily="34" charset="0"/>
+              </a:defRPr>
+            </a:lvl2pPr>
+            <a:lvl3pPr>
+              <a:defRPr sz="1800">
+                <a:latin typeface="RijksoverheidSansText" panose="020B0503040202060203" pitchFamily="34" charset="0"/>
+              </a:defRPr>
+            </a:lvl3pPr>
+            <a:lvl4pPr>
+              <a:defRPr sz="1600">
+                <a:latin typeface="RijksoverheidSansText" panose="020B0503040202060203" pitchFamily="34" charset="0"/>
+              </a:defRPr>
+            </a:lvl4pPr>
+            <a:lvl5pPr>
+              <a:defRPr sz="1600">
+                <a:latin typeface="RijksoverheidSansText" panose="020B0503040202060203" pitchFamily="34" charset="0"/>
+              </a:defRPr>
+            </a:lvl5pPr>
+            <a:lvl6pPr>
+              <a:defRPr sz="1600"/>
+            </a:lvl6pPr>
+            <a:lvl7pPr>
+              <a:defRPr sz="1600"/>
+            </a:lvl7pPr>
+            <a:lvl8pPr>
+              <a:defRPr sz="1600"/>
+            </a:lvl8pPr>
+            <a:lvl9pPr>
+              <a:defRPr sz="1600"/>
+            </a:lvl9pPr>
+          </a:lstStyle>
+          <a:p>
+            <a:pPr lvl="0"/>
+            <a:r>
+              <a:rPr lang="nl-NL" dirty="0" smtClean="0"/>
+              <a:t>Tekststijl van het model bewerken</a:t>
+            </a:r>
+          </a:p>
+          <a:p>
+            <a:pPr lvl="1"/>
+            <a:r>
+              <a:rPr lang="nl-NL" dirty="0" smtClean="0"/>
+              <a:t>Tweede niveau</a:t>
+            </a:r>
+          </a:p>
+          <a:p>
+            <a:pPr lvl="2"/>
+            <a:r>
+              <a:rPr lang="nl-NL" dirty="0" smtClean="0"/>
+              <a:t>Derde niveau</a:t>
+            </a:r>
+          </a:p>
+          <a:p>
+            <a:pPr lvl="3"/>
+            <a:r>
+              <a:rPr lang="nl-NL" dirty="0" smtClean="0"/>
+              <a:t>Vierde niveau</a:t>
+            </a:r>
+          </a:p>
+          <a:p>
+            <a:pPr lvl="4"/>
+            <a:r>
+              <a:rPr lang="nl-NL" dirty="0" smtClean="0"/>
+              <a:t>Vijfde niveau</a:t>
+            </a:r>
+            <a:endParaRPr lang="nl-NL" dirty="0"/>
+          </a:p>
+        </p:txBody>
+      </p:sp>
+      <p:sp>
+        <p:nvSpPr>
+          <p:cNvPr id="7" name="Date Placeholder 1" descr="Date"/>
+          <p:cNvSpPr>
+            <a:spLocks noGrp="1"/>
+          </p:cNvSpPr>
+          <p:nvPr>
+            <p:ph type="dt" sz="half" idx="10"/>
+          </p:nvPr>
+        </p:nvSpPr>
+        <p:spPr/>
+        <p:txBody>
+          <a:bodyPr/>
+          <a:lstStyle>
+            <a:lvl1pPr>
+              <a:defRPr/>
+            </a:lvl1pPr>
+          </a:lstStyle>
+          <a:p>
+            <a:pPr>
+              <a:defRPr/>
+            </a:pPr>
+            <a:r>
+              <a:rPr lang="nl-NL" smtClean="0"/>
+              <a:t>College 5b: de centrale limietstelling</a:t>
+            </a:r>
+            <a:endParaRPr lang="nl-NL" dirty="0"/>
+          </a:p>
+        </p:txBody>
+      </p:sp>
+    </p:spTree>
+    <p:extLst>
+      <p:ext uri="{BB962C8B-B14F-4D97-AF65-F5344CB8AC3E}">
+        <p14:creationId xmlns:p14="http://schemas.microsoft.com/office/powerpoint/2010/main" val="4240135702"/>
+      </p:ext>
+    </p:extLst>
+  </p:cSld>
+  <p:clrMapOvr>
+    <a:masterClrMapping/>
+  </p:clrMapOvr>
+  <p:timing>
+    <p:tnLst>
+      <p:par>
+        <p:cTn id="1" dur="indefinite" restart="never" nodeType="tmRoot"/>
+      </p:par>
+    </p:tnLst>
+  </p:timing>
+</p:sldLayout>
+</file>
+
+<file path=ppt/slideLayouts/slideLayout28.xml><?xml version="1.0" encoding="utf-8"?>
+<p:sldLayout xmlns:a="http://schemas.openxmlformats.org/drawingml/2006/main" xmlns:r="http://schemas.openxmlformats.org/officeDocument/2006/relationships" xmlns:p="http://schemas.openxmlformats.org/presentationml/2006/main" type="titleOnly" preserve="1">
+  <p:cSld name="Alleen titel">
+    <p:spTree>
+      <p:nvGrpSpPr>
+        <p:cNvPr id="1" name=""/>
+        <p:cNvGrpSpPr/>
+        <p:nvPr/>
+      </p:nvGrpSpPr>
+      <p:grpSpPr>
+        <a:xfrm>
+          <a:off x="0" y="0"/>
+          <a:ext cx="0" cy="0"/>
+          <a:chOff x="0" y="0"/>
+          <a:chExt cx="0" cy="0"/>
+        </a:xfrm>
+      </p:grpSpPr>
+      <p:sp>
+        <p:nvSpPr>
+          <p:cNvPr id="2" name="Title 1"/>
+          <p:cNvSpPr>
+            <a:spLocks noGrp="1"/>
+          </p:cNvSpPr>
+          <p:nvPr>
+            <p:ph type="title"/>
+          </p:nvPr>
+        </p:nvSpPr>
+        <p:spPr/>
+        <p:txBody>
+          <a:bodyPr/>
+          <a:lstStyle>
+            <a:lvl1pPr>
+              <a:defRPr>
+                <a:latin typeface="RijksoverheidSansWebText Bold" panose="020B0803040202060203" pitchFamily="34" charset="0"/>
+                <a:ea typeface="RijksoverheidSansWebText Bold" panose="020B0803040202060203" pitchFamily="34" charset="0"/>
+              </a:defRPr>
+            </a:lvl1pPr>
+          </a:lstStyle>
+          <a:p>
+            <a:r>
+              <a:rPr lang="nl-NL" dirty="0" smtClean="0"/>
+              <a:t>Klik om de stijl te bewerken</a:t>
+            </a:r>
+            <a:endParaRPr lang="nl-NL" dirty="0"/>
+          </a:p>
+        </p:txBody>
+      </p:sp>
+      <p:sp>
+        <p:nvSpPr>
+          <p:cNvPr id="3" name="Date Placeholder 1" descr="Date"/>
+          <p:cNvSpPr>
+            <a:spLocks noGrp="1"/>
+          </p:cNvSpPr>
+          <p:nvPr>
+            <p:ph type="dt" sz="half" idx="10"/>
+          </p:nvPr>
+        </p:nvSpPr>
+        <p:spPr/>
+        <p:txBody>
+          <a:bodyPr/>
+          <a:lstStyle>
+            <a:lvl1pPr>
+              <a:defRPr/>
+            </a:lvl1pPr>
+          </a:lstStyle>
+          <a:p>
+            <a:pPr>
+              <a:defRPr/>
+            </a:pPr>
+            <a:r>
+              <a:rPr lang="nl-NL" smtClean="0"/>
+              <a:t>College 5b: de centrale limietstelling</a:t>
+            </a:r>
+            <a:endParaRPr lang="nl-NL" dirty="0"/>
+          </a:p>
+        </p:txBody>
+      </p:sp>
+    </p:spTree>
+    <p:extLst>
+      <p:ext uri="{BB962C8B-B14F-4D97-AF65-F5344CB8AC3E}">
+        <p14:creationId xmlns:p14="http://schemas.microsoft.com/office/powerpoint/2010/main" val="2345528922"/>
+      </p:ext>
+    </p:extLst>
+  </p:cSld>
+  <p:clrMapOvr>
+    <a:masterClrMapping/>
+  </p:clrMapOvr>
+  <p:timing>
+    <p:tnLst>
+      <p:par>
+        <p:cTn id="1" dur="indefinite" restart="never" nodeType="tmRoot"/>
+      </p:par>
+    </p:tnLst>
+  </p:timing>
+</p:sldLayout>
+</file>
+
+<file path=ppt/slideLayouts/slideLayout29.xml><?xml version="1.0" encoding="utf-8"?>
+<p:sldLayout xmlns:a="http://schemas.openxmlformats.org/drawingml/2006/main" xmlns:r="http://schemas.openxmlformats.org/officeDocument/2006/relationships" xmlns:p="http://schemas.openxmlformats.org/presentationml/2006/main" type="blank" preserve="1">
+  <p:cSld name="Leeg">
+    <p:spTree>
+      <p:nvGrpSpPr>
+        <p:cNvPr id="1" name=""/>
+        <p:cNvGrpSpPr/>
+        <p:nvPr/>
+      </p:nvGrpSpPr>
+      <p:grpSpPr>
+        <a:xfrm>
+          <a:off x="0" y="0"/>
+          <a:ext cx="0" cy="0"/>
+          <a:chOff x="0" y="0"/>
+          <a:chExt cx="0" cy="0"/>
+        </a:xfrm>
+      </p:grpSpPr>
+      <p:sp>
+        <p:nvSpPr>
+          <p:cNvPr id="2" name="Date Placeholder 1" descr="Date"/>
+          <p:cNvSpPr>
+            <a:spLocks noGrp="1"/>
+          </p:cNvSpPr>
+          <p:nvPr>
+            <p:ph type="dt" sz="half" idx="10"/>
+          </p:nvPr>
+        </p:nvSpPr>
+        <p:spPr/>
+        <p:txBody>
+          <a:bodyPr/>
+          <a:lstStyle>
+            <a:lvl1pPr>
+              <a:defRPr/>
+            </a:lvl1pPr>
+          </a:lstStyle>
+          <a:p>
+            <a:pPr>
+              <a:defRPr/>
+            </a:pPr>
+            <a:r>
+              <a:rPr lang="nl-NL" smtClean="0"/>
+              <a:t>College 5b: de centrale limietstelling</a:t>
+            </a:r>
+            <a:endParaRPr lang="nl-NL" dirty="0"/>
+          </a:p>
+        </p:txBody>
+      </p:sp>
+    </p:spTree>
+    <p:extLst>
+      <p:ext uri="{BB962C8B-B14F-4D97-AF65-F5344CB8AC3E}">
+        <p14:creationId xmlns:p14="http://schemas.microsoft.com/office/powerpoint/2010/main" val="2714055551"/>
       </p:ext>
     </p:extLst>
   </p:cSld>
@@ -4429,6 +6083,834 @@
   <p:clrMapOvr>
     <a:masterClrMapping/>
   </p:clrMapOvr>
+</p:sldLayout>
+</file>
+
+<file path=ppt/slideLayouts/slideLayout30.xml><?xml version="1.0" encoding="utf-8"?>
+<p:sldLayout xmlns:a="http://schemas.openxmlformats.org/drawingml/2006/main" xmlns:r="http://schemas.openxmlformats.org/officeDocument/2006/relationships" xmlns:p="http://schemas.openxmlformats.org/presentationml/2006/main" type="objTx" preserve="1">
+  <p:cSld name="Inhoud met bijschrift">
+    <p:spTree>
+      <p:nvGrpSpPr>
+        <p:cNvPr id="1" name=""/>
+        <p:cNvGrpSpPr/>
+        <p:nvPr/>
+      </p:nvGrpSpPr>
+      <p:grpSpPr>
+        <a:xfrm>
+          <a:off x="0" y="0"/>
+          <a:ext cx="0" cy="0"/>
+          <a:chOff x="0" y="0"/>
+          <a:chExt cx="0" cy="0"/>
+        </a:xfrm>
+      </p:grpSpPr>
+      <p:sp>
+        <p:nvSpPr>
+          <p:cNvPr id="2" name="Title 1"/>
+          <p:cNvSpPr>
+            <a:spLocks noGrp="1"/>
+          </p:cNvSpPr>
+          <p:nvPr>
+            <p:ph type="title"/>
+          </p:nvPr>
+        </p:nvSpPr>
+        <p:spPr>
+          <a:xfrm>
+            <a:off x="609601" y="1124744"/>
+            <a:ext cx="4011084" cy="310356"/>
+          </a:xfrm>
+        </p:spPr>
+        <p:txBody>
+          <a:bodyPr anchor="b"/>
+          <a:lstStyle>
+            <a:lvl1pPr algn="l">
+              <a:defRPr sz="2000" b="1"/>
+            </a:lvl1pPr>
+          </a:lstStyle>
+          <a:p>
+            <a:r>
+              <a:rPr lang="nl-NL" smtClean="0"/>
+              <a:t>Klik om de stijl te bewerken</a:t>
+            </a:r>
+            <a:endParaRPr lang="nl-NL"/>
+          </a:p>
+        </p:txBody>
+      </p:sp>
+      <p:sp>
+        <p:nvSpPr>
+          <p:cNvPr id="3" name="Content Placeholder 2"/>
+          <p:cNvSpPr>
+            <a:spLocks noGrp="1"/>
+          </p:cNvSpPr>
+          <p:nvPr>
+            <p:ph idx="1"/>
+          </p:nvPr>
+        </p:nvSpPr>
+        <p:spPr>
+          <a:xfrm>
+            <a:off x="4766733" y="1124745"/>
+            <a:ext cx="6815667" cy="5001419"/>
+          </a:xfrm>
+        </p:spPr>
+        <p:txBody>
+          <a:bodyPr/>
+          <a:lstStyle>
+            <a:lvl1pPr>
+              <a:defRPr sz="3200">
+                <a:latin typeface="RijksoverheidSansText" panose="020B0503040202060203" pitchFamily="34" charset="0"/>
+              </a:defRPr>
+            </a:lvl1pPr>
+            <a:lvl2pPr>
+              <a:defRPr sz="2800">
+                <a:latin typeface="RijksoverheidSansText" panose="020B0503040202060203" pitchFamily="34" charset="0"/>
+              </a:defRPr>
+            </a:lvl2pPr>
+            <a:lvl3pPr>
+              <a:defRPr sz="2400">
+                <a:latin typeface="RijksoverheidSansText" panose="020B0503040202060203" pitchFamily="34" charset="0"/>
+              </a:defRPr>
+            </a:lvl3pPr>
+            <a:lvl4pPr>
+              <a:defRPr sz="2000">
+                <a:latin typeface="RijksoverheidSansText" panose="020B0503040202060203" pitchFamily="34" charset="0"/>
+              </a:defRPr>
+            </a:lvl4pPr>
+            <a:lvl5pPr>
+              <a:defRPr sz="2000">
+                <a:latin typeface="RijksoverheidSansText" panose="020B0503040202060203" pitchFamily="34" charset="0"/>
+              </a:defRPr>
+            </a:lvl5pPr>
+            <a:lvl6pPr>
+              <a:defRPr sz="2000"/>
+            </a:lvl6pPr>
+            <a:lvl7pPr>
+              <a:defRPr sz="2000"/>
+            </a:lvl7pPr>
+            <a:lvl8pPr>
+              <a:defRPr sz="2000"/>
+            </a:lvl8pPr>
+            <a:lvl9pPr>
+              <a:defRPr sz="2000"/>
+            </a:lvl9pPr>
+          </a:lstStyle>
+          <a:p>
+            <a:pPr lvl="0"/>
+            <a:r>
+              <a:rPr lang="nl-NL" dirty="0" smtClean="0"/>
+              <a:t>Tekststijl van het model bewerken</a:t>
+            </a:r>
+          </a:p>
+          <a:p>
+            <a:pPr lvl="1"/>
+            <a:r>
+              <a:rPr lang="nl-NL" dirty="0" smtClean="0"/>
+              <a:t>Tweede niveau</a:t>
+            </a:r>
+          </a:p>
+          <a:p>
+            <a:pPr lvl="2"/>
+            <a:r>
+              <a:rPr lang="nl-NL" dirty="0" smtClean="0"/>
+              <a:t>Derde niveau</a:t>
+            </a:r>
+          </a:p>
+          <a:p>
+            <a:pPr lvl="3"/>
+            <a:r>
+              <a:rPr lang="nl-NL" dirty="0" smtClean="0"/>
+              <a:t>Vierde niveau</a:t>
+            </a:r>
+          </a:p>
+          <a:p>
+            <a:pPr lvl="4"/>
+            <a:r>
+              <a:rPr lang="nl-NL" dirty="0" smtClean="0"/>
+              <a:t>Vijfde niveau</a:t>
+            </a:r>
+            <a:endParaRPr lang="nl-NL" dirty="0"/>
+          </a:p>
+        </p:txBody>
+      </p:sp>
+      <p:sp>
+        <p:nvSpPr>
+          <p:cNvPr id="4" name="Text Placeholder 3"/>
+          <p:cNvSpPr>
+            <a:spLocks noGrp="1"/>
+          </p:cNvSpPr>
+          <p:nvPr>
+            <p:ph type="body" sz="half" idx="2"/>
+          </p:nvPr>
+        </p:nvSpPr>
+        <p:spPr>
+          <a:xfrm>
+            <a:off x="609601" y="1435101"/>
+            <a:ext cx="4011084" cy="4691063"/>
+          </a:xfrm>
+        </p:spPr>
+        <p:txBody>
+          <a:bodyPr/>
+          <a:lstStyle>
+            <a:lvl1pPr marL="0" indent="0">
+              <a:buNone/>
+              <a:defRPr sz="1400">
+                <a:latin typeface="RijksoverheidSansText" panose="020B0503040202060203" pitchFamily="34" charset="0"/>
+              </a:defRPr>
+            </a:lvl1pPr>
+            <a:lvl2pPr marL="457200" indent="0">
+              <a:buNone/>
+              <a:defRPr sz="1200"/>
+            </a:lvl2pPr>
+            <a:lvl3pPr marL="914400" indent="0">
+              <a:buNone/>
+              <a:defRPr sz="1000"/>
+            </a:lvl3pPr>
+            <a:lvl4pPr marL="1371600" indent="0">
+              <a:buNone/>
+              <a:defRPr sz="900"/>
+            </a:lvl4pPr>
+            <a:lvl5pPr marL="1828800" indent="0">
+              <a:buNone/>
+              <a:defRPr sz="900"/>
+            </a:lvl5pPr>
+            <a:lvl6pPr marL="2286000" indent="0">
+              <a:buNone/>
+              <a:defRPr sz="900"/>
+            </a:lvl6pPr>
+            <a:lvl7pPr marL="2743200" indent="0">
+              <a:buNone/>
+              <a:defRPr sz="900"/>
+            </a:lvl7pPr>
+            <a:lvl8pPr marL="3200400" indent="0">
+              <a:buNone/>
+              <a:defRPr sz="900"/>
+            </a:lvl8pPr>
+            <a:lvl9pPr marL="3657600" indent="0">
+              <a:buNone/>
+              <a:defRPr sz="900"/>
+            </a:lvl9pPr>
+          </a:lstStyle>
+          <a:p>
+            <a:pPr lvl="0"/>
+            <a:r>
+              <a:rPr lang="nl-NL" dirty="0" smtClean="0"/>
+              <a:t>Tekststijl van het model bewerken</a:t>
+            </a:r>
+          </a:p>
+        </p:txBody>
+      </p:sp>
+      <p:sp>
+        <p:nvSpPr>
+          <p:cNvPr id="5" name="Date Placeholder 1" descr="Date"/>
+          <p:cNvSpPr>
+            <a:spLocks noGrp="1"/>
+          </p:cNvSpPr>
+          <p:nvPr>
+            <p:ph type="dt" sz="half" idx="10"/>
+          </p:nvPr>
+        </p:nvSpPr>
+        <p:spPr/>
+        <p:txBody>
+          <a:bodyPr/>
+          <a:lstStyle>
+            <a:lvl1pPr>
+              <a:defRPr/>
+            </a:lvl1pPr>
+          </a:lstStyle>
+          <a:p>
+            <a:pPr>
+              <a:defRPr/>
+            </a:pPr>
+            <a:r>
+              <a:rPr lang="nl-NL" smtClean="0"/>
+              <a:t>College 5b: de centrale limietstelling</a:t>
+            </a:r>
+            <a:endParaRPr lang="nl-NL" dirty="0"/>
+          </a:p>
+        </p:txBody>
+      </p:sp>
+    </p:spTree>
+    <p:extLst>
+      <p:ext uri="{BB962C8B-B14F-4D97-AF65-F5344CB8AC3E}">
+        <p14:creationId xmlns:p14="http://schemas.microsoft.com/office/powerpoint/2010/main" val="628001267"/>
+      </p:ext>
+    </p:extLst>
+  </p:cSld>
+  <p:clrMapOvr>
+    <a:masterClrMapping/>
+  </p:clrMapOvr>
+  <p:timing>
+    <p:tnLst>
+      <p:par>
+        <p:cTn id="1" dur="indefinite" restart="never" nodeType="tmRoot"/>
+      </p:par>
+    </p:tnLst>
+  </p:timing>
+</p:sldLayout>
+</file>
+
+<file path=ppt/slideLayouts/slideLayout31.xml><?xml version="1.0" encoding="utf-8"?>
+<p:sldLayout xmlns:a="http://schemas.openxmlformats.org/drawingml/2006/main" xmlns:r="http://schemas.openxmlformats.org/officeDocument/2006/relationships" xmlns:p="http://schemas.openxmlformats.org/presentationml/2006/main" type="picTx" preserve="1">
+  <p:cSld name="Afbeelding met bijschrift">
+    <p:spTree>
+      <p:nvGrpSpPr>
+        <p:cNvPr id="1" name=""/>
+        <p:cNvGrpSpPr/>
+        <p:nvPr/>
+      </p:nvGrpSpPr>
+      <p:grpSpPr>
+        <a:xfrm>
+          <a:off x="0" y="0"/>
+          <a:ext cx="0" cy="0"/>
+          <a:chOff x="0" y="0"/>
+          <a:chExt cx="0" cy="0"/>
+        </a:xfrm>
+      </p:grpSpPr>
+      <p:sp>
+        <p:nvSpPr>
+          <p:cNvPr id="2" name="Title 1"/>
+          <p:cNvSpPr>
+            <a:spLocks noGrp="1"/>
+          </p:cNvSpPr>
+          <p:nvPr>
+            <p:ph type="title"/>
+          </p:nvPr>
+        </p:nvSpPr>
+        <p:spPr>
+          <a:xfrm>
+            <a:off x="2389717" y="5059561"/>
+            <a:ext cx="7315200" cy="307777"/>
+          </a:xfrm>
+        </p:spPr>
+        <p:txBody>
+          <a:bodyPr anchor="b"/>
+          <a:lstStyle>
+            <a:lvl1pPr algn="l">
+              <a:defRPr sz="2000" b="1">
+                <a:latin typeface="RijksoverheidSansWebText Bold" panose="020B0803040202060203" pitchFamily="34" charset="0"/>
+                <a:ea typeface="RijksoverheidSansWebText Bold" panose="020B0803040202060203" pitchFamily="34" charset="0"/>
+              </a:defRPr>
+            </a:lvl1pPr>
+          </a:lstStyle>
+          <a:p>
+            <a:r>
+              <a:rPr lang="nl-NL" dirty="0" smtClean="0"/>
+              <a:t>Klik om de stijl te bewerken</a:t>
+            </a:r>
+            <a:endParaRPr lang="nl-NL" dirty="0"/>
+          </a:p>
+        </p:txBody>
+      </p:sp>
+      <p:sp>
+        <p:nvSpPr>
+          <p:cNvPr id="3" name="Picture Placeholder 2"/>
+          <p:cNvSpPr>
+            <a:spLocks noGrp="1"/>
+          </p:cNvSpPr>
+          <p:nvPr>
+            <p:ph type="pic" idx="1"/>
+          </p:nvPr>
+        </p:nvSpPr>
+        <p:spPr>
+          <a:xfrm>
+            <a:off x="2389717" y="1124744"/>
+            <a:ext cx="7315200" cy="3602831"/>
+          </a:xfrm>
+        </p:spPr>
+        <p:txBody>
+          <a:bodyPr/>
+          <a:lstStyle>
+            <a:lvl1pPr marL="0" indent="0">
+              <a:buNone/>
+              <a:defRPr sz="3200">
+                <a:latin typeface="RijksoverheidSansText" panose="020B0503040202060203" pitchFamily="34" charset="0"/>
+              </a:defRPr>
+            </a:lvl1pPr>
+            <a:lvl2pPr marL="457200" indent="0">
+              <a:buNone/>
+              <a:defRPr sz="2800"/>
+            </a:lvl2pPr>
+            <a:lvl3pPr marL="914400" indent="0">
+              <a:buNone/>
+              <a:defRPr sz="2400"/>
+            </a:lvl3pPr>
+            <a:lvl4pPr marL="1371600" indent="0">
+              <a:buNone/>
+              <a:defRPr sz="2000"/>
+            </a:lvl4pPr>
+            <a:lvl5pPr marL="1828800" indent="0">
+              <a:buNone/>
+              <a:defRPr sz="2000"/>
+            </a:lvl5pPr>
+            <a:lvl6pPr marL="2286000" indent="0">
+              <a:buNone/>
+              <a:defRPr sz="2000"/>
+            </a:lvl6pPr>
+            <a:lvl7pPr marL="2743200" indent="0">
+              <a:buNone/>
+              <a:defRPr sz="2000"/>
+            </a:lvl7pPr>
+            <a:lvl8pPr marL="3200400" indent="0">
+              <a:buNone/>
+              <a:defRPr sz="2000"/>
+            </a:lvl8pPr>
+            <a:lvl9pPr marL="3657600" indent="0">
+              <a:buNone/>
+              <a:defRPr sz="2000"/>
+            </a:lvl9pPr>
+          </a:lstStyle>
+          <a:p>
+            <a:pPr lvl="0"/>
+            <a:r>
+              <a:rPr lang="nl-NL" noProof="0" dirty="0" smtClean="0"/>
+              <a:t>Klik op het pictogram als u een afbeelding wilt toevoegen</a:t>
+            </a:r>
+            <a:endParaRPr lang="nl-NL" noProof="0" dirty="0"/>
+          </a:p>
+        </p:txBody>
+      </p:sp>
+      <p:sp>
+        <p:nvSpPr>
+          <p:cNvPr id="4" name="Text Placeholder 3"/>
+          <p:cNvSpPr>
+            <a:spLocks noGrp="1"/>
+          </p:cNvSpPr>
+          <p:nvPr>
+            <p:ph type="body" sz="half" idx="2"/>
+          </p:nvPr>
+        </p:nvSpPr>
+        <p:spPr>
+          <a:xfrm>
+            <a:off x="2389717" y="5367338"/>
+            <a:ext cx="7315200" cy="804862"/>
+          </a:xfrm>
+        </p:spPr>
+        <p:txBody>
+          <a:bodyPr/>
+          <a:lstStyle>
+            <a:lvl1pPr marL="0" indent="0">
+              <a:buNone/>
+              <a:defRPr sz="1400">
+                <a:latin typeface="RijksoverheidSansText" panose="020B0503040202060203" pitchFamily="34" charset="0"/>
+              </a:defRPr>
+            </a:lvl1pPr>
+            <a:lvl2pPr marL="457200" indent="0">
+              <a:buNone/>
+              <a:defRPr sz="1200"/>
+            </a:lvl2pPr>
+            <a:lvl3pPr marL="914400" indent="0">
+              <a:buNone/>
+              <a:defRPr sz="1000"/>
+            </a:lvl3pPr>
+            <a:lvl4pPr marL="1371600" indent="0">
+              <a:buNone/>
+              <a:defRPr sz="900"/>
+            </a:lvl4pPr>
+            <a:lvl5pPr marL="1828800" indent="0">
+              <a:buNone/>
+              <a:defRPr sz="900"/>
+            </a:lvl5pPr>
+            <a:lvl6pPr marL="2286000" indent="0">
+              <a:buNone/>
+              <a:defRPr sz="900"/>
+            </a:lvl6pPr>
+            <a:lvl7pPr marL="2743200" indent="0">
+              <a:buNone/>
+              <a:defRPr sz="900"/>
+            </a:lvl7pPr>
+            <a:lvl8pPr marL="3200400" indent="0">
+              <a:buNone/>
+              <a:defRPr sz="900"/>
+            </a:lvl8pPr>
+            <a:lvl9pPr marL="3657600" indent="0">
+              <a:buNone/>
+              <a:defRPr sz="900"/>
+            </a:lvl9pPr>
+          </a:lstStyle>
+          <a:p>
+            <a:pPr lvl="0"/>
+            <a:r>
+              <a:rPr lang="nl-NL" dirty="0" smtClean="0"/>
+              <a:t>Tekststijl van het model bewerken</a:t>
+            </a:r>
+          </a:p>
+        </p:txBody>
+      </p:sp>
+      <p:sp>
+        <p:nvSpPr>
+          <p:cNvPr id="5" name="Date Placeholder 1" descr="Date"/>
+          <p:cNvSpPr>
+            <a:spLocks noGrp="1"/>
+          </p:cNvSpPr>
+          <p:nvPr>
+            <p:ph type="dt" sz="half" idx="10"/>
+          </p:nvPr>
+        </p:nvSpPr>
+        <p:spPr/>
+        <p:txBody>
+          <a:bodyPr/>
+          <a:lstStyle>
+            <a:lvl1pPr>
+              <a:defRPr/>
+            </a:lvl1pPr>
+          </a:lstStyle>
+          <a:p>
+            <a:pPr>
+              <a:defRPr/>
+            </a:pPr>
+            <a:r>
+              <a:rPr lang="nl-NL" smtClean="0"/>
+              <a:t>College 5b: de centrale limietstelling</a:t>
+            </a:r>
+            <a:endParaRPr lang="nl-NL" dirty="0"/>
+          </a:p>
+        </p:txBody>
+      </p:sp>
+    </p:spTree>
+    <p:extLst>
+      <p:ext uri="{BB962C8B-B14F-4D97-AF65-F5344CB8AC3E}">
+        <p14:creationId xmlns:p14="http://schemas.microsoft.com/office/powerpoint/2010/main" val="982650454"/>
+      </p:ext>
+    </p:extLst>
+  </p:cSld>
+  <p:clrMapOvr>
+    <a:masterClrMapping/>
+  </p:clrMapOvr>
+  <p:timing>
+    <p:tnLst>
+      <p:par>
+        <p:cTn id="1" dur="indefinite" restart="never" nodeType="tmRoot"/>
+      </p:par>
+    </p:tnLst>
+  </p:timing>
+</p:sldLayout>
+</file>
+
+<file path=ppt/slideLayouts/slideLayout32.xml><?xml version="1.0" encoding="utf-8"?>
+<p:sldLayout xmlns:a="http://schemas.openxmlformats.org/drawingml/2006/main" xmlns:r="http://schemas.openxmlformats.org/officeDocument/2006/relationships" xmlns:p="http://schemas.openxmlformats.org/presentationml/2006/main" type="vertTx" preserve="1">
+  <p:cSld name="Titel en verticale tekst">
+    <p:spTree>
+      <p:nvGrpSpPr>
+        <p:cNvPr id="1" name=""/>
+        <p:cNvGrpSpPr/>
+        <p:nvPr/>
+      </p:nvGrpSpPr>
+      <p:grpSpPr>
+        <a:xfrm>
+          <a:off x="0" y="0"/>
+          <a:ext cx="0" cy="0"/>
+          <a:chOff x="0" y="0"/>
+          <a:chExt cx="0" cy="0"/>
+        </a:xfrm>
+      </p:grpSpPr>
+      <p:sp>
+        <p:nvSpPr>
+          <p:cNvPr id="2" name="Title 1"/>
+          <p:cNvSpPr>
+            <a:spLocks noGrp="1"/>
+          </p:cNvSpPr>
+          <p:nvPr>
+            <p:ph type="title"/>
+          </p:nvPr>
+        </p:nvSpPr>
+        <p:spPr/>
+        <p:txBody>
+          <a:bodyPr/>
+          <a:lstStyle>
+            <a:lvl1pPr>
+              <a:defRPr>
+                <a:latin typeface="RijksoverheidSansWebText Bold" panose="020B0803040202060203" pitchFamily="34" charset="0"/>
+                <a:ea typeface="RijksoverheidSansWebText Bold" panose="020B0803040202060203" pitchFamily="34" charset="0"/>
+              </a:defRPr>
+            </a:lvl1pPr>
+          </a:lstStyle>
+          <a:p>
+            <a:r>
+              <a:rPr lang="nl-NL" dirty="0" smtClean="0"/>
+              <a:t>Klik om de stijl te bewerken</a:t>
+            </a:r>
+            <a:endParaRPr lang="nl-NL" dirty="0"/>
+          </a:p>
+        </p:txBody>
+      </p:sp>
+      <p:sp>
+        <p:nvSpPr>
+          <p:cNvPr id="3" name="Vertical Text Placeholder 2"/>
+          <p:cNvSpPr>
+            <a:spLocks noGrp="1"/>
+          </p:cNvSpPr>
+          <p:nvPr>
+            <p:ph type="body" orient="vert" idx="1"/>
+          </p:nvPr>
+        </p:nvSpPr>
+        <p:spPr/>
+        <p:txBody>
+          <a:bodyPr vert="eaVert"/>
+          <a:lstStyle>
+            <a:lvl1pPr>
+              <a:defRPr>
+                <a:latin typeface="RijksoverheidSansText" panose="020B0503040202060203" pitchFamily="34" charset="0"/>
+              </a:defRPr>
+            </a:lvl1pPr>
+            <a:lvl2pPr>
+              <a:defRPr>
+                <a:latin typeface="RijksoverheidSansText" panose="020B0503040202060203" pitchFamily="34" charset="0"/>
+              </a:defRPr>
+            </a:lvl2pPr>
+            <a:lvl3pPr>
+              <a:defRPr>
+                <a:latin typeface="RijksoverheidSansText" panose="020B0503040202060203" pitchFamily="34" charset="0"/>
+              </a:defRPr>
+            </a:lvl3pPr>
+            <a:lvl4pPr>
+              <a:defRPr>
+                <a:latin typeface="RijksoverheidSansText" panose="020B0503040202060203" pitchFamily="34" charset="0"/>
+              </a:defRPr>
+            </a:lvl4pPr>
+            <a:lvl5pPr>
+              <a:defRPr>
+                <a:latin typeface="RijksoverheidSansText" panose="020B0503040202060203" pitchFamily="34" charset="0"/>
+              </a:defRPr>
+            </a:lvl5pPr>
+          </a:lstStyle>
+          <a:p>
+            <a:pPr lvl="0"/>
+            <a:r>
+              <a:rPr lang="nl-NL" dirty="0" smtClean="0"/>
+              <a:t>Tekststijl van het model bewerken</a:t>
+            </a:r>
+          </a:p>
+          <a:p>
+            <a:pPr lvl="1"/>
+            <a:r>
+              <a:rPr lang="nl-NL" dirty="0" smtClean="0"/>
+              <a:t>Tweede niveau</a:t>
+            </a:r>
+          </a:p>
+          <a:p>
+            <a:pPr lvl="2"/>
+            <a:r>
+              <a:rPr lang="nl-NL" dirty="0" smtClean="0"/>
+              <a:t>Derde niveau</a:t>
+            </a:r>
+          </a:p>
+          <a:p>
+            <a:pPr lvl="3"/>
+            <a:r>
+              <a:rPr lang="nl-NL" dirty="0" smtClean="0"/>
+              <a:t>Vierde niveau</a:t>
+            </a:r>
+          </a:p>
+          <a:p>
+            <a:pPr lvl="4"/>
+            <a:r>
+              <a:rPr lang="nl-NL" dirty="0" smtClean="0"/>
+              <a:t>Vijfde niveau</a:t>
+            </a:r>
+            <a:endParaRPr lang="nl-NL" dirty="0"/>
+          </a:p>
+        </p:txBody>
+      </p:sp>
+      <p:sp>
+        <p:nvSpPr>
+          <p:cNvPr id="4" name="Date Placeholder 1" descr="Date"/>
+          <p:cNvSpPr>
+            <a:spLocks noGrp="1"/>
+          </p:cNvSpPr>
+          <p:nvPr>
+            <p:ph type="dt" sz="half" idx="10"/>
+          </p:nvPr>
+        </p:nvSpPr>
+        <p:spPr/>
+        <p:txBody>
+          <a:bodyPr/>
+          <a:lstStyle>
+            <a:lvl1pPr>
+              <a:defRPr/>
+            </a:lvl1pPr>
+          </a:lstStyle>
+          <a:p>
+            <a:pPr>
+              <a:defRPr/>
+            </a:pPr>
+            <a:r>
+              <a:rPr lang="nl-NL" smtClean="0"/>
+              <a:t>College 5b: de centrale limietstelling</a:t>
+            </a:r>
+            <a:endParaRPr lang="nl-NL" dirty="0"/>
+          </a:p>
+        </p:txBody>
+      </p:sp>
+    </p:spTree>
+    <p:extLst>
+      <p:ext uri="{BB962C8B-B14F-4D97-AF65-F5344CB8AC3E}">
+        <p14:creationId xmlns:p14="http://schemas.microsoft.com/office/powerpoint/2010/main" val="2094456249"/>
+      </p:ext>
+    </p:extLst>
+  </p:cSld>
+  <p:clrMapOvr>
+    <a:masterClrMapping/>
+  </p:clrMapOvr>
+  <p:timing>
+    <p:tnLst>
+      <p:par>
+        <p:cTn id="1" dur="indefinite" restart="never" nodeType="tmRoot"/>
+      </p:par>
+    </p:tnLst>
+  </p:timing>
+</p:sldLayout>
+</file>
+
+<file path=ppt/slideLayouts/slideLayout33.xml><?xml version="1.0" encoding="utf-8"?>
+<p:sldLayout xmlns:a="http://schemas.openxmlformats.org/drawingml/2006/main" xmlns:r="http://schemas.openxmlformats.org/officeDocument/2006/relationships" xmlns:p="http://schemas.openxmlformats.org/presentationml/2006/main" type="vertTitleAndTx" preserve="1">
+  <p:cSld name="Verticale titel en tekst">
+    <p:spTree>
+      <p:nvGrpSpPr>
+        <p:cNvPr id="1" name=""/>
+        <p:cNvGrpSpPr/>
+        <p:nvPr/>
+      </p:nvGrpSpPr>
+      <p:grpSpPr>
+        <a:xfrm>
+          <a:off x="0" y="0"/>
+          <a:ext cx="0" cy="0"/>
+          <a:chOff x="0" y="0"/>
+          <a:chExt cx="0" cy="0"/>
+        </a:xfrm>
+      </p:grpSpPr>
+      <p:sp>
+        <p:nvSpPr>
+          <p:cNvPr id="2" name="Vertical Title 1"/>
+          <p:cNvSpPr>
+            <a:spLocks noGrp="1"/>
+          </p:cNvSpPr>
+          <p:nvPr>
+            <p:ph type="title" orient="vert"/>
+          </p:nvPr>
+        </p:nvSpPr>
+        <p:spPr>
+          <a:xfrm>
+            <a:off x="10778007" y="1265238"/>
+            <a:ext cx="400110" cy="4754562"/>
+          </a:xfrm>
+        </p:spPr>
+        <p:txBody>
+          <a:bodyPr vert="eaVert"/>
+          <a:lstStyle>
+            <a:lvl1pPr>
+              <a:defRPr>
+                <a:latin typeface="RijksoverheidSansWebText Bold" panose="020B0803040202060203" pitchFamily="34" charset="0"/>
+                <a:ea typeface="RijksoverheidSansWebText Bold" panose="020B0803040202060203" pitchFamily="34" charset="0"/>
+              </a:defRPr>
+            </a:lvl1pPr>
+          </a:lstStyle>
+          <a:p>
+            <a:r>
+              <a:rPr lang="nl-NL" dirty="0" smtClean="0"/>
+              <a:t>Klik om de stijl te bewerken</a:t>
+            </a:r>
+            <a:endParaRPr lang="nl-NL" dirty="0"/>
+          </a:p>
+        </p:txBody>
+      </p:sp>
+      <p:sp>
+        <p:nvSpPr>
+          <p:cNvPr id="3" name="Vertical Text Placeholder 2"/>
+          <p:cNvSpPr>
+            <a:spLocks noGrp="1"/>
+          </p:cNvSpPr>
+          <p:nvPr>
+            <p:ph type="body" orient="vert" idx="1"/>
+          </p:nvPr>
+        </p:nvSpPr>
+        <p:spPr>
+          <a:xfrm>
+            <a:off x="812800" y="1265238"/>
+            <a:ext cx="7571317" cy="4754562"/>
+          </a:xfrm>
+        </p:spPr>
+        <p:txBody>
+          <a:bodyPr vert="eaVert"/>
+          <a:lstStyle>
+            <a:lvl1pPr>
+              <a:defRPr>
+                <a:latin typeface="RijksoverheidSansText" panose="020B0503040202060203" pitchFamily="34" charset="0"/>
+              </a:defRPr>
+            </a:lvl1pPr>
+            <a:lvl2pPr>
+              <a:defRPr>
+                <a:latin typeface="RijksoverheidSansText" panose="020B0503040202060203" pitchFamily="34" charset="0"/>
+              </a:defRPr>
+            </a:lvl2pPr>
+            <a:lvl3pPr>
+              <a:defRPr>
+                <a:latin typeface="RijksoverheidSansText" panose="020B0503040202060203" pitchFamily="34" charset="0"/>
+              </a:defRPr>
+            </a:lvl3pPr>
+            <a:lvl4pPr>
+              <a:defRPr>
+                <a:latin typeface="RijksoverheidSansText" panose="020B0503040202060203" pitchFamily="34" charset="0"/>
+              </a:defRPr>
+            </a:lvl4pPr>
+            <a:lvl5pPr>
+              <a:defRPr>
+                <a:latin typeface="RijksoverheidSansText" panose="020B0503040202060203" pitchFamily="34" charset="0"/>
+              </a:defRPr>
+            </a:lvl5pPr>
+          </a:lstStyle>
+          <a:p>
+            <a:pPr lvl="0"/>
+            <a:r>
+              <a:rPr lang="nl-NL" dirty="0" smtClean="0"/>
+              <a:t>Tekststijl van het model bewerken</a:t>
+            </a:r>
+          </a:p>
+          <a:p>
+            <a:pPr lvl="1"/>
+            <a:r>
+              <a:rPr lang="nl-NL" dirty="0" smtClean="0"/>
+              <a:t>Tweede niveau</a:t>
+            </a:r>
+          </a:p>
+          <a:p>
+            <a:pPr lvl="2"/>
+            <a:r>
+              <a:rPr lang="nl-NL" dirty="0" smtClean="0"/>
+              <a:t>Derde niveau</a:t>
+            </a:r>
+          </a:p>
+          <a:p>
+            <a:pPr lvl="3"/>
+            <a:r>
+              <a:rPr lang="nl-NL" dirty="0" smtClean="0"/>
+              <a:t>Vierde niveau</a:t>
+            </a:r>
+          </a:p>
+          <a:p>
+            <a:pPr lvl="4"/>
+            <a:r>
+              <a:rPr lang="nl-NL" dirty="0" smtClean="0"/>
+              <a:t>Vijfde niveau</a:t>
+            </a:r>
+            <a:endParaRPr lang="nl-NL" dirty="0"/>
+          </a:p>
+        </p:txBody>
+      </p:sp>
+    </p:spTree>
+    <p:extLst>
+      <p:ext uri="{BB962C8B-B14F-4D97-AF65-F5344CB8AC3E}">
+        <p14:creationId xmlns:p14="http://schemas.microsoft.com/office/powerpoint/2010/main" val="1074934543"/>
+      </p:ext>
+    </p:extLst>
+  </p:cSld>
+  <p:clrMapOvr>
+    <a:masterClrMapping/>
+  </p:clrMapOvr>
+  <p:timing>
+    <p:tnLst>
+      <p:par>
+        <p:cTn id="1" dur="indefinite" restart="never" nodeType="tmRoot"/>
+      </p:par>
+    </p:tnLst>
+  </p:timing>
 </p:sldLayout>
 </file>
 
@@ -5950,7 +8432,7 @@
               <a:pPr eaLnBrk="0" hangingPunct="0">
                 <a:defRPr/>
               </a:pPr>
-              <a:t>‹#›</a:t>
+              <a:t>‹nr.›</a:t>
             </a:fld>
             <a:endParaRPr lang="nl-NL" sz="1000">
               <a:solidFill>
@@ -6769,7 +9251,7 @@
               <a:pPr eaLnBrk="0" hangingPunct="0">
                 <a:defRPr/>
               </a:pPr>
-              <a:t>‹#›</a:t>
+              <a:t>‹nr.›</a:t>
             </a:fld>
             <a:endParaRPr lang="nl-NL" sz="1000" dirty="0">
               <a:solidFill>
@@ -6888,7 +9370,7 @@
             </a:pPr>
             <a:fld id="{C578AD08-3C54-48F2-9382-C141D1496CCF}" type="datetime4">
               <a:rPr lang="nl-NL" smtClean="0"/>
-              <a:t>18 april 2025</a:t>
+              <a:t>9 april 2026</a:t>
             </a:fld>
             <a:endParaRPr lang="nl-NL" dirty="0"/>
           </a:p>
@@ -6916,6 +9398,837 @@
     <p:sldLayoutId id="2147483697" r:id="rId11"/>
   </p:sldLayoutIdLst>
   <p:hf hdr="0" ftr="0"/>
+  <p:txStyles>
+    <p:titleStyle>
+      <a:lvl1pPr algn="l" rtl="0" eaLnBrk="1" fontAlgn="base" hangingPunct="1">
+        <a:spcBef>
+          <a:spcPct val="0"/>
+        </a:spcBef>
+        <a:spcAft>
+          <a:spcPct val="0"/>
+        </a:spcAft>
+        <a:defRPr sz="2600">
+          <a:solidFill>
+            <a:srgbClr val="113652"/>
+          </a:solidFill>
+          <a:latin typeface="+mj-lt"/>
+          <a:ea typeface="+mj-ea"/>
+          <a:cs typeface="+mj-cs"/>
+        </a:defRPr>
+      </a:lvl1pPr>
+      <a:lvl2pPr algn="l" rtl="0" eaLnBrk="1" fontAlgn="base" hangingPunct="1">
+        <a:spcBef>
+          <a:spcPct val="0"/>
+        </a:spcBef>
+        <a:spcAft>
+          <a:spcPct val="0"/>
+        </a:spcAft>
+        <a:defRPr sz="2600">
+          <a:solidFill>
+            <a:srgbClr val="113652"/>
+          </a:solidFill>
+          <a:latin typeface="Verdana" pitchFamily="34" charset="0"/>
+        </a:defRPr>
+      </a:lvl2pPr>
+      <a:lvl3pPr algn="l" rtl="0" eaLnBrk="1" fontAlgn="base" hangingPunct="1">
+        <a:spcBef>
+          <a:spcPct val="0"/>
+        </a:spcBef>
+        <a:spcAft>
+          <a:spcPct val="0"/>
+        </a:spcAft>
+        <a:defRPr sz="2600">
+          <a:solidFill>
+            <a:srgbClr val="113652"/>
+          </a:solidFill>
+          <a:latin typeface="Verdana" pitchFamily="34" charset="0"/>
+        </a:defRPr>
+      </a:lvl3pPr>
+      <a:lvl4pPr algn="l" rtl="0" eaLnBrk="1" fontAlgn="base" hangingPunct="1">
+        <a:spcBef>
+          <a:spcPct val="0"/>
+        </a:spcBef>
+        <a:spcAft>
+          <a:spcPct val="0"/>
+        </a:spcAft>
+        <a:defRPr sz="2600">
+          <a:solidFill>
+            <a:srgbClr val="113652"/>
+          </a:solidFill>
+          <a:latin typeface="Verdana" pitchFamily="34" charset="0"/>
+        </a:defRPr>
+      </a:lvl4pPr>
+      <a:lvl5pPr algn="l" rtl="0" eaLnBrk="1" fontAlgn="base" hangingPunct="1">
+        <a:spcBef>
+          <a:spcPct val="0"/>
+        </a:spcBef>
+        <a:spcAft>
+          <a:spcPct val="0"/>
+        </a:spcAft>
+        <a:defRPr sz="2600">
+          <a:solidFill>
+            <a:srgbClr val="113652"/>
+          </a:solidFill>
+          <a:latin typeface="Verdana" pitchFamily="34" charset="0"/>
+        </a:defRPr>
+      </a:lvl5pPr>
+      <a:lvl6pPr marL="457200" algn="l" rtl="0" eaLnBrk="1" fontAlgn="base" hangingPunct="1">
+        <a:spcBef>
+          <a:spcPct val="0"/>
+        </a:spcBef>
+        <a:spcAft>
+          <a:spcPct val="0"/>
+        </a:spcAft>
+        <a:defRPr sz="2600">
+          <a:solidFill>
+            <a:srgbClr val="E17000"/>
+          </a:solidFill>
+          <a:latin typeface="Verdana" pitchFamily="34" charset="0"/>
+        </a:defRPr>
+      </a:lvl6pPr>
+      <a:lvl7pPr marL="914400" algn="l" rtl="0" eaLnBrk="1" fontAlgn="base" hangingPunct="1">
+        <a:spcBef>
+          <a:spcPct val="0"/>
+        </a:spcBef>
+        <a:spcAft>
+          <a:spcPct val="0"/>
+        </a:spcAft>
+        <a:defRPr sz="2600">
+          <a:solidFill>
+            <a:srgbClr val="E17000"/>
+          </a:solidFill>
+          <a:latin typeface="Verdana" pitchFamily="34" charset="0"/>
+        </a:defRPr>
+      </a:lvl7pPr>
+      <a:lvl8pPr marL="1371600" algn="l" rtl="0" eaLnBrk="1" fontAlgn="base" hangingPunct="1">
+        <a:spcBef>
+          <a:spcPct val="0"/>
+        </a:spcBef>
+        <a:spcAft>
+          <a:spcPct val="0"/>
+        </a:spcAft>
+        <a:defRPr sz="2600">
+          <a:solidFill>
+            <a:srgbClr val="E17000"/>
+          </a:solidFill>
+          <a:latin typeface="Verdana" pitchFamily="34" charset="0"/>
+        </a:defRPr>
+      </a:lvl8pPr>
+      <a:lvl9pPr marL="1828800" algn="l" rtl="0" eaLnBrk="1" fontAlgn="base" hangingPunct="1">
+        <a:spcBef>
+          <a:spcPct val="0"/>
+        </a:spcBef>
+        <a:spcAft>
+          <a:spcPct val="0"/>
+        </a:spcAft>
+        <a:defRPr sz="2600">
+          <a:solidFill>
+            <a:srgbClr val="E17000"/>
+          </a:solidFill>
+          <a:latin typeface="Verdana" pitchFamily="34" charset="0"/>
+        </a:defRPr>
+      </a:lvl9pPr>
+    </p:titleStyle>
+    <p:bodyStyle>
+      <a:lvl1pPr algn="l" rtl="0" eaLnBrk="1" fontAlgn="base" hangingPunct="1">
+        <a:spcBef>
+          <a:spcPct val="5000"/>
+        </a:spcBef>
+        <a:spcAft>
+          <a:spcPct val="0"/>
+        </a:spcAft>
+        <a:defRPr sz="2200">
+          <a:solidFill>
+            <a:srgbClr val="000000"/>
+          </a:solidFill>
+          <a:latin typeface="+mn-lt"/>
+          <a:ea typeface="+mn-ea"/>
+          <a:cs typeface="+mn-cs"/>
+        </a:defRPr>
+      </a:lvl1pPr>
+      <a:lvl2pPr marL="374650" indent="-184150" algn="l" rtl="0" eaLnBrk="1" fontAlgn="base" hangingPunct="1">
+        <a:spcBef>
+          <a:spcPct val="5000"/>
+        </a:spcBef>
+        <a:spcAft>
+          <a:spcPct val="0"/>
+        </a:spcAft>
+        <a:buChar char="•"/>
+        <a:defRPr sz="2200">
+          <a:solidFill>
+            <a:srgbClr val="000000"/>
+          </a:solidFill>
+          <a:latin typeface="+mn-lt"/>
+        </a:defRPr>
+      </a:lvl2pPr>
+      <a:lvl3pPr marL="622300" algn="l" rtl="0" eaLnBrk="1" fontAlgn="base" hangingPunct="1">
+        <a:spcBef>
+          <a:spcPct val="5000"/>
+        </a:spcBef>
+        <a:spcAft>
+          <a:spcPct val="0"/>
+        </a:spcAft>
+        <a:buFont typeface="Verdana" pitchFamily="34" charset="0"/>
+        <a:buChar char="–"/>
+        <a:defRPr sz="2200">
+          <a:solidFill>
+            <a:srgbClr val="000000"/>
+          </a:solidFill>
+          <a:latin typeface="+mn-lt"/>
+        </a:defRPr>
+      </a:lvl3pPr>
+      <a:lvl4pPr marL="1166813" indent="-177800" algn="l" rtl="0" eaLnBrk="1" fontAlgn="base" hangingPunct="1">
+        <a:spcBef>
+          <a:spcPct val="5000"/>
+        </a:spcBef>
+        <a:spcAft>
+          <a:spcPct val="0"/>
+        </a:spcAft>
+        <a:buFont typeface="Verdana" pitchFamily="34" charset="0"/>
+        <a:buChar char="›"/>
+        <a:defRPr sz="2200">
+          <a:solidFill>
+            <a:srgbClr val="000000"/>
+          </a:solidFill>
+          <a:latin typeface="+mn-lt"/>
+        </a:defRPr>
+      </a:lvl4pPr>
+      <a:lvl5pPr marL="1346200" algn="l" rtl="0" eaLnBrk="1" fontAlgn="base" hangingPunct="1">
+        <a:spcBef>
+          <a:spcPct val="5000"/>
+        </a:spcBef>
+        <a:spcAft>
+          <a:spcPct val="0"/>
+        </a:spcAft>
+        <a:buFont typeface="Verdana" pitchFamily="34" charset="0"/>
+        <a:buChar char="»"/>
+        <a:defRPr sz="2200">
+          <a:solidFill>
+            <a:srgbClr val="000000"/>
+          </a:solidFill>
+          <a:latin typeface="+mn-lt"/>
+        </a:defRPr>
+      </a:lvl5pPr>
+      <a:lvl6pPr marL="1803400" algn="l" rtl="0" eaLnBrk="1" fontAlgn="base" hangingPunct="1">
+        <a:spcBef>
+          <a:spcPct val="5000"/>
+        </a:spcBef>
+        <a:spcAft>
+          <a:spcPct val="0"/>
+        </a:spcAft>
+        <a:buFont typeface="Verdana" pitchFamily="34" charset="0"/>
+        <a:buChar char="»"/>
+        <a:defRPr sz="2200">
+          <a:solidFill>
+            <a:srgbClr val="000000"/>
+          </a:solidFill>
+          <a:latin typeface="+mn-lt"/>
+        </a:defRPr>
+      </a:lvl6pPr>
+      <a:lvl7pPr marL="2260600" algn="l" rtl="0" eaLnBrk="1" fontAlgn="base" hangingPunct="1">
+        <a:spcBef>
+          <a:spcPct val="5000"/>
+        </a:spcBef>
+        <a:spcAft>
+          <a:spcPct val="0"/>
+        </a:spcAft>
+        <a:buFont typeface="Verdana" pitchFamily="34" charset="0"/>
+        <a:buChar char="»"/>
+        <a:defRPr sz="2200">
+          <a:solidFill>
+            <a:srgbClr val="000000"/>
+          </a:solidFill>
+          <a:latin typeface="+mn-lt"/>
+        </a:defRPr>
+      </a:lvl7pPr>
+      <a:lvl8pPr marL="2717800" algn="l" rtl="0" eaLnBrk="1" fontAlgn="base" hangingPunct="1">
+        <a:spcBef>
+          <a:spcPct val="5000"/>
+        </a:spcBef>
+        <a:spcAft>
+          <a:spcPct val="0"/>
+        </a:spcAft>
+        <a:buFont typeface="Verdana" pitchFamily="34" charset="0"/>
+        <a:buChar char="»"/>
+        <a:defRPr sz="2200">
+          <a:solidFill>
+            <a:srgbClr val="000000"/>
+          </a:solidFill>
+          <a:latin typeface="+mn-lt"/>
+        </a:defRPr>
+      </a:lvl8pPr>
+      <a:lvl9pPr marL="3175000" algn="l" rtl="0" eaLnBrk="1" fontAlgn="base" hangingPunct="1">
+        <a:spcBef>
+          <a:spcPct val="5000"/>
+        </a:spcBef>
+        <a:spcAft>
+          <a:spcPct val="0"/>
+        </a:spcAft>
+        <a:buFont typeface="Verdana" pitchFamily="34" charset="0"/>
+        <a:buChar char="»"/>
+        <a:defRPr sz="2200">
+          <a:solidFill>
+            <a:srgbClr val="000000"/>
+          </a:solidFill>
+          <a:latin typeface="+mn-lt"/>
+        </a:defRPr>
+      </a:lvl9pPr>
+    </p:bodyStyle>
+    <p:otherStyle>
+      <a:defPPr>
+        <a:defRPr lang="nl-NL"/>
+      </a:defPPr>
+      <a:lvl1pPr marL="0" algn="l" defTabSz="914400" rtl="0" eaLnBrk="1" latinLnBrk="0" hangingPunct="1">
+        <a:defRPr sz="1800" kern="1200">
+          <a:solidFill>
+            <a:schemeClr val="tx1"/>
+          </a:solidFill>
+          <a:latin typeface="+mn-lt"/>
+          <a:ea typeface="+mn-ea"/>
+          <a:cs typeface="+mn-cs"/>
+        </a:defRPr>
+      </a:lvl1pPr>
+      <a:lvl2pPr marL="457200" algn="l" defTabSz="914400" rtl="0" eaLnBrk="1" latinLnBrk="0" hangingPunct="1">
+        <a:defRPr sz="1800" kern="1200">
+          <a:solidFill>
+            <a:schemeClr val="tx1"/>
+          </a:solidFill>
+          <a:latin typeface="+mn-lt"/>
+          <a:ea typeface="+mn-ea"/>
+          <a:cs typeface="+mn-cs"/>
+        </a:defRPr>
+      </a:lvl2pPr>
+      <a:lvl3pPr marL="914400" algn="l" defTabSz="914400" rtl="0" eaLnBrk="1" latinLnBrk="0" hangingPunct="1">
+        <a:defRPr sz="1800" kern="1200">
+          <a:solidFill>
+            <a:schemeClr val="tx1"/>
+          </a:solidFill>
+          <a:latin typeface="+mn-lt"/>
+          <a:ea typeface="+mn-ea"/>
+          <a:cs typeface="+mn-cs"/>
+        </a:defRPr>
+      </a:lvl3pPr>
+      <a:lvl4pPr marL="1371600" algn="l" defTabSz="914400" rtl="0" eaLnBrk="1" latinLnBrk="0" hangingPunct="1">
+        <a:defRPr sz="1800" kern="1200">
+          <a:solidFill>
+            <a:schemeClr val="tx1"/>
+          </a:solidFill>
+          <a:latin typeface="+mn-lt"/>
+          <a:ea typeface="+mn-ea"/>
+          <a:cs typeface="+mn-cs"/>
+        </a:defRPr>
+      </a:lvl4pPr>
+      <a:lvl5pPr marL="1828800" algn="l" defTabSz="914400" rtl="0" eaLnBrk="1" latinLnBrk="0" hangingPunct="1">
+        <a:defRPr sz="1800" kern="1200">
+          <a:solidFill>
+            <a:schemeClr val="tx1"/>
+          </a:solidFill>
+          <a:latin typeface="+mn-lt"/>
+          <a:ea typeface="+mn-ea"/>
+          <a:cs typeface="+mn-cs"/>
+        </a:defRPr>
+      </a:lvl5pPr>
+      <a:lvl6pPr marL="2286000" algn="l" defTabSz="914400" rtl="0" eaLnBrk="1" latinLnBrk="0" hangingPunct="1">
+        <a:defRPr sz="1800" kern="1200">
+          <a:solidFill>
+            <a:schemeClr val="tx1"/>
+          </a:solidFill>
+          <a:latin typeface="+mn-lt"/>
+          <a:ea typeface="+mn-ea"/>
+          <a:cs typeface="+mn-cs"/>
+        </a:defRPr>
+      </a:lvl6pPr>
+      <a:lvl7pPr marL="2743200" algn="l" defTabSz="914400" rtl="0" eaLnBrk="1" latinLnBrk="0" hangingPunct="1">
+        <a:defRPr sz="1800" kern="1200">
+          <a:solidFill>
+            <a:schemeClr val="tx1"/>
+          </a:solidFill>
+          <a:latin typeface="+mn-lt"/>
+          <a:ea typeface="+mn-ea"/>
+          <a:cs typeface="+mn-cs"/>
+        </a:defRPr>
+      </a:lvl7pPr>
+      <a:lvl8pPr marL="3200400" algn="l" defTabSz="914400" rtl="0" eaLnBrk="1" latinLnBrk="0" hangingPunct="1">
+        <a:defRPr sz="1800" kern="1200">
+          <a:solidFill>
+            <a:schemeClr val="tx1"/>
+          </a:solidFill>
+          <a:latin typeface="+mn-lt"/>
+          <a:ea typeface="+mn-ea"/>
+          <a:cs typeface="+mn-cs"/>
+        </a:defRPr>
+      </a:lvl8pPr>
+      <a:lvl9pPr marL="3657600" algn="l" defTabSz="914400" rtl="0" eaLnBrk="1" latinLnBrk="0" hangingPunct="1">
+        <a:defRPr sz="1800" kern="1200">
+          <a:solidFill>
+            <a:schemeClr val="tx1"/>
+          </a:solidFill>
+          <a:latin typeface="+mn-lt"/>
+          <a:ea typeface="+mn-ea"/>
+          <a:cs typeface="+mn-cs"/>
+        </a:defRPr>
+      </a:lvl9pPr>
+    </p:otherStyle>
+  </p:txStyles>
+</p:sldMaster>
+</file>
+
+<file path=ppt/slideMasters/slideMaster3.xml><?xml version="1.0" encoding="utf-8"?>
+<p:sldMaster xmlns:a="http://schemas.openxmlformats.org/drawingml/2006/main" xmlns:r="http://schemas.openxmlformats.org/officeDocument/2006/relationships" xmlns:p="http://schemas.openxmlformats.org/presentationml/2006/main">
+  <p:cSld>
+    <p:bg>
+      <p:bgPr>
+        <a:solidFill>
+          <a:schemeClr val="bg1"/>
+        </a:solidFill>
+        <a:effectLst/>
+      </p:bgPr>
+    </p:bg>
+    <p:spTree>
+      <p:nvGrpSpPr>
+        <p:cNvPr id="1" name=""/>
+        <p:cNvGrpSpPr/>
+        <p:nvPr/>
+      </p:nvGrpSpPr>
+      <p:grpSpPr>
+        <a:xfrm>
+          <a:off x="0" y="0"/>
+          <a:ext cx="0" cy="0"/>
+          <a:chOff x="0" y="0"/>
+          <a:chExt cx="0" cy="0"/>
+        </a:xfrm>
+      </p:grpSpPr>
+      <p:sp>
+        <p:nvSpPr>
+          <p:cNvPr id="1097" name="shpKleurvlakOnder" descr="Bar_Bottom"/>
+          <p:cNvSpPr>
+            <a:spLocks noChangeArrowheads="1"/>
+          </p:cNvSpPr>
+          <p:nvPr/>
+        </p:nvSpPr>
+        <p:spPr bwMode="auto">
+          <a:xfrm>
+            <a:off x="0" y="6318250"/>
+            <a:ext cx="12192000" cy="539750"/>
+          </a:xfrm>
+          <a:prstGeom prst="rect">
+            <a:avLst/>
+          </a:prstGeom>
+          <a:solidFill>
+            <a:srgbClr val="E17000"/>
+          </a:solidFill>
+          <a:ln>
+            <a:noFill/>
+          </a:ln>
+          <a:extLst/>
+        </p:spPr>
+        <p:txBody>
+          <a:bodyPr anchor="ctr"/>
+          <a:lstStyle/>
+          <a:p>
+            <a:pPr algn="ctr">
+              <a:defRPr/>
+            </a:pPr>
+            <a:endParaRPr lang="nl-NL" sz="1800">
+              <a:solidFill>
+                <a:srgbClr val="FFFFFF"/>
+              </a:solidFill>
+              <a:cs typeface="Arial" charset="0"/>
+            </a:endParaRPr>
+          </a:p>
+        </p:txBody>
+      </p:sp>
+      <p:sp>
+        <p:nvSpPr>
+          <p:cNvPr id="1027" name="Rectangle 46"/>
+          <p:cNvSpPr>
+            <a:spLocks noGrp="1" noChangeAspect="1" noChangeArrowheads="1"/>
+          </p:cNvSpPr>
+          <p:nvPr>
+            <p:ph type="body" idx="1"/>
+          </p:nvPr>
+        </p:nvSpPr>
+        <p:spPr bwMode="auto">
+          <a:xfrm>
+            <a:off x="812800" y="1773238"/>
+            <a:ext cx="10363200" cy="4246562"/>
+          </a:xfrm>
+          <a:prstGeom prst="rect">
+            <a:avLst/>
+          </a:prstGeom>
+          <a:noFill/>
+          <a:ln w="9525">
+            <a:noFill/>
+            <a:miter lim="800000"/>
+            <a:headEnd/>
+            <a:tailEnd/>
+          </a:ln>
+        </p:spPr>
+        <p:txBody>
+          <a:bodyPr vert="horz" wrap="square" lIns="0" tIns="0" rIns="0" bIns="0" numCol="1" anchor="t" anchorCtr="0" compatLnSpc="1">
+            <a:prstTxWarp prst="textNoShape">
+              <a:avLst/>
+            </a:prstTxWarp>
+          </a:bodyPr>
+          <a:lstStyle/>
+          <a:p>
+            <a:pPr lvl="0"/>
+            <a:r>
+              <a:rPr lang="nl-NL" smtClean="0"/>
+              <a:t>Klik om het opmaakprofiel van de modeltekst te bewerken</a:t>
+            </a:r>
+          </a:p>
+          <a:p>
+            <a:pPr lvl="1"/>
+            <a:r>
+              <a:rPr lang="nl-NL" smtClean="0"/>
+              <a:t> </a:t>
+            </a:r>
+          </a:p>
+          <a:p>
+            <a:pPr lvl="2"/>
+            <a:r>
+              <a:rPr lang="nl-NL" smtClean="0"/>
+              <a:t> </a:t>
+            </a:r>
+          </a:p>
+          <a:p>
+            <a:pPr lvl="3"/>
+            <a:r>
+              <a:rPr lang="nl-NL" smtClean="0"/>
+              <a:t> </a:t>
+            </a:r>
+          </a:p>
+          <a:p>
+            <a:pPr lvl="4"/>
+            <a:r>
+              <a:rPr lang="nl-NL" smtClean="0"/>
+              <a:t> </a:t>
+            </a:r>
+          </a:p>
+        </p:txBody>
+      </p:sp>
+      <p:sp>
+        <p:nvSpPr>
+          <p:cNvPr id="1095" name="shpTekst" descr="Bar_Top"/>
+          <p:cNvSpPr>
+            <a:spLocks noChangeArrowheads="1"/>
+          </p:cNvSpPr>
+          <p:nvPr/>
+        </p:nvSpPr>
+        <p:spPr bwMode="auto">
+          <a:xfrm>
+            <a:off x="0" y="1"/>
+            <a:ext cx="12192000" cy="1071563"/>
+          </a:xfrm>
+          <a:prstGeom prst="rect">
+            <a:avLst/>
+          </a:prstGeom>
+          <a:solidFill>
+            <a:srgbClr val="E17000"/>
+          </a:solidFill>
+          <a:ln>
+            <a:noFill/>
+          </a:ln>
+          <a:extLst/>
+        </p:spPr>
+        <p:txBody>
+          <a:bodyPr anchor="ctr"/>
+          <a:lstStyle/>
+          <a:p>
+            <a:pPr algn="ctr">
+              <a:defRPr/>
+            </a:pPr>
+            <a:endParaRPr lang="nl-NL" sz="1800" dirty="0">
+              <a:solidFill>
+                <a:srgbClr val="FFFFFF"/>
+              </a:solidFill>
+              <a:cs typeface="Arial" charset="0"/>
+            </a:endParaRPr>
+          </a:p>
+        </p:txBody>
+      </p:sp>
+      <p:sp>
+        <p:nvSpPr>
+          <p:cNvPr id="1029" name="Rectangle 45"/>
+          <p:cNvSpPr>
+            <a:spLocks noGrp="1" noChangeArrowheads="1"/>
+          </p:cNvSpPr>
+          <p:nvPr>
+            <p:ph type="title"/>
+          </p:nvPr>
+        </p:nvSpPr>
+        <p:spPr bwMode="auto">
+          <a:xfrm>
+            <a:off x="814917" y="1265239"/>
+            <a:ext cx="10363200" cy="396875"/>
+          </a:xfrm>
+          <a:prstGeom prst="rect">
+            <a:avLst/>
+          </a:prstGeom>
+          <a:noFill/>
+          <a:ln w="9525">
+            <a:noFill/>
+            <a:miter lim="800000"/>
+            <a:headEnd/>
+            <a:tailEnd/>
+          </a:ln>
+        </p:spPr>
+        <p:txBody>
+          <a:bodyPr vert="horz" wrap="square" lIns="0" tIns="0" rIns="0" bIns="0" numCol="1" anchor="t" anchorCtr="0" compatLnSpc="1">
+            <a:prstTxWarp prst="textNoShape">
+              <a:avLst/>
+            </a:prstTxWarp>
+            <a:spAutoFit/>
+          </a:bodyPr>
+          <a:lstStyle/>
+          <a:p>
+            <a:pPr lvl="0"/>
+            <a:endParaRPr lang="nl-NL" smtClean="0"/>
+          </a:p>
+        </p:txBody>
+      </p:sp>
+      <p:sp>
+        <p:nvSpPr>
+          <p:cNvPr id="1099" name="shpKleurvlakBoven"/>
+          <p:cNvSpPr>
+            <a:spLocks noChangeArrowheads="1"/>
+          </p:cNvSpPr>
+          <p:nvPr/>
+        </p:nvSpPr>
+        <p:spPr bwMode="auto">
+          <a:xfrm>
+            <a:off x="6000751" y="6308725"/>
+            <a:ext cx="5552016" cy="287338"/>
+          </a:xfrm>
+          <a:prstGeom prst="rect">
+            <a:avLst/>
+          </a:prstGeom>
+          <a:noFill/>
+          <a:ln>
+            <a:noFill/>
+          </a:ln>
+          <a:extLst/>
+        </p:spPr>
+        <p:txBody>
+          <a:bodyPr/>
+          <a:lstStyle/>
+          <a:p>
+            <a:pPr eaLnBrk="0" hangingPunct="0">
+              <a:defRPr/>
+            </a:pPr>
+            <a:r>
+              <a:rPr lang="nl-NL" sz="1100" dirty="0">
+                <a:solidFill>
+                  <a:schemeClr val="bg1"/>
+                </a:solidFill>
+                <a:cs typeface="Arial" charset="0"/>
+              </a:rPr>
+              <a:t>DOSCO</a:t>
+            </a:r>
+          </a:p>
+        </p:txBody>
+      </p:sp>
+      <p:sp>
+        <p:nvSpPr>
+          <p:cNvPr id="1100" name="shpBeeldmerk"/>
+          <p:cNvSpPr>
+            <a:spLocks noChangeArrowheads="1"/>
+          </p:cNvSpPr>
+          <p:nvPr/>
+        </p:nvSpPr>
+        <p:spPr bwMode="auto">
+          <a:xfrm>
+            <a:off x="516467" y="6362700"/>
+            <a:ext cx="950384" cy="363538"/>
+          </a:xfrm>
+          <a:prstGeom prst="rect">
+            <a:avLst/>
+          </a:prstGeom>
+          <a:noFill/>
+          <a:ln>
+            <a:noFill/>
+          </a:ln>
+          <a:extLst/>
+        </p:spPr>
+        <p:txBody>
+          <a:bodyPr/>
+          <a:lstStyle/>
+          <a:p>
+            <a:pPr eaLnBrk="0" hangingPunct="0">
+              <a:defRPr/>
+            </a:pPr>
+            <a:fld id="{07382E3B-8403-45AB-A22D-980A32E9F913}" type="slidenum">
+              <a:rPr lang="nl-NL" sz="1000">
+                <a:solidFill>
+                  <a:schemeClr val="bg1"/>
+                </a:solidFill>
+                <a:cs typeface="Arial" charset="0"/>
+              </a:rPr>
+              <a:pPr eaLnBrk="0" hangingPunct="0">
+                <a:defRPr/>
+              </a:pPr>
+              <a:t>‹nr.›</a:t>
+            </a:fld>
+            <a:endParaRPr lang="nl-NL" sz="1000">
+              <a:solidFill>
+                <a:schemeClr val="bg1"/>
+              </a:solidFill>
+              <a:cs typeface="Arial" charset="0"/>
+            </a:endParaRPr>
+          </a:p>
+        </p:txBody>
+      </p:sp>
+      <p:sp>
+        <p:nvSpPr>
+          <p:cNvPr id="1109" name="TitelSlide2"/>
+          <p:cNvSpPr txBox="1">
+            <a:spLocks noChangeArrowheads="1"/>
+          </p:cNvSpPr>
+          <p:nvPr/>
+        </p:nvSpPr>
+        <p:spPr bwMode="auto">
+          <a:xfrm>
+            <a:off x="6000751" y="6524625"/>
+            <a:ext cx="3647016" cy="217488"/>
+          </a:xfrm>
+          <a:prstGeom prst="rect">
+            <a:avLst/>
+          </a:prstGeom>
+          <a:noFill/>
+          <a:ln>
+            <a:noFill/>
+          </a:ln>
+          <a:effectLst/>
+          <a:extLst/>
+        </p:spPr>
+        <p:txBody>
+          <a:bodyPr lIns="90000" tIns="46800" rIns="90000" bIns="46800"/>
+          <a:lstStyle/>
+          <a:p>
+            <a:pPr eaLnBrk="0" hangingPunct="0">
+              <a:spcBef>
+                <a:spcPct val="50000"/>
+              </a:spcBef>
+              <a:defRPr/>
+            </a:pPr>
+            <a:r>
+              <a:rPr lang="nl-NL" sz="1100" dirty="0">
+                <a:solidFill>
+                  <a:schemeClr val="bg1"/>
+                </a:solidFill>
+              </a:rPr>
+              <a:t>Statistiek MBW</a:t>
+            </a:r>
+          </a:p>
+        </p:txBody>
+      </p:sp>
+      <p:pic>
+        <p:nvPicPr>
+          <p:cNvPr id="1036" name="LogoLandmacht" descr="Placeholder_Logo"/>
+          <p:cNvPicPr>
+            <a:picLocks noChangeArrowheads="1"/>
+          </p:cNvPicPr>
+          <p:nvPr/>
+        </p:nvPicPr>
+        <p:blipFill>
+          <a:blip r:embed="rId13" cstate="print"/>
+          <a:srcRect/>
+          <a:stretch>
+            <a:fillRect/>
+          </a:stretch>
+        </p:blipFill>
+        <p:spPr bwMode="auto">
+          <a:xfrm>
+            <a:off x="5875713" y="1"/>
+            <a:ext cx="440575" cy="849313"/>
+          </a:xfrm>
+          <a:prstGeom prst="rect">
+            <a:avLst/>
+          </a:prstGeom>
+          <a:noFill/>
+          <a:ln w="9525">
+            <a:noFill/>
+            <a:miter lim="800000"/>
+            <a:headEnd/>
+            <a:tailEnd/>
+          </a:ln>
+        </p:spPr>
+      </p:pic>
+      <p:sp>
+        <p:nvSpPr>
+          <p:cNvPr id="15" name="Date Placeholder 1" descr="Date"/>
+          <p:cNvSpPr>
+            <a:spLocks noGrp="1"/>
+          </p:cNvSpPr>
+          <p:nvPr>
+            <p:ph type="dt" sz="half" idx="2"/>
+          </p:nvPr>
+        </p:nvSpPr>
+        <p:spPr>
+          <a:xfrm>
+            <a:off x="9637185" y="6520259"/>
+            <a:ext cx="2220383" cy="365125"/>
+          </a:xfrm>
+          <a:prstGeom prst="rect">
+            <a:avLst/>
+          </a:prstGeom>
+        </p:spPr>
+        <p:txBody>
+          <a:bodyPr vert="horz" lIns="91440" tIns="45720" rIns="91440" bIns="45720" rtlCol="0" anchor="ctr"/>
+          <a:lstStyle>
+            <a:lvl1pPr algn="l" eaLnBrk="0" hangingPunct="0">
+              <a:spcBef>
+                <a:spcPct val="50000"/>
+              </a:spcBef>
+              <a:defRPr sz="1100">
+                <a:solidFill>
+                  <a:schemeClr val="bg1"/>
+                </a:solidFill>
+              </a:defRPr>
+            </a:lvl1pPr>
+          </a:lstStyle>
+          <a:p>
+            <a:pPr>
+              <a:defRPr/>
+            </a:pPr>
+            <a:r>
+              <a:rPr lang="nl-NL" smtClean="0"/>
+              <a:t>College 5b: de centrale limietstelling</a:t>
+            </a:r>
+            <a:endParaRPr lang="nl-NL" dirty="0"/>
+          </a:p>
+        </p:txBody>
+      </p:sp>
+    </p:spTree>
+    <p:extLst>
+      <p:ext uri="{BB962C8B-B14F-4D97-AF65-F5344CB8AC3E}">
+        <p14:creationId xmlns:p14="http://schemas.microsoft.com/office/powerpoint/2010/main" val="798825860"/>
+      </p:ext>
+    </p:extLst>
+  </p:cSld>
+  <p:clrMap bg1="lt1" tx1="dk1" bg2="lt2" tx2="dk2" accent1="accent1" accent2="accent2" accent3="accent3" accent4="accent4" accent5="accent5" accent6="accent6" hlink="hlink" folHlink="folHlink"/>
+  <p:sldLayoutIdLst>
+    <p:sldLayoutId id="2147483699" r:id="rId1"/>
+    <p:sldLayoutId id="2147483700" r:id="rId2"/>
+    <p:sldLayoutId id="2147483701" r:id="rId3"/>
+    <p:sldLayoutId id="2147483702" r:id="rId4"/>
+    <p:sldLayoutId id="2147483703" r:id="rId5"/>
+    <p:sldLayoutId id="2147483704" r:id="rId6"/>
+    <p:sldLayoutId id="2147483705" r:id="rId7"/>
+    <p:sldLayoutId id="2147483706" r:id="rId8"/>
+    <p:sldLayoutId id="2147483707" r:id="rId9"/>
+    <p:sldLayoutId id="2147483708" r:id="rId10"/>
+    <p:sldLayoutId id="2147483709" r:id="rId11"/>
+  </p:sldLayoutIdLst>
+  <p:timing>
+    <p:tnLst>
+      <p:par>
+        <p:cTn id="1" dur="indefinite" restart="never" nodeType="tmRoot"/>
+      </p:par>
+    </p:tnLst>
+  </p:timing>
+  <p:hf sldNum="0" hdr="0" ftr="0"/>
   <p:txStyles>
     <p:titleStyle>
       <a:lvl1pPr algn="l" rtl="0" eaLnBrk="1" fontAlgn="base" hangingPunct="1">
@@ -7328,16 +10641,37 @@
           <a:bodyPr anchor="t" anchorCtr="0"/>
           <a:lstStyle/>
           <a:p>
-            <a:pPr eaLnBrk="1" hangingPunct="1"/>
-            <a:r>
-              <a:rPr lang="nl-NL" b="1" dirty="0" smtClean="0">
+            <a:r>
+              <a:rPr lang="en-US" dirty="0" err="1">
                 <a:solidFill>
                   <a:srgbClr val="113652"/>
                 </a:solidFill>
-                <a:latin typeface="RijksoverheidSansHeadingTT" panose="020B0503040202060203" pitchFamily="34" charset="0"/>
               </a:rPr>
-              <a:t>Statistiek: college 6</a:t>
-            </a:r>
+              <a:t>Statistiek</a:t>
+            </a:r>
+            <a:r>
+              <a:rPr lang="en-US" dirty="0">
+                <a:solidFill>
+                  <a:srgbClr val="113652"/>
+                </a:solidFill>
+              </a:rPr>
+              <a:t>: college </a:t>
+            </a:r>
+            <a:r>
+              <a:rPr lang="en-US" dirty="0" smtClean="0">
+                <a:solidFill>
+                  <a:srgbClr val="113652"/>
+                </a:solidFill>
+              </a:rPr>
+              <a:t>6</a:t>
+            </a:r>
+            <a:endParaRPr lang="nl-NL" dirty="0" smtClean="0">
+              <a:solidFill>
+                <a:srgbClr val="113652"/>
+              </a:solidFill>
+              <a:latin typeface="RijksoverheidSansWebText Bold" panose="020B0803040202060203" pitchFamily="34" charset="0"/>
+              <a:ea typeface="RijksoverheidSansWebText Bold" panose="020B0803040202060203" pitchFamily="34" charset="0"/>
+            </a:endParaRPr>
           </a:p>
         </p:txBody>
       </p:sp>
@@ -7361,61 +10695,99 @@
           <a:bodyPr/>
           <a:lstStyle/>
           <a:p>
-            <a:pPr eaLnBrk="1" hangingPunct="1"/>
-            <a:r>
-              <a:rPr lang="nl-NL" dirty="0" smtClean="0">
+            <a:r>
+              <a:rPr lang="en-US" dirty="0" smtClean="0">
                 <a:solidFill>
                   <a:srgbClr val="113652"/>
                 </a:solidFill>
-                <a:latin typeface="RijksoverheidSansHeadingTT" panose="020B0503040202060203" pitchFamily="34" charset="0"/>
               </a:rPr>
               <a:t>De </a:t>
             </a:r>
             <a:r>
-              <a:rPr lang="nl-NL" smtClean="0">
+              <a:rPr lang="en-US" dirty="0" err="1" smtClean="0">
                 <a:solidFill>
                   <a:srgbClr val="113652"/>
                 </a:solidFill>
-                <a:latin typeface="RijksoverheidSansHeadingTT" panose="020B0503040202060203" pitchFamily="34" charset="0"/>
               </a:rPr>
               <a:t>Poissonverdeling</a:t>
             </a:r>
-            <a:endParaRPr lang="nl-NL" dirty="0" smtClean="0">
+            <a:endParaRPr lang="nl-NL" dirty="0">
               <a:solidFill>
                 <a:srgbClr val="113652"/>
               </a:solidFill>
-              <a:latin typeface="RijksoverheidSansHeadingTT" panose="020B0503040202060203" pitchFamily="34" charset="0"/>
             </a:endParaRPr>
           </a:p>
         </p:txBody>
       </p:sp>
       <p:sp>
         <p:nvSpPr>
-          <p:cNvPr id="2" name="Date Placeholder 1"/>
+          <p:cNvPr id="4100" name="Date Placeholder 2"/>
           <p:cNvSpPr>
             <a:spLocks noGrp="1"/>
           </p:cNvSpPr>
           <p:nvPr>
-            <p:ph type="dt" sz="half" idx="10"/>
+            <p:ph type="dt" sz="quarter" idx="10"/>
           </p:nvPr>
         </p:nvSpPr>
-        <p:spPr/>
+        <p:spPr bwMode="auto">
+          <a:noFill/>
+          <a:ln>
+            <a:miter lim="800000"/>
+            <a:headEnd/>
+            <a:tailEnd/>
+          </a:ln>
+        </p:spPr>
         <p:txBody>
-          <a:bodyPr/>
+          <a:bodyPr wrap="square" numCol="1" anchorCtr="0" compatLnSpc="1">
+            <a:prstTxWarp prst="textNoShape">
+              <a:avLst/>
+            </a:prstTxWarp>
+          </a:bodyPr>
           <a:lstStyle/>
           <a:p>
-            <a:pPr>
+            <a:pPr marL="0" marR="0" lvl="0" indent="0" algn="l" defTabSz="914400" rtl="0" eaLnBrk="0" fontAlgn="base" latinLnBrk="0" hangingPunct="0">
+              <a:lnSpc>
+                <a:spcPct val="100000"/>
+              </a:lnSpc>
+              <a:spcBef>
+                <a:spcPct val="50000"/>
+              </a:spcBef>
+              <a:spcAft>
+                <a:spcPct val="0"/>
+              </a:spcAft>
+              <a:buClrTx/>
+              <a:buSzTx/>
+              <a:buFontTx/>
+              <a:buNone/>
+              <a:tabLst/>
               <a:defRPr/>
             </a:pPr>
             <a:r>
-              <a:rPr lang="nl-NL" smtClean="0"/>
-              <a:t>Mei 2025</a:t>
-            </a:r>
-            <a:endParaRPr lang="nl-NL" dirty="0"/>
+              <a:rPr kumimoji="0" lang="nl-NL" sz="1100" b="0" i="0" u="none" strike="noStrike" kern="1200" cap="none" spc="0" normalizeH="0" baseline="0" noProof="0" dirty="0" smtClean="0">
+                <a:ln>
+                  <a:noFill/>
+                </a:ln>
+                <a:solidFill>
+                  <a:srgbClr val="FFFFFF"/>
+                </a:solidFill>
+                <a:effectLst/>
+                <a:uLnTx/>
+                <a:uFillTx/>
+                <a:latin typeface="Verdana" pitchFamily="34" charset="0"/>
+                <a:ea typeface="+mn-ea"/>
+                <a:cs typeface="+mn-cs"/>
+              </a:rPr>
+              <a:t>21 mei 2026</a:t>
+            </a:r>
           </a:p>
         </p:txBody>
       </p:sp>
     </p:spTree>
+    <p:extLst>
+      <p:ext uri="{BB962C8B-B14F-4D97-AF65-F5344CB8AC3E}">
+        <p14:creationId xmlns:p14="http://schemas.microsoft.com/office/powerpoint/2010/main" val="3472670811"/>
+      </p:ext>
+    </p:extLst>
   </p:cSld>
   <p:clrMapOvr>
     <a:masterClrMapping/>
@@ -7474,516 +10846,53 @@
           </a:p>
         </p:txBody>
       </p:sp>
-      <mc:AlternateContent xmlns:mc="http://schemas.openxmlformats.org/markup-compatibility/2006" xmlns:a14="http://schemas.microsoft.com/office/drawing/2010/main">
-        <mc:Choice Requires="a14">
-          <p:sp>
-            <p:nvSpPr>
-              <p:cNvPr id="3" name="Content Placeholder 2"/>
-              <p:cNvSpPr>
-                <a:spLocks noGrp="1"/>
-              </p:cNvSpPr>
-              <p:nvPr>
-                <p:ph idx="1"/>
-              </p:nvPr>
-            </p:nvSpPr>
-            <p:spPr>
-              <a:xfrm>
-                <a:off x="812800" y="1773238"/>
-                <a:ext cx="10611792" cy="4246562"/>
-              </a:xfrm>
-            </p:spPr>
-            <p:txBody>
-              <a:bodyPr/>
-              <a:lstStyle/>
-              <a:p>
-                <a:r>
-                  <a:rPr lang="en-US" dirty="0" smtClean="0"/>
-                  <a:t>De </a:t>
-                </a:r>
-                <a:r>
-                  <a:rPr lang="en-US" dirty="0" err="1" smtClean="0"/>
-                  <a:t>Poissonverdeling</a:t>
-                </a:r>
-                <a:r>
-                  <a:rPr lang="en-US" dirty="0" smtClean="0"/>
-                  <a:t> </a:t>
-                </a:r>
-                <a:r>
-                  <a:rPr lang="en-US" dirty="0" err="1" smtClean="0"/>
-                  <a:t>kenmerkt</a:t>
-                </a:r>
-                <a:r>
-                  <a:rPr lang="en-US" dirty="0" smtClean="0"/>
-                  <a:t> </a:t>
-                </a:r>
-                <a:r>
-                  <a:rPr lang="en-US" dirty="0" err="1" smtClean="0"/>
-                  <a:t>zich</a:t>
-                </a:r>
-                <a:r>
-                  <a:rPr lang="en-US" dirty="0" smtClean="0"/>
-                  <a:t> </a:t>
-                </a:r>
-                <a:r>
-                  <a:rPr lang="en-US" dirty="0" err="1" smtClean="0"/>
-                  <a:t>als</a:t>
-                </a:r>
-                <a:r>
-                  <a:rPr lang="en-US" dirty="0" smtClean="0"/>
-                  <a:t> </a:t>
-                </a:r>
-                <a:r>
-                  <a:rPr lang="en-US" dirty="0" err="1" smtClean="0"/>
-                  <a:t>volgt</a:t>
-                </a:r>
-                <a:r>
-                  <a:rPr lang="en-US" dirty="0" smtClean="0"/>
-                  <a:t>:</a:t>
-                </a:r>
-              </a:p>
-              <a:p>
-                <a:pPr marL="342900" indent="-342900">
-                  <a:buFont typeface="Arial" panose="020B0604020202020204" pitchFamily="34" charset="0"/>
-                  <a:buChar char="•"/>
-                </a:pPr>
-                <a:endParaRPr lang="en-US" dirty="0" smtClean="0"/>
-              </a:p>
-              <a:p>
-                <a:pPr marL="342900" indent="-342900">
-                  <a:buFont typeface="Arial" panose="020B0604020202020204" pitchFamily="34" charset="0"/>
-                  <a:buChar char="•"/>
-                </a:pPr>
-                <a:r>
-                  <a:rPr lang="en-US" dirty="0" err="1" smtClean="0"/>
-                  <a:t>Telt</a:t>
-                </a:r>
-                <a:r>
-                  <a:rPr lang="en-US" dirty="0" smtClean="0"/>
-                  <a:t> het </a:t>
-                </a:r>
-                <a:r>
-                  <a:rPr lang="en-US" b="1" dirty="0" err="1" smtClean="0">
-                    <a:solidFill>
-                      <a:schemeClr val="accent1"/>
-                    </a:solidFill>
-                  </a:rPr>
-                  <a:t>aantal</a:t>
-                </a:r>
-                <a:r>
-                  <a:rPr lang="en-US" dirty="0" smtClean="0"/>
-                  <a:t> </a:t>
-                </a:r>
-                <a:r>
-                  <a:rPr lang="en-US" b="1" dirty="0" smtClean="0">
-                    <a:solidFill>
-                      <a:schemeClr val="accent1"/>
-                    </a:solidFill>
-                  </a:rPr>
-                  <a:t>“</a:t>
-                </a:r>
-                <a:r>
-                  <a:rPr lang="en-US" b="1" dirty="0" err="1" smtClean="0">
-                    <a:solidFill>
-                      <a:schemeClr val="accent1"/>
-                    </a:solidFill>
-                  </a:rPr>
-                  <a:t>gebeurtenissen</a:t>
-                </a:r>
-                <a:r>
-                  <a:rPr lang="en-US" b="1" dirty="0" smtClean="0">
-                    <a:solidFill>
-                      <a:schemeClr val="accent1"/>
-                    </a:solidFill>
-                  </a:rPr>
-                  <a:t>” </a:t>
-                </a:r>
-                <a:r>
-                  <a:rPr lang="en-US" dirty="0" err="1" smtClean="0"/>
-                  <a:t>binnen</a:t>
-                </a:r>
-                <a:r>
-                  <a:rPr lang="en-US" dirty="0" smtClean="0"/>
-                  <a:t> </a:t>
-                </a:r>
-                <a:r>
-                  <a:rPr lang="en-US" dirty="0" err="1" smtClean="0"/>
-                  <a:t>een</a:t>
-                </a:r>
-                <a:r>
-                  <a:rPr lang="en-US" dirty="0" smtClean="0"/>
-                  <a:t> </a:t>
-                </a:r>
-                <a:r>
-                  <a:rPr lang="en-US" dirty="0" err="1" smtClean="0"/>
-                  <a:t>specifiek</a:t>
-                </a:r>
-                <a:r>
-                  <a:rPr lang="en-US" dirty="0" smtClean="0"/>
-                  <a:t> “interval” van </a:t>
-                </a:r>
-                <a:r>
-                  <a:rPr lang="en-US" dirty="0" err="1" smtClean="0"/>
-                  <a:t>tijd</a:t>
-                </a:r>
-                <a:r>
-                  <a:rPr lang="en-US" dirty="0" smtClean="0"/>
-                  <a:t> of </a:t>
-                </a:r>
-                <a:r>
-                  <a:rPr lang="en-US" dirty="0" err="1" smtClean="0"/>
-                  <a:t>ruimte</a:t>
-                </a:r>
-                <a:r>
-                  <a:rPr lang="en-US" dirty="0" smtClean="0"/>
-                  <a:t>. </a:t>
-                </a:r>
-              </a:p>
-              <a:p>
-                <a:pPr marL="717550" lvl="1" indent="-342900">
-                  <a:buFont typeface="Arial" panose="020B0604020202020204" pitchFamily="34" charset="0"/>
-                  <a:buChar char="•"/>
-                </a:pPr>
-                <a:r>
-                  <a:rPr lang="en-US" b="1" dirty="0" err="1" smtClean="0"/>
-                  <a:t>Gebeurtenis</a:t>
-                </a:r>
-                <a:r>
-                  <a:rPr lang="en-US" dirty="0" smtClean="0"/>
-                  <a:t>: </a:t>
-                </a:r>
-                <a:r>
-                  <a:rPr lang="en-US" dirty="0" err="1" smtClean="0"/>
-                  <a:t>aanwezigheid</a:t>
-                </a:r>
-                <a:r>
-                  <a:rPr lang="en-US" dirty="0" smtClean="0"/>
-                  <a:t> van </a:t>
-                </a:r>
-                <a:r>
-                  <a:rPr lang="en-US" dirty="0" err="1" smtClean="0"/>
-                  <a:t>een</a:t>
-                </a:r>
-                <a:r>
-                  <a:rPr lang="en-US" dirty="0" smtClean="0"/>
-                  <a:t> IED, storing </a:t>
-                </a:r>
-                <a:r>
-                  <a:rPr lang="en-US" dirty="0" err="1" smtClean="0"/>
-                  <a:t>aan</a:t>
-                </a:r>
-                <a:r>
-                  <a:rPr lang="en-US" dirty="0" smtClean="0"/>
-                  <a:t> </a:t>
-                </a:r>
-                <a:r>
-                  <a:rPr lang="en-US" dirty="0" err="1" smtClean="0"/>
-                  <a:t>een</a:t>
-                </a:r>
-                <a:r>
-                  <a:rPr lang="en-US" dirty="0" smtClean="0"/>
-                  <a:t> </a:t>
-                </a:r>
-                <a:r>
-                  <a:rPr lang="en-US" dirty="0" err="1" smtClean="0"/>
-                  <a:t>wapensysteem</a:t>
-                </a:r>
-                <a:r>
-                  <a:rPr lang="en-US" dirty="0" smtClean="0"/>
-                  <a:t>, …</a:t>
-                </a:r>
-              </a:p>
-              <a:p>
-                <a:pPr marL="717550" lvl="1" indent="-342900">
-                  <a:buFont typeface="Arial" panose="020B0604020202020204" pitchFamily="34" charset="0"/>
-                  <a:buChar char="•"/>
-                </a:pPr>
-                <a:r>
-                  <a:rPr lang="en-US" b="1" dirty="0" smtClean="0"/>
-                  <a:t>Interval</a:t>
-                </a:r>
-                <a:r>
-                  <a:rPr lang="en-US" dirty="0" smtClean="0"/>
-                  <a:t>: </a:t>
-                </a:r>
-                <a:r>
-                  <a:rPr lang="en-US" dirty="0" err="1" smtClean="0"/>
-                  <a:t>een</a:t>
-                </a:r>
-                <a:r>
-                  <a:rPr lang="en-US" dirty="0" smtClean="0"/>
-                  <a:t> </a:t>
-                </a:r>
-                <a:r>
-                  <a:rPr lang="en-US" dirty="0" err="1" smtClean="0"/>
-                  <a:t>stuk</a:t>
-                </a:r>
-                <a:r>
-                  <a:rPr lang="en-US" dirty="0" smtClean="0"/>
-                  <a:t> </a:t>
-                </a:r>
-                <a:r>
-                  <a:rPr lang="en-US" dirty="0" err="1" smtClean="0"/>
-                  <a:t>weg</a:t>
-                </a:r>
-                <a:r>
-                  <a:rPr lang="en-US" dirty="0" smtClean="0"/>
-                  <a:t> van 10 km (</a:t>
-                </a:r>
-                <a:r>
-                  <a:rPr lang="en-US" dirty="0" err="1" smtClean="0"/>
-                  <a:t>ruimte</a:t>
-                </a:r>
-                <a:r>
-                  <a:rPr lang="en-US" dirty="0" smtClean="0"/>
-                  <a:t>), </a:t>
-                </a:r>
-                <a:r>
-                  <a:rPr lang="en-US" dirty="0" err="1" smtClean="0"/>
-                  <a:t>drie</a:t>
-                </a:r>
-                <a:r>
-                  <a:rPr lang="en-US" dirty="0" smtClean="0"/>
-                  <a:t> </a:t>
-                </a:r>
-                <a:r>
-                  <a:rPr lang="en-US" dirty="0" err="1" smtClean="0"/>
-                  <a:t>dagen</a:t>
-                </a:r>
-                <a:r>
-                  <a:rPr lang="en-US" dirty="0" smtClean="0"/>
-                  <a:t> (</a:t>
-                </a:r>
-                <a:r>
-                  <a:rPr lang="en-US" dirty="0" err="1" smtClean="0"/>
-                  <a:t>tijd</a:t>
-                </a:r>
-                <a:r>
-                  <a:rPr lang="en-US" dirty="0" smtClean="0"/>
-                  <a:t>), …</a:t>
-                </a:r>
-              </a:p>
-              <a:p>
-                <a:pPr marL="717550" lvl="1" indent="-342900">
-                  <a:buFont typeface="Arial" panose="020B0604020202020204" pitchFamily="34" charset="0"/>
-                  <a:buChar char="•"/>
-                </a:pPr>
-                <a:endParaRPr lang="en-US" dirty="0"/>
-              </a:p>
-              <a:p>
-                <a:pPr marL="342900" indent="-342900">
-                  <a:buFont typeface="Arial" panose="020B0604020202020204" pitchFamily="34" charset="0"/>
-                  <a:buChar char="•"/>
-                </a:pPr>
-                <a:endParaRPr lang="en-US" dirty="0" smtClean="0"/>
-              </a:p>
-              <a:p>
-                <a:pPr marL="342900" indent="-342900">
-                  <a:buFont typeface="Arial" panose="020B0604020202020204" pitchFamily="34" charset="0"/>
-                  <a:buChar char="•"/>
-                </a:pPr>
-                <a:r>
-                  <a:rPr lang="en-US" dirty="0" smtClean="0"/>
-                  <a:t>Per </a:t>
-                </a:r>
-                <a:r>
-                  <a:rPr lang="en-US" dirty="0" err="1" smtClean="0"/>
-                  <a:t>eenheid</a:t>
-                </a:r>
-                <a:r>
-                  <a:rPr lang="en-US" dirty="0" smtClean="0"/>
-                  <a:t> van </a:t>
-                </a:r>
-                <a:r>
-                  <a:rPr lang="en-US" dirty="0" err="1" smtClean="0"/>
-                  <a:t>tijd</a:t>
-                </a:r>
-                <a:r>
-                  <a:rPr lang="en-US" dirty="0" smtClean="0"/>
-                  <a:t> of </a:t>
-                </a:r>
-                <a:r>
-                  <a:rPr lang="en-US" dirty="0" err="1" smtClean="0"/>
-                  <a:t>ruimte</a:t>
-                </a:r>
-                <a:r>
-                  <a:rPr lang="en-US" dirty="0" smtClean="0"/>
-                  <a:t> </a:t>
-                </a:r>
-                <a:r>
-                  <a:rPr lang="en-US" dirty="0" err="1" smtClean="0"/>
-                  <a:t>gedraagt</a:t>
-                </a:r>
-                <a:r>
-                  <a:rPr lang="en-US" dirty="0" smtClean="0"/>
-                  <a:t> het </a:t>
-                </a:r>
-                <a:r>
-                  <a:rPr lang="en-US" dirty="0" err="1" smtClean="0"/>
-                  <a:t>gemiddelde</a:t>
-                </a:r>
-                <a:r>
-                  <a:rPr lang="en-US" dirty="0" smtClean="0"/>
-                  <a:t> </a:t>
-                </a:r>
-                <a:r>
-                  <a:rPr lang="en-US" dirty="0" err="1" smtClean="0"/>
-                  <a:t>aantal</a:t>
-                </a:r>
-                <a:r>
-                  <a:rPr lang="en-US" dirty="0" smtClean="0"/>
-                  <a:t> </a:t>
-                </a:r>
-                <a:r>
-                  <a:rPr lang="en-US" dirty="0" err="1" smtClean="0"/>
-                  <a:t>gebeurtenissen</a:t>
-                </a:r>
-                <a:r>
-                  <a:rPr lang="en-US" dirty="0" smtClean="0"/>
-                  <a:t> </a:t>
-                </a:r>
-                <a14:m>
-                  <m:oMath xmlns:m="http://schemas.openxmlformats.org/officeDocument/2006/math">
-                    <m:r>
-                      <a:rPr lang="en-US" b="0" i="1" smtClean="0">
-                        <a:latin typeface="Cambria Math" panose="02040503050406030204" pitchFamily="18" charset="0"/>
-                      </a:rPr>
-                      <m:t>𝜆</m:t>
-                    </m:r>
-                  </m:oMath>
-                </a14:m>
-                <a:r>
-                  <a:rPr lang="en-US" dirty="0" smtClean="0"/>
-                  <a:t> </a:t>
-                </a:r>
-                <a:r>
-                  <a:rPr lang="en-US" dirty="0" err="1" smtClean="0"/>
-                  <a:t>zich</a:t>
-                </a:r>
-                <a:r>
-                  <a:rPr lang="en-US" dirty="0" smtClean="0"/>
-                  <a:t> constant</a:t>
-                </a:r>
-              </a:p>
-              <a:p>
-                <a:pPr marL="342900" indent="-342900">
-                  <a:buFont typeface="Arial" panose="020B0604020202020204" pitchFamily="34" charset="0"/>
-                  <a:buChar char="•"/>
-                </a:pPr>
-                <a:endParaRPr lang="en-US" b="1" dirty="0"/>
-              </a:p>
-              <a:p>
-                <a:pPr marL="342900" indent="-342900">
-                  <a:buFont typeface="Arial" panose="020B0604020202020204" pitchFamily="34" charset="0"/>
-                  <a:buChar char="•"/>
-                </a:pPr>
-                <a:endParaRPr lang="en-US" dirty="0" smtClean="0"/>
-              </a:p>
-              <a:p>
-                <a:pPr marL="342900" indent="-342900">
-                  <a:buFont typeface="Arial" panose="020B0604020202020204" pitchFamily="34" charset="0"/>
-                  <a:buChar char="•"/>
-                </a:pPr>
-                <a:endParaRPr lang="en-US" dirty="0" smtClean="0"/>
-              </a:p>
-              <a:p>
-                <a:pPr marL="342900" indent="-342900">
-                  <a:buFont typeface="Arial" panose="020B0604020202020204" pitchFamily="34" charset="0"/>
-                  <a:buChar char="•"/>
-                </a:pPr>
-                <a:r>
-                  <a:rPr lang="en-US" dirty="0" err="1" smtClean="0"/>
-                  <a:t>Gebeurtenissen</a:t>
-                </a:r>
-                <a:r>
-                  <a:rPr lang="en-US" dirty="0" smtClean="0"/>
-                  <a:t> </a:t>
-                </a:r>
-                <a:r>
-                  <a:rPr lang="en-US" dirty="0" err="1" smtClean="0"/>
-                  <a:t>vinden</a:t>
-                </a:r>
-                <a:r>
-                  <a:rPr lang="en-US" dirty="0" smtClean="0"/>
-                  <a:t> </a:t>
-                </a:r>
-                <a:r>
-                  <a:rPr lang="en-US" dirty="0" err="1" smtClean="0"/>
-                  <a:t>onafhankelijk</a:t>
-                </a:r>
-                <a:r>
-                  <a:rPr lang="en-US" dirty="0" smtClean="0"/>
-                  <a:t> van </a:t>
-                </a:r>
-                <a:r>
-                  <a:rPr lang="en-US" dirty="0" err="1" smtClean="0"/>
-                  <a:t>elkaar</a:t>
-                </a:r>
-                <a:r>
-                  <a:rPr lang="en-US" dirty="0" smtClean="0"/>
-                  <a:t> </a:t>
-                </a:r>
-                <a:r>
-                  <a:rPr lang="en-US" dirty="0" err="1" smtClean="0"/>
-                  <a:t>plaats</a:t>
-                </a:r>
-                <a:r>
-                  <a:rPr lang="en-US" dirty="0" smtClean="0"/>
-                  <a:t> </a:t>
-                </a:r>
-                <a:r>
-                  <a:rPr lang="en-US" dirty="0" err="1" smtClean="0"/>
-                  <a:t>binnen</a:t>
-                </a:r>
-                <a:r>
-                  <a:rPr lang="en-US" dirty="0" smtClean="0"/>
-                  <a:t> het interval</a:t>
-                </a:r>
-                <a:endParaRPr lang="en-US" dirty="0"/>
-              </a:p>
-              <a:p>
-                <a:endParaRPr lang="en-US" dirty="0"/>
-              </a:p>
-            </p:txBody>
-          </p:sp>
-        </mc:Choice>
-        <mc:Fallback xmlns="">
-          <p:sp>
-            <p:nvSpPr>
-              <p:cNvPr id="3" name="Content Placeholder 2"/>
-              <p:cNvSpPr>
-                <a:spLocks noGrp="1" noRot="1" noChangeAspect="1" noMove="1" noResize="1" noEditPoints="1" noAdjustHandles="1" noChangeArrowheads="1" noChangeShapeType="1" noTextEdit="1"/>
-              </p:cNvSpPr>
-              <p:nvPr>
-                <p:ph idx="1"/>
-              </p:nvPr>
-            </p:nvSpPr>
-            <p:spPr>
-              <a:xfrm>
-                <a:off x="812800" y="1773238"/>
-                <a:ext cx="10611792" cy="4246562"/>
-              </a:xfrm>
-              <a:blipFill>
-                <a:blip r:embed="rId2"/>
-                <a:stretch>
-                  <a:fillRect l="-1608" t="-2009" b="-3013"/>
-                </a:stretch>
-              </a:blipFill>
-            </p:spPr>
-            <p:txBody>
-              <a:bodyPr/>
-              <a:lstStyle/>
-              <a:p>
-                <a:r>
-                  <a:rPr lang="nl-NL">
-                    <a:noFill/>
-                  </a:rPr>
-                  <a:t> </a:t>
-                </a:r>
-              </a:p>
-            </p:txBody>
-          </p:sp>
-        </mc:Fallback>
-      </mc:AlternateContent>
+      <p:sp>
+        <p:nvSpPr>
+          <p:cNvPr id="3" name="Content Placeholder 2"/>
+          <p:cNvSpPr>
+            <a:spLocks noGrp="1"/>
+          </p:cNvSpPr>
+          <p:nvPr>
+            <p:ph idx="1"/>
+          </p:nvPr>
+        </p:nvSpPr>
+        <p:spPr/>
+        <p:txBody>
+          <a:bodyPr/>
+          <a:lstStyle/>
+          <a:p>
+            <a:endParaRPr lang="en-US" b="1" dirty="0" smtClean="0"/>
+          </a:p>
+          <a:p>
+            <a:pPr algn="ctr"/>
+            <a:r>
+              <a:rPr lang="en-US" dirty="0" smtClean="0">
+                <a:hlinkClick r:id="rId2" tooltip="https://interactive-pois-binom.streamlit.app"/>
+              </a:rPr>
+              <a:t>https://interactive-pois-binom.streamlit.app</a:t>
+            </a:r>
+            <a:endParaRPr lang="en-US" dirty="0"/>
+          </a:p>
+          <a:p>
+            <a:endParaRPr lang="en-US" dirty="0" smtClean="0"/>
+          </a:p>
+          <a:p>
+            <a:endParaRPr lang="en-US" dirty="0"/>
+          </a:p>
+          <a:p>
+            <a:endParaRPr lang="en-US" dirty="0" smtClean="0"/>
+          </a:p>
+          <a:p>
+            <a:endParaRPr lang="en-US" dirty="0" smtClean="0"/>
+          </a:p>
+          <a:p>
+            <a:endParaRPr lang="en-US" b="1" dirty="0"/>
+          </a:p>
+          <a:p>
+            <a:endParaRPr lang="nl-NL" b="1" dirty="0"/>
+          </a:p>
+        </p:txBody>
+      </p:sp>
       <p:sp>
         <p:nvSpPr>
           <p:cNvPr id="5" name="Date Placeholder 4"/>
@@ -8052,6 +10961,645 @@
     </p:spTree>
     <p:extLst>
       <p:ext uri="{BB962C8B-B14F-4D97-AF65-F5344CB8AC3E}">
+        <p14:creationId xmlns:p14="http://schemas.microsoft.com/office/powerpoint/2010/main" val="1889259425"/>
+      </p:ext>
+    </p:extLst>
+  </p:cSld>
+  <p:clrMapOvr>
+    <a:masterClrMapping/>
+  </p:clrMapOvr>
+  <p:timing>
+    <p:tnLst>
+      <p:par>
+        <p:cTn id="1" dur="indefinite" restart="never" nodeType="tmRoot"/>
+      </p:par>
+    </p:tnLst>
+  </p:timing>
+</p:sld>
+</file>
+
+<file path=ppt/slides/slide11.xml><?xml version="1.0" encoding="utf-8"?>
+<p:sld xmlns:a="http://schemas.openxmlformats.org/drawingml/2006/main" xmlns:r="http://schemas.openxmlformats.org/officeDocument/2006/relationships" xmlns:p="http://schemas.openxmlformats.org/presentationml/2006/main">
+  <p:cSld>
+    <p:spTree>
+      <p:nvGrpSpPr>
+        <p:cNvPr id="1" name=""/>
+        <p:cNvGrpSpPr/>
+        <p:nvPr/>
+      </p:nvGrpSpPr>
+      <p:grpSpPr>
+        <a:xfrm>
+          <a:off x="0" y="0"/>
+          <a:ext cx="0" cy="0"/>
+          <a:chOff x="0" y="0"/>
+          <a:chExt cx="0" cy="0"/>
+        </a:xfrm>
+      </p:grpSpPr>
+      <p:sp>
+        <p:nvSpPr>
+          <p:cNvPr id="2" name="Title 1"/>
+          <p:cNvSpPr>
+            <a:spLocks noGrp="1"/>
+          </p:cNvSpPr>
+          <p:nvPr>
+            <p:ph type="title"/>
+          </p:nvPr>
+        </p:nvSpPr>
+        <p:spPr/>
+        <p:txBody>
+          <a:bodyPr/>
+          <a:lstStyle/>
+          <a:p>
+            <a:r>
+              <a:rPr lang="nl-NL" dirty="0" smtClean="0"/>
+              <a:t>De </a:t>
+            </a:r>
+            <a:r>
+              <a:rPr lang="nl-NL" dirty="0" err="1" smtClean="0"/>
+              <a:t>Poissonverdeling</a:t>
+            </a:r>
+            <a:endParaRPr lang="nl-NL" dirty="0"/>
+          </a:p>
+        </p:txBody>
+      </p:sp>
+      <mc:AlternateContent xmlns:mc="http://schemas.openxmlformats.org/markup-compatibility/2006" xmlns:a14="http://schemas.microsoft.com/office/drawing/2010/main">
+        <mc:Choice Requires="a14">
+          <p:sp>
+            <p:nvSpPr>
+              <p:cNvPr id="3" name="Content Placeholder 2"/>
+              <p:cNvSpPr>
+                <a:spLocks noGrp="1"/>
+              </p:cNvSpPr>
+              <p:nvPr>
+                <p:ph idx="1"/>
+              </p:nvPr>
+            </p:nvSpPr>
+            <p:spPr>
+              <a:xfrm>
+                <a:off x="812800" y="1773238"/>
+                <a:ext cx="10611792" cy="4246562"/>
+              </a:xfrm>
+            </p:spPr>
+            <p:txBody>
+              <a:bodyPr/>
+              <a:lstStyle/>
+              <a:p>
+                <a:r>
+                  <a:rPr lang="en-US" dirty="0" smtClean="0"/>
+                  <a:t>De </a:t>
+                </a:r>
+                <a:r>
+                  <a:rPr lang="en-US" dirty="0" err="1" smtClean="0"/>
+                  <a:t>Poissonverdeling</a:t>
+                </a:r>
+                <a:r>
+                  <a:rPr lang="en-US" dirty="0" smtClean="0"/>
+                  <a:t> </a:t>
+                </a:r>
+                <a:r>
+                  <a:rPr lang="en-US" dirty="0" err="1" smtClean="0"/>
+                  <a:t>kenmerkt</a:t>
+                </a:r>
+                <a:r>
+                  <a:rPr lang="en-US" dirty="0" smtClean="0"/>
+                  <a:t> </a:t>
+                </a:r>
+                <a:r>
+                  <a:rPr lang="en-US" dirty="0" err="1" smtClean="0"/>
+                  <a:t>zich</a:t>
+                </a:r>
+                <a:r>
+                  <a:rPr lang="en-US" dirty="0" smtClean="0"/>
+                  <a:t> </a:t>
+                </a:r>
+                <a:r>
+                  <a:rPr lang="en-US" dirty="0" err="1" smtClean="0"/>
+                  <a:t>als</a:t>
+                </a:r>
+                <a:r>
+                  <a:rPr lang="en-US" dirty="0" smtClean="0"/>
+                  <a:t> </a:t>
+                </a:r>
+                <a:r>
+                  <a:rPr lang="en-US" dirty="0" err="1" smtClean="0"/>
+                  <a:t>volgt</a:t>
+                </a:r>
+                <a:r>
+                  <a:rPr lang="en-US" dirty="0" smtClean="0"/>
+                  <a:t>:</a:t>
+                </a:r>
+              </a:p>
+              <a:p>
+                <a:pPr marL="342900" indent="-342900">
+                  <a:buFont typeface="Arial" panose="020B0604020202020204" pitchFamily="34" charset="0"/>
+                  <a:buChar char="•"/>
+                </a:pPr>
+                <a:endParaRPr lang="en-US" dirty="0" smtClean="0"/>
+              </a:p>
+              <a:p>
+                <a:pPr marL="342900" indent="-342900">
+                  <a:buFont typeface="Arial" panose="020B0604020202020204" pitchFamily="34" charset="0"/>
+                  <a:buChar char="•"/>
+                </a:pPr>
+                <a:r>
+                  <a:rPr lang="en-US" dirty="0" err="1" smtClean="0"/>
+                  <a:t>Telt</a:t>
+                </a:r>
+                <a:r>
+                  <a:rPr lang="en-US" dirty="0" smtClean="0"/>
+                  <a:t> het </a:t>
+                </a:r>
+                <a:r>
+                  <a:rPr lang="en-US" b="1" dirty="0" err="1" smtClean="0">
+                    <a:solidFill>
+                      <a:schemeClr val="accent1"/>
+                    </a:solidFill>
+                  </a:rPr>
+                  <a:t>aantal</a:t>
+                </a:r>
+                <a:r>
+                  <a:rPr lang="en-US" dirty="0" smtClean="0"/>
+                  <a:t> </a:t>
+                </a:r>
+                <a:r>
+                  <a:rPr lang="en-US" b="1" dirty="0" smtClean="0">
+                    <a:solidFill>
+                      <a:schemeClr val="accent1"/>
+                    </a:solidFill>
+                  </a:rPr>
+                  <a:t>“</a:t>
+                </a:r>
+                <a:r>
+                  <a:rPr lang="en-US" b="1" dirty="0" err="1" smtClean="0">
+                    <a:solidFill>
+                      <a:schemeClr val="accent1"/>
+                    </a:solidFill>
+                  </a:rPr>
+                  <a:t>gebeurtenissen</a:t>
+                </a:r>
+                <a:r>
+                  <a:rPr lang="en-US" b="1" dirty="0" smtClean="0">
+                    <a:solidFill>
+                      <a:schemeClr val="accent1"/>
+                    </a:solidFill>
+                  </a:rPr>
+                  <a:t>” </a:t>
+                </a:r>
+                <a:r>
+                  <a:rPr lang="en-US" dirty="0" err="1" smtClean="0"/>
+                  <a:t>binnen</a:t>
+                </a:r>
+                <a:r>
+                  <a:rPr lang="en-US" dirty="0" smtClean="0"/>
+                  <a:t> </a:t>
+                </a:r>
+                <a:r>
+                  <a:rPr lang="en-US" dirty="0" err="1" smtClean="0"/>
+                  <a:t>een</a:t>
+                </a:r>
+                <a:r>
+                  <a:rPr lang="en-US" dirty="0" smtClean="0"/>
+                  <a:t> </a:t>
+                </a:r>
+                <a:r>
+                  <a:rPr lang="en-US" dirty="0" err="1" smtClean="0"/>
+                  <a:t>specifiek</a:t>
+                </a:r>
+                <a:r>
+                  <a:rPr lang="en-US" dirty="0" smtClean="0"/>
+                  <a:t> “interval” van </a:t>
+                </a:r>
+                <a:r>
+                  <a:rPr lang="en-US" dirty="0" err="1" smtClean="0"/>
+                  <a:t>tijd</a:t>
+                </a:r>
+                <a:r>
+                  <a:rPr lang="en-US" dirty="0" smtClean="0"/>
+                  <a:t> of </a:t>
+                </a:r>
+                <a:r>
+                  <a:rPr lang="en-US" dirty="0" err="1" smtClean="0"/>
+                  <a:t>ruimte</a:t>
+                </a:r>
+                <a:r>
+                  <a:rPr lang="en-US" dirty="0" smtClean="0"/>
+                  <a:t>. </a:t>
+                </a:r>
+              </a:p>
+              <a:p>
+                <a:pPr marL="717550" lvl="1" indent="-342900">
+                  <a:buFont typeface="Arial" panose="020B0604020202020204" pitchFamily="34" charset="0"/>
+                  <a:buChar char="•"/>
+                </a:pPr>
+                <a:r>
+                  <a:rPr lang="en-US" b="1" dirty="0" err="1" smtClean="0"/>
+                  <a:t>Gebeurtenis</a:t>
+                </a:r>
+                <a:r>
+                  <a:rPr lang="en-US" dirty="0" smtClean="0"/>
+                  <a:t>: </a:t>
+                </a:r>
+                <a:r>
+                  <a:rPr lang="en-US" dirty="0" err="1" smtClean="0"/>
+                  <a:t>aanwezigheid</a:t>
+                </a:r>
+                <a:r>
+                  <a:rPr lang="en-US" dirty="0" smtClean="0"/>
+                  <a:t> van </a:t>
+                </a:r>
+                <a:r>
+                  <a:rPr lang="en-US" dirty="0" err="1" smtClean="0"/>
+                  <a:t>een</a:t>
+                </a:r>
+                <a:r>
+                  <a:rPr lang="en-US" dirty="0" smtClean="0"/>
+                  <a:t> IED, storing </a:t>
+                </a:r>
+                <a:r>
+                  <a:rPr lang="en-US" dirty="0" err="1" smtClean="0"/>
+                  <a:t>aan</a:t>
+                </a:r>
+                <a:r>
+                  <a:rPr lang="en-US" dirty="0" smtClean="0"/>
+                  <a:t> </a:t>
+                </a:r>
+                <a:r>
+                  <a:rPr lang="en-US" dirty="0" err="1" smtClean="0"/>
+                  <a:t>een</a:t>
+                </a:r>
+                <a:r>
+                  <a:rPr lang="en-US" dirty="0" smtClean="0"/>
+                  <a:t> </a:t>
+                </a:r>
+                <a:r>
+                  <a:rPr lang="en-US" dirty="0" err="1" smtClean="0"/>
+                  <a:t>wapensysteem</a:t>
+                </a:r>
+                <a:r>
+                  <a:rPr lang="en-US" dirty="0" smtClean="0"/>
+                  <a:t>, …</a:t>
+                </a:r>
+              </a:p>
+              <a:p>
+                <a:pPr marL="717550" lvl="1" indent="-342900">
+                  <a:buFont typeface="Arial" panose="020B0604020202020204" pitchFamily="34" charset="0"/>
+                  <a:buChar char="•"/>
+                </a:pPr>
+                <a:r>
+                  <a:rPr lang="en-US" b="1" dirty="0" smtClean="0"/>
+                  <a:t>Interval</a:t>
+                </a:r>
+                <a:r>
+                  <a:rPr lang="en-US" dirty="0" smtClean="0"/>
+                  <a:t>: </a:t>
+                </a:r>
+                <a:r>
+                  <a:rPr lang="en-US" dirty="0" err="1" smtClean="0"/>
+                  <a:t>een</a:t>
+                </a:r>
+                <a:r>
+                  <a:rPr lang="en-US" dirty="0" smtClean="0"/>
+                  <a:t> </a:t>
+                </a:r>
+                <a:r>
+                  <a:rPr lang="en-US" dirty="0" err="1" smtClean="0"/>
+                  <a:t>stuk</a:t>
+                </a:r>
+                <a:r>
+                  <a:rPr lang="en-US" dirty="0" smtClean="0"/>
+                  <a:t> </a:t>
+                </a:r>
+                <a:r>
+                  <a:rPr lang="en-US" dirty="0" err="1" smtClean="0"/>
+                  <a:t>weg</a:t>
+                </a:r>
+                <a:r>
+                  <a:rPr lang="en-US" dirty="0" smtClean="0"/>
+                  <a:t> van 10 km (</a:t>
+                </a:r>
+                <a:r>
+                  <a:rPr lang="en-US" dirty="0" err="1" smtClean="0"/>
+                  <a:t>ruimte</a:t>
+                </a:r>
+                <a:r>
+                  <a:rPr lang="en-US" dirty="0" smtClean="0"/>
+                  <a:t>), </a:t>
+                </a:r>
+                <a:r>
+                  <a:rPr lang="en-US" dirty="0" err="1" smtClean="0"/>
+                  <a:t>drie</a:t>
+                </a:r>
+                <a:r>
+                  <a:rPr lang="en-US" dirty="0" smtClean="0"/>
+                  <a:t> </a:t>
+                </a:r>
+                <a:r>
+                  <a:rPr lang="en-US" dirty="0" err="1" smtClean="0"/>
+                  <a:t>dagen</a:t>
+                </a:r>
+                <a:r>
+                  <a:rPr lang="en-US" dirty="0" smtClean="0"/>
+                  <a:t> (</a:t>
+                </a:r>
+                <a:r>
+                  <a:rPr lang="en-US" dirty="0" err="1" smtClean="0"/>
+                  <a:t>tijd</a:t>
+                </a:r>
+                <a:r>
+                  <a:rPr lang="en-US" dirty="0" smtClean="0"/>
+                  <a:t>), …</a:t>
+                </a:r>
+              </a:p>
+              <a:p>
+                <a:pPr marL="717550" lvl="1" indent="-342900">
+                  <a:buFont typeface="Arial" panose="020B0604020202020204" pitchFamily="34" charset="0"/>
+                  <a:buChar char="•"/>
+                </a:pPr>
+                <a:endParaRPr lang="en-US" dirty="0"/>
+              </a:p>
+              <a:p>
+                <a:pPr marL="342900" indent="-342900">
+                  <a:buFont typeface="Arial" panose="020B0604020202020204" pitchFamily="34" charset="0"/>
+                  <a:buChar char="•"/>
+                </a:pPr>
+                <a:endParaRPr lang="en-US" dirty="0" smtClean="0"/>
+              </a:p>
+              <a:p>
+                <a:pPr marL="342900" indent="-342900">
+                  <a:buFont typeface="Arial" panose="020B0604020202020204" pitchFamily="34" charset="0"/>
+                  <a:buChar char="•"/>
+                </a:pPr>
+                <a:r>
+                  <a:rPr lang="en-US" dirty="0" smtClean="0"/>
+                  <a:t>Per </a:t>
+                </a:r>
+                <a:r>
+                  <a:rPr lang="en-US" dirty="0" err="1" smtClean="0"/>
+                  <a:t>eenheid</a:t>
+                </a:r>
+                <a:r>
+                  <a:rPr lang="en-US" dirty="0" smtClean="0"/>
+                  <a:t> van </a:t>
+                </a:r>
+                <a:r>
+                  <a:rPr lang="en-US" dirty="0" err="1" smtClean="0"/>
+                  <a:t>tijd</a:t>
+                </a:r>
+                <a:r>
+                  <a:rPr lang="en-US" dirty="0" smtClean="0"/>
+                  <a:t> of </a:t>
+                </a:r>
+                <a:r>
+                  <a:rPr lang="en-US" dirty="0" err="1" smtClean="0"/>
+                  <a:t>ruimte</a:t>
+                </a:r>
+                <a:r>
+                  <a:rPr lang="en-US" dirty="0" smtClean="0"/>
+                  <a:t> </a:t>
+                </a:r>
+                <a:r>
+                  <a:rPr lang="en-US" dirty="0" err="1" smtClean="0"/>
+                  <a:t>gedraagt</a:t>
+                </a:r>
+                <a:r>
+                  <a:rPr lang="en-US" dirty="0" smtClean="0"/>
+                  <a:t> het </a:t>
+                </a:r>
+                <a:r>
+                  <a:rPr lang="en-US" dirty="0" err="1" smtClean="0"/>
+                  <a:t>gemiddelde</a:t>
+                </a:r>
+                <a:r>
+                  <a:rPr lang="en-US" dirty="0" smtClean="0"/>
+                  <a:t> </a:t>
+                </a:r>
+                <a:r>
+                  <a:rPr lang="en-US" dirty="0" err="1" smtClean="0"/>
+                  <a:t>aantal</a:t>
+                </a:r>
+                <a:r>
+                  <a:rPr lang="en-US" dirty="0" smtClean="0"/>
+                  <a:t> </a:t>
+                </a:r>
+                <a:r>
+                  <a:rPr lang="en-US" dirty="0" err="1" smtClean="0"/>
+                  <a:t>gebeurtenissen</a:t>
+                </a:r>
+                <a:r>
+                  <a:rPr lang="en-US" dirty="0" smtClean="0"/>
+                  <a:t> </a:t>
+                </a:r>
+                <a14:m>
+                  <m:oMath xmlns:m="http://schemas.openxmlformats.org/officeDocument/2006/math">
+                    <m:r>
+                      <a:rPr lang="en-US" b="0" i="1" smtClean="0">
+                        <a:latin typeface="Cambria Math" panose="02040503050406030204" pitchFamily="18" charset="0"/>
+                      </a:rPr>
+                      <m:t>𝜆</m:t>
+                    </m:r>
+                  </m:oMath>
+                </a14:m>
+                <a:r>
+                  <a:rPr lang="en-US" dirty="0" smtClean="0"/>
+                  <a:t> </a:t>
+                </a:r>
+                <a:r>
+                  <a:rPr lang="en-US" dirty="0" err="1" smtClean="0"/>
+                  <a:t>zich</a:t>
+                </a:r>
+                <a:r>
+                  <a:rPr lang="en-US" dirty="0" smtClean="0"/>
+                  <a:t> constant</a:t>
+                </a:r>
+              </a:p>
+              <a:p>
+                <a:pPr marL="342900" indent="-342900">
+                  <a:buFont typeface="Arial" panose="020B0604020202020204" pitchFamily="34" charset="0"/>
+                  <a:buChar char="•"/>
+                </a:pPr>
+                <a:endParaRPr lang="en-US" b="1" dirty="0"/>
+              </a:p>
+              <a:p>
+                <a:pPr marL="342900" indent="-342900">
+                  <a:buFont typeface="Arial" panose="020B0604020202020204" pitchFamily="34" charset="0"/>
+                  <a:buChar char="•"/>
+                </a:pPr>
+                <a:endParaRPr lang="en-US" dirty="0" smtClean="0"/>
+              </a:p>
+              <a:p>
+                <a:pPr marL="342900" indent="-342900">
+                  <a:buFont typeface="Arial" panose="020B0604020202020204" pitchFamily="34" charset="0"/>
+                  <a:buChar char="•"/>
+                </a:pPr>
+                <a:endParaRPr lang="en-US" dirty="0" smtClean="0"/>
+              </a:p>
+              <a:p>
+                <a:pPr marL="342900" indent="-342900">
+                  <a:buFont typeface="Arial" panose="020B0604020202020204" pitchFamily="34" charset="0"/>
+                  <a:buChar char="•"/>
+                </a:pPr>
+                <a:r>
+                  <a:rPr lang="en-US" dirty="0" err="1" smtClean="0"/>
+                  <a:t>Gebeurtenissen</a:t>
+                </a:r>
+                <a:r>
+                  <a:rPr lang="en-US" dirty="0" smtClean="0"/>
+                  <a:t> </a:t>
+                </a:r>
+                <a:r>
+                  <a:rPr lang="en-US" dirty="0" err="1" smtClean="0"/>
+                  <a:t>vinden</a:t>
+                </a:r>
+                <a:r>
+                  <a:rPr lang="en-US" dirty="0" smtClean="0"/>
+                  <a:t> </a:t>
+                </a:r>
+                <a:r>
+                  <a:rPr lang="en-US" dirty="0" err="1" smtClean="0"/>
+                  <a:t>onafhankelijk</a:t>
+                </a:r>
+                <a:r>
+                  <a:rPr lang="en-US" dirty="0" smtClean="0"/>
+                  <a:t> van </a:t>
+                </a:r>
+                <a:r>
+                  <a:rPr lang="en-US" dirty="0" err="1" smtClean="0"/>
+                  <a:t>elkaar</a:t>
+                </a:r>
+                <a:r>
+                  <a:rPr lang="en-US" dirty="0" smtClean="0"/>
+                  <a:t> </a:t>
+                </a:r>
+                <a:r>
+                  <a:rPr lang="en-US" dirty="0" err="1" smtClean="0"/>
+                  <a:t>plaats</a:t>
+                </a:r>
+                <a:r>
+                  <a:rPr lang="en-US" dirty="0" smtClean="0"/>
+                  <a:t> </a:t>
+                </a:r>
+                <a:r>
+                  <a:rPr lang="en-US" dirty="0" err="1" smtClean="0"/>
+                  <a:t>binnen</a:t>
+                </a:r>
+                <a:r>
+                  <a:rPr lang="en-US" dirty="0" smtClean="0"/>
+                  <a:t> het interval</a:t>
+                </a:r>
+                <a:endParaRPr lang="en-US" dirty="0"/>
+              </a:p>
+              <a:p>
+                <a:endParaRPr lang="en-US" dirty="0"/>
+              </a:p>
+            </p:txBody>
+          </p:sp>
+        </mc:Choice>
+        <mc:Fallback xmlns="">
+          <p:sp>
+            <p:nvSpPr>
+              <p:cNvPr id="3" name="Content Placeholder 2"/>
+              <p:cNvSpPr>
+                <a:spLocks noGrp="1" noRot="1" noChangeAspect="1" noMove="1" noResize="1" noEditPoints="1" noAdjustHandles="1" noChangeArrowheads="1" noChangeShapeType="1" noTextEdit="1"/>
+              </p:cNvSpPr>
+              <p:nvPr>
+                <p:ph idx="1"/>
+              </p:nvPr>
+            </p:nvSpPr>
+            <p:spPr>
+              <a:xfrm>
+                <a:off x="812800" y="1773238"/>
+                <a:ext cx="10611792" cy="4246562"/>
+              </a:xfrm>
+              <a:blipFill>
+                <a:blip r:embed="rId2"/>
+                <a:stretch>
+                  <a:fillRect l="-1608" t="-2009" b="-3013"/>
+                </a:stretch>
+              </a:blipFill>
+            </p:spPr>
+            <p:txBody>
+              <a:bodyPr/>
+              <a:lstStyle/>
+              <a:p>
+                <a:r>
+                  <a:rPr lang="nl-NL">
+                    <a:noFill/>
+                  </a:rPr>
+                  <a:t> </a:t>
+                </a:r>
+              </a:p>
+            </p:txBody>
+          </p:sp>
+        </mc:Fallback>
+      </mc:AlternateContent>
+      <p:sp>
+        <p:nvSpPr>
+          <p:cNvPr id="5" name="Date Placeholder 4"/>
+          <p:cNvSpPr>
+            <a:spLocks noGrp="1"/>
+          </p:cNvSpPr>
+          <p:nvPr>
+            <p:ph type="dt" sz="half" idx="10"/>
+          </p:nvPr>
+        </p:nvSpPr>
+        <p:spPr/>
+        <p:txBody>
+          <a:bodyPr/>
+          <a:lstStyle/>
+          <a:p>
+            <a:pPr>
+              <a:defRPr/>
+            </a:pPr>
+            <a:r>
+              <a:rPr lang="nl-NL" smtClean="0"/>
+              <a:t>Mei 2025</a:t>
+            </a:r>
+            <a:endParaRPr lang="nl-NL" dirty="0"/>
+          </a:p>
+        </p:txBody>
+      </p:sp>
+      <p:sp>
+        <p:nvSpPr>
+          <p:cNvPr id="4" name="AutoShape 2" descr="Close Up Shot of Improvised Explosive Device Bomb Stock Photo - Image ..."/>
+          <p:cNvSpPr>
+            <a:spLocks noChangeAspect="1" noChangeArrowheads="1"/>
+          </p:cNvSpPr>
+          <p:nvPr/>
+        </p:nvSpPr>
+        <p:spPr bwMode="auto">
+          <a:xfrm>
+            <a:off x="155575" y="-144463"/>
+            <a:ext cx="304800" cy="304801"/>
+          </a:xfrm>
+          <a:prstGeom prst="rect">
+            <a:avLst/>
+          </a:prstGeom>
+          <a:noFill/>
+          <a:extLst>
+            <a:ext uri="{909E8E84-426E-40DD-AFC4-6F175D3DCCD1}">
+              <a14:hiddenFill xmlns:a14="http://schemas.microsoft.com/office/drawing/2010/main">
+                <a:solidFill>
+                  <a:srgbClr val="FFFFFF"/>
+                </a:solidFill>
+              </a14:hiddenFill>
+            </a:ext>
+          </a:extLst>
+        </p:spPr>
+        <p:txBody>
+          <a:bodyPr vert="horz" wrap="square" lIns="91440" tIns="45720" rIns="91440" bIns="45720" numCol="1" anchor="t" anchorCtr="0" compatLnSpc="1">
+            <a:prstTxWarp prst="textNoShape">
+              <a:avLst/>
+            </a:prstTxWarp>
+          </a:bodyPr>
+          <a:lstStyle/>
+          <a:p>
+            <a:endParaRPr lang="nl-NL"/>
+          </a:p>
+        </p:txBody>
+      </p:sp>
+    </p:spTree>
+    <p:extLst>
+      <p:ext uri="{BB962C8B-B14F-4D97-AF65-F5344CB8AC3E}">
         <p14:creationId xmlns:p14="http://schemas.microsoft.com/office/powerpoint/2010/main" val="3680462517"/>
       </p:ext>
     </p:extLst>
@@ -8069,7 +11617,7 @@
 </p:sld>
 </file>
 
-<file path=ppt/slides/slide11.xml><?xml version="1.0" encoding="utf-8"?>
+<file path=ppt/slides/slide12.xml><?xml version="1.0" encoding="utf-8"?>
 <p:sld xmlns:a="http://schemas.openxmlformats.org/drawingml/2006/main" xmlns:r="http://schemas.openxmlformats.org/officeDocument/2006/relationships" xmlns:p="http://schemas.openxmlformats.org/presentationml/2006/main">
   <p:cSld>
     <p:spTree>
@@ -9363,7 +12911,7 @@
 </p:sld>
 </file>
 
-<file path=ppt/slides/slide12.xml><?xml version="1.0" encoding="utf-8"?>
+<file path=ppt/slides/slide13.xml><?xml version="1.0" encoding="utf-8"?>
 <p:sld xmlns:a="http://schemas.openxmlformats.org/drawingml/2006/main" xmlns:r="http://schemas.openxmlformats.org/officeDocument/2006/relationships" xmlns:p="http://schemas.openxmlformats.org/presentationml/2006/main">
   <p:cSld>
     <p:spTree>
@@ -9950,7 +13498,7 @@
 </p:sld>
 </file>
 
-<file path=ppt/slides/slide13.xml><?xml version="1.0" encoding="utf-8"?>
+<file path=ppt/slides/slide14.xml><?xml version="1.0" encoding="utf-8"?>
 <p:sld xmlns:a="http://schemas.openxmlformats.org/drawingml/2006/main" xmlns:r="http://schemas.openxmlformats.org/officeDocument/2006/relationships" xmlns:p="http://schemas.openxmlformats.org/presentationml/2006/main">
   <p:cSld>
     <p:spTree>
@@ -10718,7 +14266,7 @@
 </p:sld>
 </file>
 
-<file path=ppt/slides/slide14.xml><?xml version="1.0" encoding="utf-8"?>
+<file path=ppt/slides/slide15.xml><?xml version="1.0" encoding="utf-8"?>
 <p:sld xmlns:a="http://schemas.openxmlformats.org/drawingml/2006/main" xmlns:r="http://schemas.openxmlformats.org/officeDocument/2006/relationships" xmlns:p="http://schemas.openxmlformats.org/presentationml/2006/main">
   <p:cSld>
     <p:spTree>
@@ -11403,7 +14951,7 @@
 </p:sld>
 </file>
 
-<file path=ppt/slides/slide15.xml><?xml version="1.0" encoding="utf-8"?>
+<file path=ppt/slides/slide16.xml><?xml version="1.0" encoding="utf-8"?>
 <p:sld xmlns:a="http://schemas.openxmlformats.org/drawingml/2006/main" xmlns:r="http://schemas.openxmlformats.org/officeDocument/2006/relationships" xmlns:p="http://schemas.openxmlformats.org/presentationml/2006/main">
   <p:cSld>
     <p:spTree>
@@ -12295,7 +15843,7 @@
 </p:sld>
 </file>
 
-<file path=ppt/slides/slide16.xml><?xml version="1.0" encoding="utf-8"?>
+<file path=ppt/slides/slide17.xml><?xml version="1.0" encoding="utf-8"?>
 <p:sld xmlns:a="http://schemas.openxmlformats.org/drawingml/2006/main" xmlns:r="http://schemas.openxmlformats.org/officeDocument/2006/relationships" xmlns:p="http://schemas.openxmlformats.org/presentationml/2006/main">
   <p:cSld>
     <p:spTree>
@@ -12994,7 +16542,7 @@
 </p:sld>
 </file>
 
-<file path=ppt/slides/slide17.xml><?xml version="1.0" encoding="utf-8"?>
+<file path=ppt/slides/slide18.xml><?xml version="1.0" encoding="utf-8"?>
 <p:sld xmlns:a="http://schemas.openxmlformats.org/drawingml/2006/main" xmlns:r="http://schemas.openxmlformats.org/officeDocument/2006/relationships" xmlns:p="http://schemas.openxmlformats.org/presentationml/2006/main">
   <p:cSld>
     <p:spTree>
@@ -14208,7 +17756,7 @@
 </p:sld>
 </file>
 
-<file path=ppt/slides/slide18.xml><?xml version="1.0" encoding="utf-8"?>
+<file path=ppt/slides/slide19.xml><?xml version="1.0" encoding="utf-8"?>
 <p:sld xmlns:a="http://schemas.openxmlformats.org/drawingml/2006/main" xmlns:r="http://schemas.openxmlformats.org/officeDocument/2006/relationships" xmlns:p="http://schemas.openxmlformats.org/presentationml/2006/main">
   <p:cSld>
     <p:spTree>
@@ -14577,7 +18125,205 @@
 </p:sld>
 </file>
 
-<file path=ppt/slides/slide19.xml><?xml version="1.0" encoding="utf-8"?>
+<file path=ppt/slides/slide2.xml><?xml version="1.0" encoding="utf-8"?>
+<p:sld xmlns:a="http://schemas.openxmlformats.org/drawingml/2006/main" xmlns:r="http://schemas.openxmlformats.org/officeDocument/2006/relationships" xmlns:p="http://schemas.openxmlformats.org/presentationml/2006/main">
+  <p:cSld>
+    <p:spTree>
+      <p:nvGrpSpPr>
+        <p:cNvPr id="1" name=""/>
+        <p:cNvGrpSpPr/>
+        <p:nvPr/>
+      </p:nvGrpSpPr>
+      <p:grpSpPr>
+        <a:xfrm>
+          <a:off x="0" y="0"/>
+          <a:ext cx="0" cy="0"/>
+          <a:chOff x="0" y="0"/>
+          <a:chExt cx="0" cy="0"/>
+        </a:xfrm>
+      </p:grpSpPr>
+      <p:sp>
+        <p:nvSpPr>
+          <p:cNvPr id="4098" name="shpTitel"/>
+          <p:cNvSpPr>
+            <a:spLocks noGrp="1" noChangeArrowheads="1"/>
+          </p:cNvSpPr>
+          <p:nvPr>
+            <p:ph type="title"/>
+          </p:nvPr>
+        </p:nvSpPr>
+        <p:spPr>
+          <a:xfrm>
+            <a:off x="6457951" y="2097087"/>
+            <a:ext cx="5040000" cy="492443"/>
+          </a:xfrm>
+        </p:spPr>
+        <p:txBody>
+          <a:bodyPr anchor="t" anchorCtr="0"/>
+          <a:lstStyle/>
+          <a:p>
+            <a:r>
+              <a:rPr lang="en-US" dirty="0" err="1">
+                <a:solidFill>
+                  <a:srgbClr val="113652"/>
+                </a:solidFill>
+              </a:rPr>
+              <a:t>Statistiek</a:t>
+            </a:r>
+            <a:r>
+              <a:rPr lang="en-US" dirty="0">
+                <a:solidFill>
+                  <a:srgbClr val="113652"/>
+                </a:solidFill>
+              </a:rPr>
+              <a:t>: college </a:t>
+            </a:r>
+            <a:r>
+              <a:rPr lang="en-US" dirty="0" smtClean="0">
+                <a:solidFill>
+                  <a:srgbClr val="113652"/>
+                </a:solidFill>
+              </a:rPr>
+              <a:t>6</a:t>
+            </a:r>
+            <a:endParaRPr lang="nl-NL" dirty="0" smtClean="0">
+              <a:solidFill>
+                <a:srgbClr val="113652"/>
+              </a:solidFill>
+              <a:latin typeface="RijksoverheidSansWebText Bold" panose="020B0803040202060203" pitchFamily="34" charset="0"/>
+              <a:ea typeface="RijksoverheidSansWebText Bold" panose="020B0803040202060203" pitchFamily="34" charset="0"/>
+            </a:endParaRPr>
+          </a:p>
+        </p:txBody>
+      </p:sp>
+      <p:sp>
+        <p:nvSpPr>
+          <p:cNvPr id="4099" name="shpTekst"/>
+          <p:cNvSpPr>
+            <a:spLocks noGrp="1" noChangeArrowheads="1"/>
+          </p:cNvSpPr>
+          <p:nvPr>
+            <p:ph type="body" idx="1"/>
+          </p:nvPr>
+        </p:nvSpPr>
+        <p:spPr>
+          <a:xfrm>
+            <a:off x="6458400" y="3236400"/>
+            <a:ext cx="5040000" cy="986400"/>
+          </a:xfrm>
+        </p:spPr>
+        <p:txBody>
+          <a:bodyPr/>
+          <a:lstStyle/>
+          <a:p>
+            <a:r>
+              <a:rPr lang="en-US" dirty="0" smtClean="0">
+                <a:solidFill>
+                  <a:srgbClr val="113652"/>
+                </a:solidFill>
+              </a:rPr>
+              <a:t>De </a:t>
+            </a:r>
+            <a:r>
+              <a:rPr lang="en-US" smtClean="0">
+                <a:solidFill>
+                  <a:srgbClr val="113652"/>
+                </a:solidFill>
+              </a:rPr>
+              <a:t>Poissonverdeling</a:t>
+            </a:r>
+            <a:endParaRPr lang="nl-NL" dirty="0">
+              <a:solidFill>
+                <a:srgbClr val="113652"/>
+              </a:solidFill>
+            </a:endParaRPr>
+          </a:p>
+        </p:txBody>
+      </p:sp>
+      <p:sp>
+        <p:nvSpPr>
+          <p:cNvPr id="4100" name="Date Placeholder 2"/>
+          <p:cNvSpPr>
+            <a:spLocks noGrp="1"/>
+          </p:cNvSpPr>
+          <p:nvPr>
+            <p:ph type="dt" sz="quarter" idx="10"/>
+          </p:nvPr>
+        </p:nvSpPr>
+        <p:spPr bwMode="auto">
+          <a:noFill/>
+          <a:ln>
+            <a:miter lim="800000"/>
+            <a:headEnd/>
+            <a:tailEnd/>
+          </a:ln>
+        </p:spPr>
+        <p:txBody>
+          <a:bodyPr wrap="square" numCol="1" anchorCtr="0" compatLnSpc="1">
+            <a:prstTxWarp prst="textNoShape">
+              <a:avLst/>
+            </a:prstTxWarp>
+          </a:bodyPr>
+          <a:lstStyle/>
+          <a:p>
+            <a:pPr marL="0" marR="0" lvl="0" indent="0" algn="l" defTabSz="914400" rtl="0" eaLnBrk="0" fontAlgn="base" latinLnBrk="0" hangingPunct="0">
+              <a:lnSpc>
+                <a:spcPct val="100000"/>
+              </a:lnSpc>
+              <a:spcBef>
+                <a:spcPct val="50000"/>
+              </a:spcBef>
+              <a:spcAft>
+                <a:spcPct val="0"/>
+              </a:spcAft>
+              <a:buClrTx/>
+              <a:buSzTx/>
+              <a:buFontTx/>
+              <a:buNone/>
+              <a:tabLst/>
+              <a:defRPr/>
+            </a:pPr>
+            <a:r>
+              <a:rPr kumimoji="0" lang="nl-NL" sz="1100" b="0" i="0" u="none" strike="noStrike" kern="1200" cap="none" spc="0" normalizeH="0" baseline="0" noProof="0" dirty="0" smtClean="0">
+                <a:ln>
+                  <a:noFill/>
+                </a:ln>
+                <a:solidFill>
+                  <a:srgbClr val="FFFFFF"/>
+                </a:solidFill>
+                <a:effectLst/>
+                <a:uLnTx/>
+                <a:uFillTx/>
+                <a:latin typeface="Verdana" pitchFamily="34" charset="0"/>
+                <a:ea typeface="+mn-ea"/>
+                <a:cs typeface="+mn-cs"/>
+              </a:rPr>
+              <a:t>26 mei 2026</a:t>
+            </a:r>
+          </a:p>
+        </p:txBody>
+      </p:sp>
+    </p:spTree>
+    <p:extLst>
+      <p:ext uri="{BB962C8B-B14F-4D97-AF65-F5344CB8AC3E}">
+        <p14:creationId xmlns:p14="http://schemas.microsoft.com/office/powerpoint/2010/main" val="2458429021"/>
+      </p:ext>
+    </p:extLst>
+  </p:cSld>
+  <p:clrMapOvr>
+    <a:masterClrMapping/>
+  </p:clrMapOvr>
+  <p:timing>
+    <p:tnLst>
+      <p:par>
+        <p:cTn id="1" dur="indefinite" restart="never" nodeType="tmRoot"/>
+      </p:par>
+    </p:tnLst>
+  </p:timing>
+</p:sld>
+</file>
+
+<file path=ppt/slides/slide20.xml><?xml version="1.0" encoding="utf-8"?>
 <p:sld xmlns:a="http://schemas.openxmlformats.org/drawingml/2006/main" xmlns:r="http://schemas.openxmlformats.org/officeDocument/2006/relationships" xmlns:p="http://schemas.openxmlformats.org/presentationml/2006/main">
   <p:cSld>
     <p:spTree>
@@ -15695,207 +19441,7 @@
 </p:sld>
 </file>
 
-<file path=ppt/slides/slide2.xml><?xml version="1.0" encoding="utf-8"?>
-<p:sld xmlns:a="http://schemas.openxmlformats.org/drawingml/2006/main" xmlns:r="http://schemas.openxmlformats.org/officeDocument/2006/relationships" xmlns:p="http://schemas.openxmlformats.org/presentationml/2006/main">
-  <p:cSld>
-    <p:spTree>
-      <p:nvGrpSpPr>
-        <p:cNvPr id="1" name=""/>
-        <p:cNvGrpSpPr/>
-        <p:nvPr/>
-      </p:nvGrpSpPr>
-      <p:grpSpPr>
-        <a:xfrm>
-          <a:off x="0" y="0"/>
-          <a:ext cx="0" cy="0"/>
-          <a:chOff x="0" y="0"/>
-          <a:chExt cx="0" cy="0"/>
-        </a:xfrm>
-      </p:grpSpPr>
-      <p:sp>
-        <p:nvSpPr>
-          <p:cNvPr id="5122" name="Rectangle 1026"/>
-          <p:cNvSpPr>
-            <a:spLocks noGrp="1" noChangeArrowheads="1"/>
-          </p:cNvSpPr>
-          <p:nvPr>
-            <p:ph type="title"/>
-          </p:nvPr>
-        </p:nvSpPr>
-        <p:spPr/>
-        <p:txBody>
-          <a:bodyPr/>
-          <a:lstStyle/>
-          <a:p>
-            <a:pPr eaLnBrk="1" hangingPunct="1"/>
-            <a:r>
-              <a:rPr lang="en-US" dirty="0" smtClean="0"/>
-              <a:t>Tot nu toe</a:t>
-            </a:r>
-            <a:endParaRPr lang="nl-NL" dirty="0" smtClean="0"/>
-          </a:p>
-        </p:txBody>
-      </p:sp>
-      <p:sp>
-        <p:nvSpPr>
-          <p:cNvPr id="5123" name="Rectangle 1027"/>
-          <p:cNvSpPr>
-            <a:spLocks noGrp="1" noChangeAspect="1" noChangeArrowheads="1"/>
-          </p:cNvSpPr>
-          <p:nvPr>
-            <p:ph type="body" idx="1"/>
-          </p:nvPr>
-        </p:nvSpPr>
-        <p:spPr/>
-        <p:txBody>
-          <a:bodyPr/>
-          <a:lstStyle/>
-          <a:p>
-            <a:pPr marL="342900" indent="-342900">
-              <a:buFont typeface="Arial" panose="020B0604020202020204" pitchFamily="34" charset="0"/>
-              <a:buChar char="•"/>
-            </a:pPr>
-            <a:r>
-              <a:rPr lang="nl-NL" dirty="0" smtClean="0"/>
-              <a:t>Introductie </a:t>
-            </a:r>
-            <a:r>
-              <a:rPr lang="nl-NL" dirty="0"/>
-              <a:t>statistiek</a:t>
-            </a:r>
-          </a:p>
-          <a:p>
-            <a:pPr marL="342900" indent="-342900">
-              <a:buFont typeface="Arial" panose="020B0604020202020204" pitchFamily="34" charset="0"/>
-              <a:buChar char="•"/>
-            </a:pPr>
-            <a:endParaRPr lang="en-US" dirty="0" smtClean="0"/>
-          </a:p>
-          <a:p>
-            <a:pPr marL="342900" indent="-342900">
-              <a:buFont typeface="Arial" panose="020B0604020202020204" pitchFamily="34" charset="0"/>
-              <a:buChar char="•"/>
-            </a:pPr>
-            <a:endParaRPr lang="nl-NL" dirty="0"/>
-          </a:p>
-          <a:p>
-            <a:pPr marL="342900" indent="-342900">
-              <a:buFont typeface="Arial" panose="020B0604020202020204" pitchFamily="34" charset="0"/>
-              <a:buChar char="•"/>
-            </a:pPr>
-            <a:r>
-              <a:rPr lang="nl-NL" dirty="0"/>
-              <a:t>Discrete en continue </a:t>
-            </a:r>
-            <a:r>
-              <a:rPr lang="nl-NL" dirty="0" err="1"/>
-              <a:t>kansvariabelen</a:t>
-            </a:r>
-            <a:endParaRPr lang="nl-NL" dirty="0"/>
-          </a:p>
-          <a:p>
-            <a:pPr marL="342900" indent="-342900">
-              <a:buFont typeface="Arial" panose="020B0604020202020204" pitchFamily="34" charset="0"/>
-              <a:buChar char="•"/>
-            </a:pPr>
-            <a:endParaRPr lang="en-US" dirty="0" smtClean="0"/>
-          </a:p>
-          <a:p>
-            <a:pPr marL="342900" indent="-342900">
-              <a:buFont typeface="Arial" panose="020B0604020202020204" pitchFamily="34" charset="0"/>
-              <a:buChar char="•"/>
-            </a:pPr>
-            <a:endParaRPr lang="nl-NL" dirty="0"/>
-          </a:p>
-          <a:p>
-            <a:pPr marL="342900" indent="-342900">
-              <a:buFont typeface="Arial" panose="020B0604020202020204" pitchFamily="34" charset="0"/>
-              <a:buChar char="•"/>
-            </a:pPr>
-            <a:r>
-              <a:rPr lang="nl-NL" dirty="0" smtClean="0"/>
-              <a:t>Binomiale verdeling</a:t>
-            </a:r>
-          </a:p>
-          <a:p>
-            <a:pPr marL="342900" indent="-342900">
-              <a:buFont typeface="Arial" panose="020B0604020202020204" pitchFamily="34" charset="0"/>
-              <a:buChar char="•"/>
-            </a:pPr>
-            <a:endParaRPr lang="en-US" dirty="0" smtClean="0"/>
-          </a:p>
-          <a:p>
-            <a:pPr marL="342900" indent="-342900">
-              <a:buFont typeface="Arial" panose="020B0604020202020204" pitchFamily="34" charset="0"/>
-              <a:buChar char="•"/>
-            </a:pPr>
-            <a:endParaRPr lang="nl-NL" dirty="0"/>
-          </a:p>
-          <a:p>
-            <a:pPr marL="342900" indent="-342900">
-              <a:buFont typeface="Arial" panose="020B0604020202020204" pitchFamily="34" charset="0"/>
-              <a:buChar char="•"/>
-            </a:pPr>
-            <a:r>
-              <a:rPr lang="nl-NL" dirty="0" smtClean="0"/>
-              <a:t>Normale verdeling</a:t>
-            </a:r>
-          </a:p>
-          <a:p>
-            <a:pPr marL="342900" indent="-342900">
-              <a:buFont typeface="Arial" panose="020B0604020202020204" pitchFamily="34" charset="0"/>
-              <a:buChar char="•"/>
-            </a:pPr>
-            <a:endParaRPr lang="nl-NL" dirty="0"/>
-          </a:p>
-          <a:p>
-            <a:pPr eaLnBrk="1" hangingPunct="1"/>
-            <a:endParaRPr lang="nl-NL" dirty="0" smtClean="0"/>
-          </a:p>
-        </p:txBody>
-      </p:sp>
-      <p:sp>
-        <p:nvSpPr>
-          <p:cNvPr id="2" name="Date Placeholder 1"/>
-          <p:cNvSpPr>
-            <a:spLocks noGrp="1"/>
-          </p:cNvSpPr>
-          <p:nvPr>
-            <p:ph type="dt" sz="half" idx="10"/>
-          </p:nvPr>
-        </p:nvSpPr>
-        <p:spPr/>
-        <p:txBody>
-          <a:bodyPr/>
-          <a:lstStyle/>
-          <a:p>
-            <a:pPr>
-              <a:defRPr/>
-            </a:pPr>
-            <a:r>
-              <a:rPr lang="nl-NL" smtClean="0"/>
-              <a:t>Mei 2025</a:t>
-            </a:r>
-            <a:endParaRPr lang="nl-NL" dirty="0"/>
-          </a:p>
-        </p:txBody>
-      </p:sp>
-    </p:spTree>
-  </p:cSld>
-  <p:clrMapOvr>
-    <a:masterClrMapping/>
-  </p:clrMapOvr>
-  <p:timing>
-    <p:tnLst>
-      <p:par>
-        <p:cTn id="1" dur="indefinite" restart="never" nodeType="tmRoot"/>
-      </p:par>
-    </p:tnLst>
-  </p:timing>
-</p:sld>
-</file>
-
-<file path=ppt/slides/slide20.xml><?xml version="1.0" encoding="utf-8"?>
+<file path=ppt/slides/slide21.xml><?xml version="1.0" encoding="utf-8"?>
 <p:sld xmlns:a="http://schemas.openxmlformats.org/drawingml/2006/main" xmlns:r="http://schemas.openxmlformats.org/officeDocument/2006/relationships" xmlns:p="http://schemas.openxmlformats.org/presentationml/2006/main">
   <p:cSld>
     <p:spTree>
@@ -16345,7 +19891,7 @@
 </p:sld>
 </file>
 
-<file path=ppt/slides/slide21.xml><?xml version="1.0" encoding="utf-8"?>
+<file path=ppt/slides/slide22.xml><?xml version="1.0" encoding="utf-8"?>
 <p:sld xmlns:a="http://schemas.openxmlformats.org/drawingml/2006/main" xmlns:r="http://schemas.openxmlformats.org/officeDocument/2006/relationships" xmlns:p="http://schemas.openxmlformats.org/presentationml/2006/main">
   <p:cSld>
     <p:spTree>
@@ -16828,7 +20374,7 @@
 </p:sld>
 </file>
 
-<file path=ppt/slides/slide22.xml><?xml version="1.0" encoding="utf-8"?>
+<file path=ppt/slides/slide23.xml><?xml version="1.0" encoding="utf-8"?>
 <p:sld xmlns:a="http://schemas.openxmlformats.org/drawingml/2006/main" xmlns:r="http://schemas.openxmlformats.org/officeDocument/2006/relationships" xmlns:p="http://schemas.openxmlformats.org/presentationml/2006/main">
   <p:cSld>
     <p:spTree>
@@ -18217,7 +21763,7 @@
 </p:sld>
 </file>
 
-<file path=ppt/slides/slide23.xml><?xml version="1.0" encoding="utf-8"?>
+<file path=ppt/slides/slide24.xml><?xml version="1.0" encoding="utf-8"?>
 <p:sld xmlns:a="http://schemas.openxmlformats.org/drawingml/2006/main" xmlns:r="http://schemas.openxmlformats.org/officeDocument/2006/relationships" xmlns:p="http://schemas.openxmlformats.org/presentationml/2006/main">
   <p:cSld>
     <p:spTree>
@@ -20486,7 +24032,7 @@
 </p:sld>
 </file>
 
-<file path=ppt/slides/slide24.xml><?xml version="1.0" encoding="utf-8"?>
+<file path=ppt/slides/slide25.xml><?xml version="1.0" encoding="utf-8"?>
 <p:sld xmlns:a="http://schemas.openxmlformats.org/drawingml/2006/main" xmlns:r="http://schemas.openxmlformats.org/officeDocument/2006/relationships" xmlns:p="http://schemas.openxmlformats.org/presentationml/2006/main">
   <p:cSld>
     <p:spTree>
@@ -21232,7 +24778,7 @@
 </p:sld>
 </file>
 
-<file path=ppt/slides/slide25.xml><?xml version="1.0" encoding="utf-8"?>
+<file path=ppt/slides/slide26.xml><?xml version="1.0" encoding="utf-8"?>
 <p:sld xmlns:a="http://schemas.openxmlformats.org/drawingml/2006/main" xmlns:r="http://schemas.openxmlformats.org/officeDocument/2006/relationships" xmlns:p="http://schemas.openxmlformats.org/presentationml/2006/main">
   <p:cSld>
     <p:spTree>
@@ -21573,7 +25119,7 @@
                 <a:tabLst/>
                 <a:defRPr/>
               </a:pPr>
-              <a:t>18 april 2025</a:t>
+              <a:t>9 april 2026</a:t>
             </a:fld>
             <a:endParaRPr kumimoji="0" lang="nl-NL" sz="1100" b="0" i="0" u="none" strike="noStrike" kern="1200" cap="none" spc="0" normalizeH="0" baseline="0" noProof="0" smtClean="0">
               <a:ln>
@@ -21612,7 +25158,7 @@
 </p:sld>
 </file>
 
-<file path=ppt/slides/slide26.xml><?xml version="1.0" encoding="utf-8"?>
+<file path=ppt/slides/slide27.xml><?xml version="1.0" encoding="utf-8"?>
 <p:sld xmlns:a="http://schemas.openxmlformats.org/drawingml/2006/main" xmlns:r="http://schemas.openxmlformats.org/officeDocument/2006/relationships" xmlns:p="http://schemas.openxmlformats.org/presentationml/2006/main">
   <p:cSld>
     <p:spTree>
@@ -21958,7 +25504,7 @@
                 <a:tabLst/>
                 <a:defRPr/>
               </a:pPr>
-              <a:t>18 april 2025</a:t>
+              <a:t>9 april 2026</a:t>
             </a:fld>
             <a:endParaRPr kumimoji="0" lang="nl-NL" sz="1100" b="0" i="0" u="none" strike="noStrike" kern="1200" cap="none" spc="0" normalizeH="0" baseline="0" noProof="0" smtClean="0">
               <a:ln>
@@ -22032,6 +25578,206 @@
             <a:pPr eaLnBrk="1" hangingPunct="1"/>
             <a:r>
               <a:rPr lang="en-US" dirty="0" smtClean="0"/>
+              <a:t>Tot nu toe</a:t>
+            </a:r>
+            <a:endParaRPr lang="nl-NL" dirty="0" smtClean="0"/>
+          </a:p>
+        </p:txBody>
+      </p:sp>
+      <p:sp>
+        <p:nvSpPr>
+          <p:cNvPr id="5123" name="Rectangle 1027"/>
+          <p:cNvSpPr>
+            <a:spLocks noGrp="1" noChangeAspect="1" noChangeArrowheads="1"/>
+          </p:cNvSpPr>
+          <p:nvPr>
+            <p:ph type="body" idx="1"/>
+          </p:nvPr>
+        </p:nvSpPr>
+        <p:spPr/>
+        <p:txBody>
+          <a:bodyPr/>
+          <a:lstStyle/>
+          <a:p>
+            <a:pPr marL="342900" indent="-342900">
+              <a:buFont typeface="Arial" panose="020B0604020202020204" pitchFamily="34" charset="0"/>
+              <a:buChar char="•"/>
+            </a:pPr>
+            <a:r>
+              <a:rPr lang="nl-NL" dirty="0" smtClean="0"/>
+              <a:t>Introductie </a:t>
+            </a:r>
+            <a:r>
+              <a:rPr lang="nl-NL" dirty="0"/>
+              <a:t>statistiek</a:t>
+            </a:r>
+          </a:p>
+          <a:p>
+            <a:pPr marL="342900" indent="-342900">
+              <a:buFont typeface="Arial" panose="020B0604020202020204" pitchFamily="34" charset="0"/>
+              <a:buChar char="•"/>
+            </a:pPr>
+            <a:endParaRPr lang="en-US" dirty="0" smtClean="0"/>
+          </a:p>
+          <a:p>
+            <a:pPr marL="342900" indent="-342900">
+              <a:buFont typeface="Arial" panose="020B0604020202020204" pitchFamily="34" charset="0"/>
+              <a:buChar char="•"/>
+            </a:pPr>
+            <a:endParaRPr lang="nl-NL" dirty="0"/>
+          </a:p>
+          <a:p>
+            <a:pPr marL="342900" indent="-342900">
+              <a:buFont typeface="Arial" panose="020B0604020202020204" pitchFamily="34" charset="0"/>
+              <a:buChar char="•"/>
+            </a:pPr>
+            <a:r>
+              <a:rPr lang="nl-NL" dirty="0"/>
+              <a:t>Discrete en continue </a:t>
+            </a:r>
+            <a:r>
+              <a:rPr lang="nl-NL" dirty="0" err="1"/>
+              <a:t>kansvariabelen</a:t>
+            </a:r>
+            <a:endParaRPr lang="nl-NL" dirty="0"/>
+          </a:p>
+          <a:p>
+            <a:pPr marL="342900" indent="-342900">
+              <a:buFont typeface="Arial" panose="020B0604020202020204" pitchFamily="34" charset="0"/>
+              <a:buChar char="•"/>
+            </a:pPr>
+            <a:endParaRPr lang="en-US" dirty="0" smtClean="0"/>
+          </a:p>
+          <a:p>
+            <a:pPr marL="342900" indent="-342900">
+              <a:buFont typeface="Arial" panose="020B0604020202020204" pitchFamily="34" charset="0"/>
+              <a:buChar char="•"/>
+            </a:pPr>
+            <a:endParaRPr lang="nl-NL" dirty="0"/>
+          </a:p>
+          <a:p>
+            <a:pPr marL="342900" indent="-342900">
+              <a:buFont typeface="Arial" panose="020B0604020202020204" pitchFamily="34" charset="0"/>
+              <a:buChar char="•"/>
+            </a:pPr>
+            <a:r>
+              <a:rPr lang="nl-NL" dirty="0" smtClean="0"/>
+              <a:t>Binomiale verdeling</a:t>
+            </a:r>
+          </a:p>
+          <a:p>
+            <a:pPr marL="342900" indent="-342900">
+              <a:buFont typeface="Arial" panose="020B0604020202020204" pitchFamily="34" charset="0"/>
+              <a:buChar char="•"/>
+            </a:pPr>
+            <a:endParaRPr lang="en-US" dirty="0" smtClean="0"/>
+          </a:p>
+          <a:p>
+            <a:pPr marL="342900" indent="-342900">
+              <a:buFont typeface="Arial" panose="020B0604020202020204" pitchFamily="34" charset="0"/>
+              <a:buChar char="•"/>
+            </a:pPr>
+            <a:endParaRPr lang="nl-NL" dirty="0"/>
+          </a:p>
+          <a:p>
+            <a:pPr marL="342900" indent="-342900">
+              <a:buFont typeface="Arial" panose="020B0604020202020204" pitchFamily="34" charset="0"/>
+              <a:buChar char="•"/>
+            </a:pPr>
+            <a:r>
+              <a:rPr lang="nl-NL" dirty="0" smtClean="0"/>
+              <a:t>Normale verdeling</a:t>
+            </a:r>
+          </a:p>
+          <a:p>
+            <a:pPr marL="342900" indent="-342900">
+              <a:buFont typeface="Arial" panose="020B0604020202020204" pitchFamily="34" charset="0"/>
+              <a:buChar char="•"/>
+            </a:pPr>
+            <a:endParaRPr lang="nl-NL" dirty="0"/>
+          </a:p>
+          <a:p>
+            <a:pPr eaLnBrk="1" hangingPunct="1"/>
+            <a:endParaRPr lang="nl-NL" dirty="0" smtClean="0"/>
+          </a:p>
+        </p:txBody>
+      </p:sp>
+      <p:sp>
+        <p:nvSpPr>
+          <p:cNvPr id="2" name="Date Placeholder 1"/>
+          <p:cNvSpPr>
+            <a:spLocks noGrp="1"/>
+          </p:cNvSpPr>
+          <p:nvPr>
+            <p:ph type="dt" sz="half" idx="10"/>
+          </p:nvPr>
+        </p:nvSpPr>
+        <p:spPr/>
+        <p:txBody>
+          <a:bodyPr/>
+          <a:lstStyle/>
+          <a:p>
+            <a:pPr>
+              <a:defRPr/>
+            </a:pPr>
+            <a:r>
+              <a:rPr lang="nl-NL" smtClean="0"/>
+              <a:t>Mei 2025</a:t>
+            </a:r>
+            <a:endParaRPr lang="nl-NL" dirty="0"/>
+          </a:p>
+        </p:txBody>
+      </p:sp>
+    </p:spTree>
+  </p:cSld>
+  <p:clrMapOvr>
+    <a:masterClrMapping/>
+  </p:clrMapOvr>
+  <p:timing>
+    <p:tnLst>
+      <p:par>
+        <p:cTn id="1" dur="indefinite" restart="never" nodeType="tmRoot"/>
+      </p:par>
+    </p:tnLst>
+  </p:timing>
+</p:sld>
+</file>
+
+<file path=ppt/slides/slide4.xml><?xml version="1.0" encoding="utf-8"?>
+<p:sld xmlns:a="http://schemas.openxmlformats.org/drawingml/2006/main" xmlns:r="http://schemas.openxmlformats.org/officeDocument/2006/relationships" xmlns:p="http://schemas.openxmlformats.org/presentationml/2006/main">
+  <p:cSld>
+    <p:spTree>
+      <p:nvGrpSpPr>
+        <p:cNvPr id="1" name=""/>
+        <p:cNvGrpSpPr/>
+        <p:nvPr/>
+      </p:nvGrpSpPr>
+      <p:grpSpPr>
+        <a:xfrm>
+          <a:off x="0" y="0"/>
+          <a:ext cx="0" cy="0"/>
+          <a:chOff x="0" y="0"/>
+          <a:chExt cx="0" cy="0"/>
+        </a:xfrm>
+      </p:grpSpPr>
+      <p:sp>
+        <p:nvSpPr>
+          <p:cNvPr id="5122" name="Rectangle 1026"/>
+          <p:cNvSpPr>
+            <a:spLocks noGrp="1" noChangeArrowheads="1"/>
+          </p:cNvSpPr>
+          <p:nvPr>
+            <p:ph type="title"/>
+          </p:nvPr>
+        </p:nvSpPr>
+        <p:spPr/>
+        <p:txBody>
+          <a:bodyPr/>
+          <a:lstStyle/>
+          <a:p>
+            <a:pPr eaLnBrk="1" hangingPunct="1"/>
+            <a:r>
+              <a:rPr lang="en-US" dirty="0" smtClean="0"/>
               <a:t> </a:t>
             </a:r>
             <a:endParaRPr lang="nl-NL" dirty="0" smtClean="0"/>
@@ -22311,7 +26057,7 @@
 </p:sld>
 </file>
 
-<file path=ppt/slides/slide4.xml><?xml version="1.0" encoding="utf-8"?>
+<file path=ppt/slides/slide5.xml><?xml version="1.0" encoding="utf-8"?>
 <p:sld xmlns:a="http://schemas.openxmlformats.org/drawingml/2006/main" xmlns:r="http://schemas.openxmlformats.org/officeDocument/2006/relationships" xmlns:p="http://schemas.openxmlformats.org/presentationml/2006/main">
   <p:cSld>
     <p:spTree>
@@ -22698,7 +26444,7 @@
 </p:sld>
 </file>
 
-<file path=ppt/slides/slide5.xml><?xml version="1.0" encoding="utf-8"?>
+<file path=ppt/slides/slide6.xml><?xml version="1.0" encoding="utf-8"?>
 <p:sld xmlns:a="http://schemas.openxmlformats.org/drawingml/2006/main" xmlns:r="http://schemas.openxmlformats.org/officeDocument/2006/relationships" xmlns:p="http://schemas.openxmlformats.org/presentationml/2006/main">
   <p:cSld>
     <p:spTree>
@@ -23162,7 +26908,7 @@
 </p:sld>
 </file>
 
-<file path=ppt/slides/slide6.xml><?xml version="1.0" encoding="utf-8"?>
+<file path=ppt/slides/slide7.xml><?xml version="1.0" encoding="utf-8"?>
 <p:sld xmlns:a="http://schemas.openxmlformats.org/drawingml/2006/main" xmlns:r="http://schemas.openxmlformats.org/officeDocument/2006/relationships" xmlns:p="http://schemas.openxmlformats.org/presentationml/2006/main">
   <p:cSld>
     <p:spTree>
@@ -23670,7 +27416,7 @@
 </p:sld>
 </file>
 
-<file path=ppt/slides/slide7.xml><?xml version="1.0" encoding="utf-8"?>
+<file path=ppt/slides/slide8.xml><?xml version="1.0" encoding="utf-8"?>
 <p:sld xmlns:a="http://schemas.openxmlformats.org/drawingml/2006/main" xmlns:r="http://schemas.openxmlformats.org/officeDocument/2006/relationships" xmlns:p="http://schemas.openxmlformats.org/presentationml/2006/main">
   <p:cSld>
     <p:spTree>
@@ -24491,7 +28237,7 @@
 </p:sld>
 </file>
 
-<file path=ppt/slides/slide8.xml><?xml version="1.0" encoding="utf-8"?>
+<file path=ppt/slides/slide9.xml><?xml version="1.0" encoding="utf-8"?>
 <p:sld xmlns:a="http://schemas.openxmlformats.org/drawingml/2006/main" xmlns:r="http://schemas.openxmlformats.org/officeDocument/2006/relationships" xmlns:p="http://schemas.openxmlformats.org/presentationml/2006/main">
   <p:cSld>
     <p:spTree>
@@ -25803,182 +29549,6 @@
     <p:extLst>
       <p:ext uri="{BB962C8B-B14F-4D97-AF65-F5344CB8AC3E}">
         <p14:creationId xmlns:p14="http://schemas.microsoft.com/office/powerpoint/2010/main" val="2656553027"/>
-      </p:ext>
-    </p:extLst>
-  </p:cSld>
-  <p:clrMapOvr>
-    <a:masterClrMapping/>
-  </p:clrMapOvr>
-  <p:timing>
-    <p:tnLst>
-      <p:par>
-        <p:cTn id="1" dur="indefinite" restart="never" nodeType="tmRoot"/>
-      </p:par>
-    </p:tnLst>
-  </p:timing>
-</p:sld>
-</file>
-
-<file path=ppt/slides/slide9.xml><?xml version="1.0" encoding="utf-8"?>
-<p:sld xmlns:a="http://schemas.openxmlformats.org/drawingml/2006/main" xmlns:r="http://schemas.openxmlformats.org/officeDocument/2006/relationships" xmlns:p="http://schemas.openxmlformats.org/presentationml/2006/main">
-  <p:cSld>
-    <p:spTree>
-      <p:nvGrpSpPr>
-        <p:cNvPr id="1" name=""/>
-        <p:cNvGrpSpPr/>
-        <p:nvPr/>
-      </p:nvGrpSpPr>
-      <p:grpSpPr>
-        <a:xfrm>
-          <a:off x="0" y="0"/>
-          <a:ext cx="0" cy="0"/>
-          <a:chOff x="0" y="0"/>
-          <a:chExt cx="0" cy="0"/>
-        </a:xfrm>
-      </p:grpSpPr>
-      <p:sp>
-        <p:nvSpPr>
-          <p:cNvPr id="2" name="Title 1"/>
-          <p:cNvSpPr>
-            <a:spLocks noGrp="1"/>
-          </p:cNvSpPr>
-          <p:nvPr>
-            <p:ph type="title"/>
-          </p:nvPr>
-        </p:nvSpPr>
-        <p:spPr/>
-        <p:txBody>
-          <a:bodyPr/>
-          <a:lstStyle/>
-          <a:p>
-            <a:r>
-              <a:rPr lang="nl-NL" dirty="0" smtClean="0"/>
-              <a:t>De </a:t>
-            </a:r>
-            <a:r>
-              <a:rPr lang="nl-NL" dirty="0" err="1" smtClean="0"/>
-              <a:t>Poissonverdeling</a:t>
-            </a:r>
-            <a:endParaRPr lang="nl-NL" dirty="0"/>
-          </a:p>
-        </p:txBody>
-      </p:sp>
-      <p:sp>
-        <p:nvSpPr>
-          <p:cNvPr id="3" name="Content Placeholder 2"/>
-          <p:cNvSpPr>
-            <a:spLocks noGrp="1"/>
-          </p:cNvSpPr>
-          <p:nvPr>
-            <p:ph idx="1"/>
-          </p:nvPr>
-        </p:nvSpPr>
-        <p:spPr/>
-        <p:txBody>
-          <a:bodyPr/>
-          <a:lstStyle/>
-          <a:p>
-            <a:endParaRPr lang="en-US" b="1" dirty="0" smtClean="0"/>
-          </a:p>
-          <a:p>
-            <a:pPr algn="ctr"/>
-            <a:r>
-              <a:rPr lang="en-US" dirty="0" smtClean="0">
-                <a:hlinkClick r:id="rId2" tooltip="https://interactive-pois-binom.streamlit.app"/>
-              </a:rPr>
-              <a:t>https://interactive-pois-binom.streamlit.app</a:t>
-            </a:r>
-            <a:endParaRPr lang="en-US" dirty="0"/>
-          </a:p>
-          <a:p>
-            <a:endParaRPr lang="en-US" dirty="0" smtClean="0"/>
-          </a:p>
-          <a:p>
-            <a:endParaRPr lang="en-US" dirty="0"/>
-          </a:p>
-          <a:p>
-            <a:endParaRPr lang="en-US" dirty="0" smtClean="0"/>
-          </a:p>
-          <a:p>
-            <a:endParaRPr lang="en-US" dirty="0" smtClean="0"/>
-          </a:p>
-          <a:p>
-            <a:endParaRPr lang="en-US" b="1" dirty="0"/>
-          </a:p>
-          <a:p>
-            <a:endParaRPr lang="nl-NL" b="1" dirty="0"/>
-          </a:p>
-        </p:txBody>
-      </p:sp>
-      <p:sp>
-        <p:nvSpPr>
-          <p:cNvPr id="5" name="Date Placeholder 4"/>
-          <p:cNvSpPr>
-            <a:spLocks noGrp="1"/>
-          </p:cNvSpPr>
-          <p:nvPr>
-            <p:ph type="dt" sz="half" idx="10"/>
-          </p:nvPr>
-        </p:nvSpPr>
-        <p:spPr/>
-        <p:txBody>
-          <a:bodyPr/>
-          <a:lstStyle/>
-          <a:p>
-            <a:pPr>
-              <a:defRPr/>
-            </a:pPr>
-            <a:r>
-              <a:rPr lang="nl-NL" smtClean="0"/>
-              <a:t>Mei 2025</a:t>
-            </a:r>
-            <a:endParaRPr lang="nl-NL" dirty="0"/>
-          </a:p>
-        </p:txBody>
-      </p:sp>
-      <p:sp>
-        <p:nvSpPr>
-          <p:cNvPr id="4" name="AutoShape 2" descr="Close Up Shot of Improvised Explosive Device Bomb Stock Photo - Image ..."/>
-          <p:cNvSpPr>
-            <a:spLocks noChangeAspect="1" noChangeArrowheads="1"/>
-          </p:cNvSpPr>
-          <p:nvPr/>
-        </p:nvSpPr>
-        <p:spPr bwMode="auto">
-          <a:xfrm>
-            <a:off x="155575" y="-144463"/>
-            <a:ext cx="304800" cy="304801"/>
-          </a:xfrm>
-          <a:prstGeom prst="rect">
-            <a:avLst/>
-          </a:prstGeom>
-          <a:noFill/>
-          <a:extLst>
-            <a:ext uri="{909E8E84-426E-40DD-AFC4-6F175D3DCCD1}">
-              <a14:hiddenFill xmlns:a14="http://schemas.microsoft.com/office/drawing/2010/main">
-                <a:solidFill>
-                  <a:srgbClr val="FFFFFF"/>
-                </a:solidFill>
-              </a14:hiddenFill>
-            </a:ext>
-          </a:extLst>
-        </p:spPr>
-        <p:txBody>
-          <a:bodyPr vert="horz" wrap="square" lIns="91440" tIns="45720" rIns="91440" bIns="45720" numCol="1" anchor="t" anchorCtr="0" compatLnSpc="1">
-            <a:prstTxWarp prst="textNoShape">
-              <a:avLst/>
-            </a:prstTxWarp>
-          </a:bodyPr>
-          <a:lstStyle/>
-          <a:p>
-            <a:endParaRPr lang="nl-NL"/>
-          </a:p>
-        </p:txBody>
-      </p:sp>
-    </p:spTree>
-    <p:extLst>
-      <p:ext uri="{BB962C8B-B14F-4D97-AF65-F5344CB8AC3E}">
-        <p14:creationId xmlns:p14="http://schemas.microsoft.com/office/powerpoint/2010/main" val="1889259425"/>
       </p:ext>
     </p:extLst>
   </p:cSld>
@@ -26874,6 +30444,445 @@
 </file>
 
 <file path=ppt/theme/theme3.xml><?xml version="1.0" encoding="utf-8"?>
+<a:theme xmlns:a="http://schemas.openxmlformats.org/drawingml/2006/main" name="2_Presentatie">
+  <a:themeElements>
+    <a:clrScheme name="landmachtNL1 1">
+      <a:dk1>
+        <a:srgbClr val="000000"/>
+      </a:dk1>
+      <a:lt1>
+        <a:srgbClr val="FFFFFF"/>
+      </a:lt1>
+      <a:dk2>
+        <a:srgbClr val="E17000"/>
+      </a:dk2>
+      <a:lt2>
+        <a:srgbClr val="9ACCD4"/>
+      </a:lt2>
+      <a:accent1>
+        <a:srgbClr val="2494C5"/>
+      </a:accent1>
+      <a:accent2>
+        <a:srgbClr val="9ACCD4"/>
+      </a:accent2>
+      <a:accent3>
+        <a:srgbClr val="FFFFFF"/>
+      </a:accent3>
+      <a:accent4>
+        <a:srgbClr val="000000"/>
+      </a:accent4>
+      <a:accent5>
+        <a:srgbClr val="ACC8DF"/>
+      </a:accent5>
+      <a:accent6>
+        <a:srgbClr val="8BB9C0"/>
+      </a:accent6>
+      <a:hlink>
+        <a:srgbClr val="004228"/>
+      </a:hlink>
+      <a:folHlink>
+        <a:srgbClr val="E17000"/>
+      </a:folHlink>
+    </a:clrScheme>
+    <a:fontScheme name="Aangepast 1">
+      <a:majorFont>
+        <a:latin typeface="RijksoverheidSansWebText Bold"/>
+        <a:ea typeface=""/>
+        <a:cs typeface=""/>
+      </a:majorFont>
+      <a:minorFont>
+        <a:latin typeface="RijksoverheidSansWebText Regula"/>
+        <a:ea typeface=""/>
+        <a:cs typeface=""/>
+      </a:minorFont>
+    </a:fontScheme>
+    <a:fmtScheme name="Office">
+      <a:fillStyleLst>
+        <a:solidFill>
+          <a:schemeClr val="phClr"/>
+        </a:solidFill>
+        <a:gradFill rotWithShape="1">
+          <a:gsLst>
+            <a:gs pos="0">
+              <a:schemeClr val="phClr">
+                <a:tint val="50000"/>
+                <a:satMod val="300000"/>
+              </a:schemeClr>
+            </a:gs>
+            <a:gs pos="35000">
+              <a:schemeClr val="phClr">
+                <a:tint val="37000"/>
+                <a:satMod val="300000"/>
+              </a:schemeClr>
+            </a:gs>
+            <a:gs pos="100000">
+              <a:schemeClr val="phClr">
+                <a:tint val="15000"/>
+                <a:satMod val="350000"/>
+              </a:schemeClr>
+            </a:gs>
+          </a:gsLst>
+          <a:lin ang="16200000" scaled="1"/>
+        </a:gradFill>
+        <a:gradFill rotWithShape="1">
+          <a:gsLst>
+            <a:gs pos="0">
+              <a:schemeClr val="phClr">
+                <a:shade val="51000"/>
+                <a:satMod val="130000"/>
+              </a:schemeClr>
+            </a:gs>
+            <a:gs pos="80000">
+              <a:schemeClr val="phClr">
+                <a:shade val="93000"/>
+                <a:satMod val="130000"/>
+              </a:schemeClr>
+            </a:gs>
+            <a:gs pos="100000">
+              <a:schemeClr val="phClr">
+                <a:shade val="94000"/>
+                <a:satMod val="135000"/>
+              </a:schemeClr>
+            </a:gs>
+          </a:gsLst>
+          <a:lin ang="16200000" scaled="0"/>
+        </a:gradFill>
+      </a:fillStyleLst>
+      <a:lnStyleLst>
+        <a:ln w="9525" cap="flat" cmpd="sng" algn="ctr">
+          <a:solidFill>
+            <a:schemeClr val="phClr">
+              <a:shade val="95000"/>
+              <a:satMod val="105000"/>
+            </a:schemeClr>
+          </a:solidFill>
+          <a:prstDash val="solid"/>
+        </a:ln>
+        <a:ln w="25400" cap="flat" cmpd="sng" algn="ctr">
+          <a:solidFill>
+            <a:schemeClr val="phClr"/>
+          </a:solidFill>
+          <a:prstDash val="solid"/>
+        </a:ln>
+        <a:ln w="38100" cap="flat" cmpd="sng" algn="ctr">
+          <a:solidFill>
+            <a:schemeClr val="phClr"/>
+          </a:solidFill>
+          <a:prstDash val="solid"/>
+        </a:ln>
+      </a:lnStyleLst>
+      <a:effectStyleLst>
+        <a:effectStyle>
+          <a:effectLst>
+            <a:outerShdw blurRad="40000" dist="20000" dir="5400000" rotWithShape="0">
+              <a:srgbClr val="000000">
+                <a:alpha val="38000"/>
+              </a:srgbClr>
+            </a:outerShdw>
+          </a:effectLst>
+        </a:effectStyle>
+        <a:effectStyle>
+          <a:effectLst>
+            <a:outerShdw blurRad="40000" dist="23000" dir="5400000" rotWithShape="0">
+              <a:srgbClr val="000000">
+                <a:alpha val="35000"/>
+              </a:srgbClr>
+            </a:outerShdw>
+          </a:effectLst>
+        </a:effectStyle>
+        <a:effectStyle>
+          <a:effectLst>
+            <a:outerShdw blurRad="40000" dist="23000" dir="5400000" rotWithShape="0">
+              <a:srgbClr val="000000">
+                <a:alpha val="35000"/>
+              </a:srgbClr>
+            </a:outerShdw>
+          </a:effectLst>
+          <a:scene3d>
+            <a:camera prst="orthographicFront">
+              <a:rot lat="0" lon="0" rev="0"/>
+            </a:camera>
+            <a:lightRig rig="threePt" dir="t">
+              <a:rot lat="0" lon="0" rev="1200000"/>
+            </a:lightRig>
+          </a:scene3d>
+          <a:sp3d>
+            <a:bevelT w="63500" h="25400"/>
+          </a:sp3d>
+        </a:effectStyle>
+      </a:effectStyleLst>
+      <a:bgFillStyleLst>
+        <a:solidFill>
+          <a:schemeClr val="phClr"/>
+        </a:solidFill>
+        <a:gradFill rotWithShape="1">
+          <a:gsLst>
+            <a:gs pos="0">
+              <a:schemeClr val="phClr">
+                <a:tint val="40000"/>
+                <a:satMod val="350000"/>
+              </a:schemeClr>
+            </a:gs>
+            <a:gs pos="40000">
+              <a:schemeClr val="phClr">
+                <a:tint val="45000"/>
+                <a:shade val="99000"/>
+                <a:satMod val="350000"/>
+              </a:schemeClr>
+            </a:gs>
+            <a:gs pos="100000">
+              <a:schemeClr val="phClr">
+                <a:shade val="20000"/>
+                <a:satMod val="255000"/>
+              </a:schemeClr>
+            </a:gs>
+          </a:gsLst>
+          <a:path path="circle">
+            <a:fillToRect l="50000" t="-80000" r="50000" b="180000"/>
+          </a:path>
+        </a:gradFill>
+        <a:gradFill rotWithShape="1">
+          <a:gsLst>
+            <a:gs pos="0">
+              <a:schemeClr val="phClr">
+                <a:tint val="80000"/>
+                <a:satMod val="300000"/>
+              </a:schemeClr>
+            </a:gs>
+            <a:gs pos="100000">
+              <a:schemeClr val="phClr">
+                <a:shade val="30000"/>
+                <a:satMod val="200000"/>
+              </a:schemeClr>
+            </a:gs>
+          </a:gsLst>
+          <a:path path="circle">
+            <a:fillToRect l="50000" t="50000" r="50000" b="50000"/>
+          </a:path>
+        </a:gradFill>
+      </a:bgFillStyleLst>
+    </a:fmtScheme>
+  </a:themeElements>
+  <a:objectDefaults>
+    <a:spDef>
+      <a:spPr bwMode="auto">
+        <a:xfrm>
+          <a:off x="0" y="0"/>
+          <a:ext cx="1" cy="1"/>
+        </a:xfrm>
+        <a:custGeom>
+          <a:avLst/>
+          <a:gdLst/>
+          <a:ahLst/>
+          <a:cxnLst/>
+          <a:rect l="0" t="0" r="0" b="0"/>
+          <a:pathLst/>
+        </a:custGeom>
+        <a:noFill/>
+        <a:ln>
+          <a:noFill/>
+        </a:ln>
+        <a:effectLst/>
+        <a:extLst>
+          <a:ext uri="{909E8E84-426E-40DD-AFC4-6F175D3DCCD1}">
+            <a14:hiddenFill xmlns:a14="http://schemas.microsoft.com/office/drawing/2010/main">
+              <a:solidFill>
+                <a:schemeClr val="accent1"/>
+              </a:solidFill>
+            </a14:hiddenFill>
+          </a:ext>
+          <a:ext uri="{91240B29-F687-4F45-9708-019B960494DF}">
+            <a14:hiddenLine xmlns:a14="http://schemas.microsoft.com/office/drawing/2010/main" w="9525" cap="flat" cmpd="sng" algn="ctr">
+              <a:solidFill>
+                <a:schemeClr val="tx1"/>
+              </a:solidFill>
+              <a:prstDash val="solid"/>
+              <a:round/>
+              <a:headEnd type="none" w="med" len="med"/>
+              <a:tailEnd type="none" w="med" len="med"/>
+            </a14:hiddenLine>
+          </a:ext>
+          <a:ext uri="{AF507438-7753-43E0-B8FC-AC1667EBCBE1}">
+            <a14:hiddenEffects xmlns:a14="http://schemas.microsoft.com/office/drawing/2010/main">
+              <a:effectLst>
+                <a:outerShdw dist="35921" dir="2700000" algn="ctr" rotWithShape="0">
+                  <a:schemeClr val="bg2"/>
+                </a:outerShdw>
+              </a:effectLst>
+            </a14:hiddenEffects>
+          </a:ext>
+        </a:extLst>
+      </a:spPr>
+      <a:bodyPr vert="horz" wrap="square" lIns="0" tIns="0" rIns="0" bIns="0" numCol="1" anchor="b" anchorCtr="0" compatLnSpc="1">
+        <a:prstTxWarp prst="textNoShape">
+          <a:avLst/>
+        </a:prstTxWarp>
+      </a:bodyPr>
+      <a:lstStyle>
+        <a:defPPr marL="0" marR="0" indent="0" algn="l" defTabSz="914400" rtl="0" eaLnBrk="0" fontAlgn="base" latinLnBrk="0" hangingPunct="0">
+          <a:lnSpc>
+            <a:spcPct val="100000"/>
+          </a:lnSpc>
+          <a:spcBef>
+            <a:spcPct val="50000"/>
+          </a:spcBef>
+          <a:spcAft>
+            <a:spcPct val="0"/>
+          </a:spcAft>
+          <a:buClrTx/>
+          <a:buSzTx/>
+          <a:buFontTx/>
+          <a:buNone/>
+          <a:tabLst/>
+          <a:defRPr kumimoji="0" lang="en-US" sz="2200" b="0" i="0" u="none" strike="noStrike" cap="none" normalizeH="0" baseline="0" smtClean="0">
+            <a:ln>
+              <a:noFill/>
+            </a:ln>
+            <a:solidFill>
+              <a:schemeClr val="tx1"/>
+            </a:solidFill>
+            <a:effectLst/>
+            <a:latin typeface="Verdana" pitchFamily="34" charset="0"/>
+          </a:defRPr>
+        </a:defPPr>
+      </a:lstStyle>
+    </a:spDef>
+    <a:lnDef>
+      <a:spPr bwMode="auto">
+        <a:xfrm>
+          <a:off x="0" y="0"/>
+          <a:ext cx="1" cy="1"/>
+        </a:xfrm>
+        <a:custGeom>
+          <a:avLst/>
+          <a:gdLst/>
+          <a:ahLst/>
+          <a:cxnLst/>
+          <a:rect l="0" t="0" r="0" b="0"/>
+          <a:pathLst/>
+        </a:custGeom>
+        <a:noFill/>
+        <a:ln>
+          <a:noFill/>
+        </a:ln>
+        <a:effectLst/>
+        <a:extLst>
+          <a:ext uri="{909E8E84-426E-40DD-AFC4-6F175D3DCCD1}">
+            <a14:hiddenFill xmlns:a14="http://schemas.microsoft.com/office/drawing/2010/main">
+              <a:solidFill>
+                <a:schemeClr val="accent1"/>
+              </a:solidFill>
+            </a14:hiddenFill>
+          </a:ext>
+          <a:ext uri="{91240B29-F687-4F45-9708-019B960494DF}">
+            <a14:hiddenLine xmlns:a14="http://schemas.microsoft.com/office/drawing/2010/main" w="9525" cap="flat" cmpd="sng" algn="ctr">
+              <a:solidFill>
+                <a:schemeClr val="tx1"/>
+              </a:solidFill>
+              <a:prstDash val="solid"/>
+              <a:round/>
+              <a:headEnd type="none" w="med" len="med"/>
+              <a:tailEnd type="none" w="med" len="med"/>
+            </a14:hiddenLine>
+          </a:ext>
+          <a:ext uri="{AF507438-7753-43E0-B8FC-AC1667EBCBE1}">
+            <a14:hiddenEffects xmlns:a14="http://schemas.microsoft.com/office/drawing/2010/main">
+              <a:effectLst>
+                <a:outerShdw dist="35921" dir="2700000" algn="ctr" rotWithShape="0">
+                  <a:schemeClr val="bg2"/>
+                </a:outerShdw>
+              </a:effectLst>
+            </a14:hiddenEffects>
+          </a:ext>
+        </a:extLst>
+      </a:spPr>
+      <a:bodyPr vert="horz" wrap="square" lIns="0" tIns="0" rIns="0" bIns="0" numCol="1" anchor="b" anchorCtr="0" compatLnSpc="1">
+        <a:prstTxWarp prst="textNoShape">
+          <a:avLst/>
+        </a:prstTxWarp>
+      </a:bodyPr>
+      <a:lstStyle>
+        <a:defPPr marL="0" marR="0" indent="0" algn="l" defTabSz="914400" rtl="0" eaLnBrk="0" fontAlgn="base" latinLnBrk="0" hangingPunct="0">
+          <a:lnSpc>
+            <a:spcPct val="100000"/>
+          </a:lnSpc>
+          <a:spcBef>
+            <a:spcPct val="50000"/>
+          </a:spcBef>
+          <a:spcAft>
+            <a:spcPct val="0"/>
+          </a:spcAft>
+          <a:buClrTx/>
+          <a:buSzTx/>
+          <a:buFontTx/>
+          <a:buNone/>
+          <a:tabLst/>
+          <a:defRPr kumimoji="0" lang="en-US" sz="2200" b="0" i="0" u="none" strike="noStrike" cap="none" normalizeH="0" baseline="0" smtClean="0">
+            <a:ln>
+              <a:noFill/>
+            </a:ln>
+            <a:solidFill>
+              <a:schemeClr val="tx1"/>
+            </a:solidFill>
+            <a:effectLst/>
+            <a:latin typeface="Verdana" pitchFamily="34" charset="0"/>
+          </a:defRPr>
+        </a:defPPr>
+      </a:lstStyle>
+    </a:lnDef>
+  </a:objectDefaults>
+  <a:extraClrSchemeLst>
+    <a:extraClrScheme>
+      <a:clrScheme name="landmachtNL1 1">
+        <a:dk1>
+          <a:srgbClr val="000000"/>
+        </a:dk1>
+        <a:lt1>
+          <a:srgbClr val="FFFFFF"/>
+        </a:lt1>
+        <a:dk2>
+          <a:srgbClr val="E17000"/>
+        </a:dk2>
+        <a:lt2>
+          <a:srgbClr val="9ACCD4"/>
+        </a:lt2>
+        <a:accent1>
+          <a:srgbClr val="2494C5"/>
+        </a:accent1>
+        <a:accent2>
+          <a:srgbClr val="9ACCD4"/>
+        </a:accent2>
+        <a:accent3>
+          <a:srgbClr val="FFFFFF"/>
+        </a:accent3>
+        <a:accent4>
+          <a:srgbClr val="000000"/>
+        </a:accent4>
+        <a:accent5>
+          <a:srgbClr val="ACC8DF"/>
+        </a:accent5>
+        <a:accent6>
+          <a:srgbClr val="8BB9C0"/>
+        </a:accent6>
+        <a:hlink>
+          <a:srgbClr val="004228"/>
+        </a:hlink>
+        <a:folHlink>
+          <a:srgbClr val="E17000"/>
+        </a:folHlink>
+      </a:clrScheme>
+      <a:clrMap bg1="lt1" tx1="dk1" bg2="lt2" tx2="dk2" accent1="accent1" accent2="accent2" accent3="accent3" accent4="accent4" accent5="accent5" accent6="accent6" hlink="hlink" folHlink="folHlink"/>
+    </a:extraClrScheme>
+  </a:extraClrSchemeLst>
+  <a:extLst>
+    <a:ext uri="{05A4C25C-085E-4340-85A3-A5531E510DB2}">
+      <thm15:themeFamily xmlns:thm15="http://schemas.microsoft.com/office/thememl/2012/main" name="Presentatie_COMMIT_16-9.potx" id="{1445475F-C680-4984-B289-2F11A48A3D2F}" vid="{C2C83AC2-C8C5-4794-9F5F-E1F5002BF5A0}"/>
+    </a:ext>
+  </a:extLst>
+</a:theme>
+</file>
+
+<file path=ppt/theme/theme4.xml><?xml version="1.0" encoding="utf-8"?>
 <a:theme xmlns:a="http://schemas.openxmlformats.org/drawingml/2006/main" name="Office Theme">
   <a:themeElements>
     <a:clrScheme name="">
@@ -27158,7 +31167,7 @@
 </a:theme>
 </file>
 
-<file path=ppt/theme/theme4.xml><?xml version="1.0" encoding="utf-8"?>
+<file path=ppt/theme/theme5.xml><?xml version="1.0" encoding="utf-8"?>
 <a:theme xmlns:a="http://schemas.openxmlformats.org/drawingml/2006/main" name="Office Theme">
   <a:themeElements>
     <a:clrScheme name="">
